--- a/presentation/Trafic_Aerien_ADP_presentation.pptx
+++ b/presentation/Trafic_Aerien_ADP_presentation.pptx
@@ -991,7 +991,7 @@
           <a:p>
             <a:r>
               <a:rPr lang="en-US" dirty="0"/>
-              <a:t>Un dashboard qui affiche une courbe continue là où il n'y a pas de données ment à son lecteur. Chaque limite est écrite à l'écran, à côté du graphique concerné.</a:t>
+              <a:t>Un dashboard qui affiche une courbe continue là où il n'y a pas de données ment à son lecteur. Chaque limite est écrite à l'écran, à côté du graphique concerné. Le relevé de vent à 1 048 mph est le meilleur exemple : une seule ligne aberrante rendait le graphique du vent inutilisable.</a:t>
             </a:r>
             <a:endParaRPr lang="en-US" dirty="0"/>
           </a:p>
@@ -3603,7 +3603,7 @@
                 <a:ea typeface="Cambria" pitchFamily="34" charset="-122"/>
                 <a:cs typeface="Cambria" pitchFamily="34" charset="-120"/>
               </a:rPr>
-              <a:t>Météo limitée à un aéroport</a:t>
+              <a:t>Météo : un aéroport, et un relevé impossible</a:t>
             </a:r>
             <a:endParaRPr lang="en-US" sz="1450" dirty="0"/>
           </a:p>
@@ -3645,7 +3645,7 @@
                 <a:ea typeface="Calibri" pitchFamily="34" charset="-122"/>
                 <a:cs typeface="Calibri" pitchFamily="34" charset="-120"/>
               </a:rPr>
-              <a:t>L'extrait weather.pdf ne couvre qu'EWR, de janvier à mai. L'onglet Météo ne propose donc que cet aéroport plutôt qu'un écran vide sur JFK et LGA.</a:t>
+              <a:t>weather.pdf ne couvre qu'EWR de janvier à mai — l'onglet ne propose donc que cet aéroport. Il contient aussi un vent de 1 048 mph le 12/02, contre 40 mph au second maximum : écarté du tracé et des moyennes.</a:t>
             </a:r>
             <a:endParaRPr lang="en-US" sz="1150" dirty="0"/>
           </a:p>

--- a/presentation/Trafic_Aerien_ADP_presentation.pptx
+++ b/presentation/Trafic_Aerien_ADP_presentation.pptx
@@ -18,9 +18,12 @@
     <p:sldId id="266" r:id="rId12"/>
     <p:sldId id="267" r:id="rId13"/>
     <p:sldId id="268" r:id="rId14"/>
+    <p:sldId id="269" r:id="rId15"/>
+    <p:sldId id="270" r:id="rId16"/>
+    <p:sldId id="271" r:id="rId17"/>
   </p:sldIdLst>
   <p:notesMasterIdLst>
-    <p:notesMasterId r:id="rId15"/>
+    <p:notesMasterId r:id="rId18"/>
   </p:notesMasterIdLst>
   <p:sldSz cx="12192000" cy="6858000"/>
   <p:notesSz cx="6858000" cy="12192000"/>
@@ -903,7 +906,7 @@
           <a:p>
             <a:r>
               <a:rPr lang="en-US" dirty="0"/>
-              <a:t>La définition retenue vient du backend : un vol sans heure de départ ni heure d'arrivée. C'est une convention, pas une donnée d'annulation officielle — il faut le dire.</a:t>
+              <a:t>La corrélation négative s'explique par la marge horaire : les compagnies gonflent le temps de vol prévu sur les longs courriers, ce qui laisse de quoi rattraper. Sur une navette de 90 miles, il n'y a aucune marge.</a:t>
             </a:r>
             <a:endParaRPr lang="en-US" dirty="0"/>
           </a:p>
@@ -991,7 +994,7 @@
           <a:p>
             <a:r>
               <a:rPr lang="en-US" dirty="0"/>
-              <a:t>Un dashboard qui affiche une courbe continue là où il n'y a pas de données ment à son lecteur. Chaque limite est écrite à l'écran, à côté du graphique concerné. Le relevé de vent à 1 048 mph est le meilleur exemple : une seule ligne aberrante rendait le graphique du vent inutilisable.</a:t>
+              <a:t>La définition retenue vient du backend : un vol sans heure de départ ni heure d'arrivée. C'est une convention, pas une donnée d'annulation officielle — il faut le dire.</a:t>
             </a:r>
             <a:endParaRPr lang="en-US" dirty="0"/>
           </a:p>
@@ -1079,7 +1082,7 @@
           <a:p>
             <a:r>
               <a:rPr lang="en-US" dirty="0"/>
-              <a:t>Point important à défendre à l'oral : le frontend n'est pas qu'une couche de peinture, c'est le premier utilisateur de l'API. Ce défaut n'était visible ni dans les tests de l'API ni dans le schéma de la base.</a:t>
+              <a:t>Découverte faite en construisant le modèle prédictif : l'effet du jour de la semaine sortait absurde, avec un mardi à moins 23 pour cent. En testant l'hypothèse d'un autre calendrier, tout s'est remis en place sur 2013. À signaler à l'équipe data, parce que ça touche toute analyse qui utilise le jour de la semaine.</a:t>
             </a:r>
             <a:endParaRPr lang="en-US" dirty="0"/>
           </a:p>
@@ -1167,7 +1170,7 @@
           <a:p>
             <a:r>
               <a:rPr lang="en-US" dirty="0"/>
-              <a:t>Je peux enchaîner sur la démonstration live : onglet Vols pour montrer les filtres côté API, puis la carte.</a:t>
+              <a:t>Le modèle reste volontairement simple, comme l'énoncé le demande : chaque coefficient s'interprète. Point important sur la validation : la référence naïve répète la dernière semaine connue, sans piocher dans la période de test. Ma première version faisait cette erreur et donnait une référence artificiellement imbattable.</a:t>
             </a:r>
             <a:endParaRPr lang="en-US" dirty="0"/>
           </a:p>
@@ -1191,6 +1194,270 @@
             <a:fld id="{F7021451-1387-4CA6-816F-3879F97B5CBC}" type="slidenum">
               <a:rPr lang="en-US"/>
               <a:t>13</a:t>
+            </a:fld>
+            <a:endParaRPr lang="en-US"/>
+          </a:p>
+        </p:txBody>
+      </p:sp>
+    </p:spTree>
+    <p:extLst>
+      <p:ext uri="{BB962C8B-B14F-4D97-AF65-F5344CB8AC3E}">
+        <p14:creationId xmlns:p14="http://schemas.microsoft.com/office/powerpoint/2010/main" val="1024086991"/>
+      </p:ext>
+    </p:extLst>
+  </p:cSld>
+  <p:clrMapOvr>
+    <a:masterClrMapping/>
+  </p:clrMapOvr>
+</p:notes>
+</file>
+
+<file path=ppt/notesSlides/notesSlide14.xml><?xml version="1.0" encoding="utf-8"?>
+<p:notes xmlns:a="http://schemas.openxmlformats.org/drawingml/2006/main" xmlns:r="http://schemas.openxmlformats.org/officeDocument/2006/relationships" xmlns:p="http://schemas.openxmlformats.org/presentationml/2006/main">
+  <p:cSld>
+    <p:spTree>
+      <p:nvGrpSpPr>
+        <p:cNvPr id="1" name=""/>
+        <p:cNvGrpSpPr/>
+        <p:nvPr/>
+      </p:nvGrpSpPr>
+      <p:grpSpPr>
+        <a:xfrm>
+          <a:off x="0" y="0"/>
+          <a:ext cx="0" cy="0"/>
+          <a:chOff x="0" y="0"/>
+          <a:chExt cx="0" cy="0"/>
+        </a:xfrm>
+      </p:grpSpPr>
+      <p:sp>
+        <p:nvSpPr>
+          <p:cNvPr id="2" name="Slide Image Placeholder 1"/>
+          <p:cNvSpPr>
+            <a:spLocks noGrp="1" noRot="1" noChangeAspect="1"/>
+          </p:cNvSpPr>
+          <p:nvPr>
+            <p:ph type="sldImg"/>
+          </p:nvPr>
+        </p:nvSpPr>
+        <p:spPr/>
+      </p:sp>
+      <p:sp>
+        <p:nvSpPr>
+          <p:cNvPr id="3" name="Notes Placeholder 2"/>
+          <p:cNvSpPr>
+            <a:spLocks noGrp="1"/>
+          </p:cNvSpPr>
+          <p:nvPr>
+            <p:ph type="body" idx="1"/>
+          </p:nvPr>
+        </p:nvSpPr>
+        <p:spPr/>
+        <p:txBody>
+          <a:bodyPr/>
+          <a:lstStyle/>
+          <a:p>
+            <a:r>
+              <a:rPr lang="en-US" dirty="0"/>
+              <a:t>Un dashboard qui affiche une courbe continue là où il n'y a pas de données ment à son lecteur. Chaque limite est écrite à l'écran, à côté du graphique concerné. Le relevé de vent à 1 048 mph est le meilleur exemple : une seule ligne aberrante rendait le graphique du vent inutilisable.</a:t>
+            </a:r>
+            <a:endParaRPr lang="en-US" dirty="0"/>
+          </a:p>
+        </p:txBody>
+      </p:sp>
+      <p:sp>
+        <p:nvSpPr>
+          <p:cNvPr id="4" name="Slide Number Placeholder 3"/>
+          <p:cNvSpPr>
+            <a:spLocks noGrp="1"/>
+          </p:cNvSpPr>
+          <p:nvPr>
+            <p:ph type="sldNum" sz="quarter" idx="10"/>
+          </p:nvPr>
+        </p:nvSpPr>
+        <p:spPr/>
+        <p:txBody>
+          <a:bodyPr/>
+          <a:lstStyle/>
+          <a:p>
+            <a:fld id="{F7021451-1387-4CA6-816F-3879F97B5CBC}" type="slidenum">
+              <a:rPr lang="en-US"/>
+              <a:t>14</a:t>
+            </a:fld>
+            <a:endParaRPr lang="en-US"/>
+          </a:p>
+        </p:txBody>
+      </p:sp>
+    </p:spTree>
+    <p:extLst>
+      <p:ext uri="{BB962C8B-B14F-4D97-AF65-F5344CB8AC3E}">
+        <p14:creationId xmlns:p14="http://schemas.microsoft.com/office/powerpoint/2010/main" val="1024086991"/>
+      </p:ext>
+    </p:extLst>
+  </p:cSld>
+  <p:clrMapOvr>
+    <a:masterClrMapping/>
+  </p:clrMapOvr>
+</p:notes>
+</file>
+
+<file path=ppt/notesSlides/notesSlide15.xml><?xml version="1.0" encoding="utf-8"?>
+<p:notes xmlns:a="http://schemas.openxmlformats.org/drawingml/2006/main" xmlns:r="http://schemas.openxmlformats.org/officeDocument/2006/relationships" xmlns:p="http://schemas.openxmlformats.org/presentationml/2006/main">
+  <p:cSld>
+    <p:spTree>
+      <p:nvGrpSpPr>
+        <p:cNvPr id="1" name=""/>
+        <p:cNvGrpSpPr/>
+        <p:nvPr/>
+      </p:nvGrpSpPr>
+      <p:grpSpPr>
+        <a:xfrm>
+          <a:off x="0" y="0"/>
+          <a:ext cx="0" cy="0"/>
+          <a:chOff x="0" y="0"/>
+          <a:chExt cx="0" cy="0"/>
+        </a:xfrm>
+      </p:grpSpPr>
+      <p:sp>
+        <p:nvSpPr>
+          <p:cNvPr id="2" name="Slide Image Placeholder 1"/>
+          <p:cNvSpPr>
+            <a:spLocks noGrp="1" noRot="1" noChangeAspect="1"/>
+          </p:cNvSpPr>
+          <p:nvPr>
+            <p:ph type="sldImg"/>
+          </p:nvPr>
+        </p:nvSpPr>
+        <p:spPr/>
+      </p:sp>
+      <p:sp>
+        <p:nvSpPr>
+          <p:cNvPr id="3" name="Notes Placeholder 2"/>
+          <p:cNvSpPr>
+            <a:spLocks noGrp="1"/>
+          </p:cNvSpPr>
+          <p:nvPr>
+            <p:ph type="body" idx="1"/>
+          </p:nvPr>
+        </p:nvSpPr>
+        <p:spPr/>
+        <p:txBody>
+          <a:bodyPr/>
+          <a:lstStyle/>
+          <a:p>
+            <a:r>
+              <a:rPr lang="en-US" dirty="0"/>
+              <a:t>Point important à défendre à l'oral : le frontend n'est pas qu'une couche de peinture, c'est le premier utilisateur de l'API. Ce défaut n'était visible ni dans les tests de l'API ni dans le schéma de la base.</a:t>
+            </a:r>
+            <a:endParaRPr lang="en-US" dirty="0"/>
+          </a:p>
+        </p:txBody>
+      </p:sp>
+      <p:sp>
+        <p:nvSpPr>
+          <p:cNvPr id="4" name="Slide Number Placeholder 3"/>
+          <p:cNvSpPr>
+            <a:spLocks noGrp="1"/>
+          </p:cNvSpPr>
+          <p:nvPr>
+            <p:ph type="sldNum" sz="quarter" idx="10"/>
+          </p:nvPr>
+        </p:nvSpPr>
+        <p:spPr/>
+        <p:txBody>
+          <a:bodyPr/>
+          <a:lstStyle/>
+          <a:p>
+            <a:fld id="{F7021451-1387-4CA6-816F-3879F97B5CBC}" type="slidenum">
+              <a:rPr lang="en-US"/>
+              <a:t>15</a:t>
+            </a:fld>
+            <a:endParaRPr lang="en-US"/>
+          </a:p>
+        </p:txBody>
+      </p:sp>
+    </p:spTree>
+    <p:extLst>
+      <p:ext uri="{BB962C8B-B14F-4D97-AF65-F5344CB8AC3E}">
+        <p14:creationId xmlns:p14="http://schemas.microsoft.com/office/powerpoint/2010/main" val="1024086991"/>
+      </p:ext>
+    </p:extLst>
+  </p:cSld>
+  <p:clrMapOvr>
+    <a:masterClrMapping/>
+  </p:clrMapOvr>
+</p:notes>
+</file>
+
+<file path=ppt/notesSlides/notesSlide16.xml><?xml version="1.0" encoding="utf-8"?>
+<p:notes xmlns:a="http://schemas.openxmlformats.org/drawingml/2006/main" xmlns:r="http://schemas.openxmlformats.org/officeDocument/2006/relationships" xmlns:p="http://schemas.openxmlformats.org/presentationml/2006/main">
+  <p:cSld>
+    <p:spTree>
+      <p:nvGrpSpPr>
+        <p:cNvPr id="1" name=""/>
+        <p:cNvGrpSpPr/>
+        <p:nvPr/>
+      </p:nvGrpSpPr>
+      <p:grpSpPr>
+        <a:xfrm>
+          <a:off x="0" y="0"/>
+          <a:ext cx="0" cy="0"/>
+          <a:chOff x="0" y="0"/>
+          <a:chExt cx="0" cy="0"/>
+        </a:xfrm>
+      </p:grpSpPr>
+      <p:sp>
+        <p:nvSpPr>
+          <p:cNvPr id="2" name="Slide Image Placeholder 1"/>
+          <p:cNvSpPr>
+            <a:spLocks noGrp="1" noRot="1" noChangeAspect="1"/>
+          </p:cNvSpPr>
+          <p:nvPr>
+            <p:ph type="sldImg"/>
+          </p:nvPr>
+        </p:nvSpPr>
+        <p:spPr/>
+      </p:sp>
+      <p:sp>
+        <p:nvSpPr>
+          <p:cNvPr id="3" name="Notes Placeholder 2"/>
+          <p:cNvSpPr>
+            <a:spLocks noGrp="1"/>
+          </p:cNvSpPr>
+          <p:nvPr>
+            <p:ph type="body" idx="1"/>
+          </p:nvPr>
+        </p:nvSpPr>
+        <p:spPr/>
+        <p:txBody>
+          <a:bodyPr/>
+          <a:lstStyle/>
+          <a:p>
+            <a:r>
+              <a:rPr lang="en-US" dirty="0"/>
+              <a:t>Je peux enchaîner sur la démonstration live : onglet Vols pour montrer les filtres côté API, puis la carte.</a:t>
+            </a:r>
+            <a:endParaRPr lang="en-US" dirty="0"/>
+          </a:p>
+        </p:txBody>
+      </p:sp>
+      <p:sp>
+        <p:nvSpPr>
+          <p:cNvPr id="4" name="Slide Number Placeholder 3"/>
+          <p:cNvSpPr>
+            <a:spLocks noGrp="1"/>
+          </p:cNvSpPr>
+          <p:nvPr>
+            <p:ph type="sldNum" sz="quarter" idx="10"/>
+          </p:nvPr>
+        </p:nvSpPr>
+        <p:spPr/>
+        <p:txBody>
+          <a:bodyPr/>
+          <a:lstStyle/>
+          <a:p>
+            <a:fld id="{F7021451-1387-4CA6-816F-3879F97B5CBC}" type="slidenum">
+              <a:rPr lang="en-US"/>
+              <a:t>16</a:t>
             </a:fld>
             <a:endParaRPr lang="en-US"/>
           </a:p>
@@ -1695,7 +1962,7 @@
           <a:p>
             <a:r>
               <a:rPr lang="en-US" dirty="0"/>
-              <a:t>C'est le résultat le plus actionnable : le retard se propage d'un vol au suivant sur la même journée. Un avion parti en retard le matin fait décoller en retard tous ses vols suivants. La recommandation pratique tient en une phrase : réserver tôt le matin.</a:t>
+              <a:t>C'est la visualisation demandée explicitement par l'énoncé. Le point à défendre : comparer des totaux mensuels serait une erreur de méthode, puisque les mois n'ont ni la même longueur ni la même couverture dans nos données. En ramenant au jour observé, les trois aéroports et les douze mois redeviennent comparables.</a:t>
             </a:r>
             <a:endParaRPr lang="en-US" dirty="0"/>
           </a:p>
@@ -1783,7 +2050,7 @@
           <a:p>
             <a:r>
               <a:rPr lang="en-US" dirty="0"/>
-              <a:t>Le piège de cette slide, c'est l'effectif. Hawaiian affiche le meilleur taux mais sur 258 vols, et SkyWest apparaît à 50 % sur huit vols. C'est pourquoi le graphique affiche le nombre de vols de chaque compagnie, et pourquoi je donne aussi la comparaison à effectifs comparables : Delta contre ExpressJet, environ 17 points d'écart.</a:t>
+              <a:t>C'est le résultat le plus actionnable : le retard se propage d'un vol au suivant sur la même journée. Un avion parti en retard le matin fait décoller en retard tous ses vols suivants. La recommandation pratique tient en une phrase : réserver tôt le matin.</a:t>
             </a:r>
             <a:endParaRPr lang="en-US" dirty="0"/>
           </a:p>
@@ -1871,7 +2138,7 @@
           <a:p>
             <a:r>
               <a:rPr lang="en-US" dirty="0"/>
-              <a:t>La corrélation négative s'explique par la marge horaire : les compagnies gonflent le temps de vol prévu sur les longs courriers, ce qui laisse de quoi rattraper. Sur une navette de 90 miles, il n'y a aucune marge.</a:t>
+              <a:t>Le piège de cette slide, c'est l'effectif. Hawaiian affiche le meilleur taux mais sur 258 vols, et SkyWest apparaît à 50 % sur huit vols. C'est pourquoi le graphique affiche le nombre de vols de chaque compagnie, et pourquoi je donne aussi la comparaison à effectifs comparables : Delta contre ExpressJet, environ 17 points d'écart.</a:t>
             </a:r>
             <a:endParaRPr lang="en-US" dirty="0"/>
           </a:p>
@@ -2564,7 +2831,7 @@
                 <a:ea typeface="Calibri" pitchFamily="34" charset="-122"/>
                 <a:cs typeface="Calibri" pitchFamily="34" charset="-120"/>
               </a:rPr>
-              <a:t>RÉSULTAT 6 — ANNULATIONS</a:t>
+              <a:t>RÉSULTAT 5 — DISTANCE ET VITESSE</a:t>
             </a:r>
             <a:endParaRPr lang="en-US" sz="1200" dirty="0"/>
           </a:p>
@@ -2603,7 +2870,7 @@
                 <a:ea typeface="Cambria" pitchFamily="34" charset="-122"/>
                 <a:cs typeface="Cambria" pitchFamily="34" charset="-120"/>
               </a:rPr>
-              <a:t>2,56 % des vols annulés, concentrés sur l'hiver</a:t>
+              <a:t>Plus c'est loin, moins le retard pèse</a:t>
             </a:r>
             <a:endParaRPr lang="en-US" sz="3200" dirty="0"/>
           </a:p>
@@ -2611,7 +2878,7 @@
       </p:sp>
       <p:pic>
         <p:nvPicPr>
-          <p:cNvPr id="4" name="Image 0" descr="/Users/marcuslinguet/Downloads/trafic-aerien-adp/presentation/figures/05_annulations_mensuelles.png">    </p:cNvPr>
+          <p:cNvPr id="4" name="Image 0" descr="/Users/marcuslinguet/Downloads/trafic-aerien-adp/presentation/figures/04_distance_retard.png">    </p:cNvPr>
           <p:cNvPicPr>
             <a:picLocks noChangeAspect="1"/>
           </p:cNvPicPr>
@@ -2642,19 +2909,19 @@
         <p:spPr>
           <a:xfrm>
             <a:off x="8366760" y="1417320"/>
-            <a:ext cx="3246120" cy="1188720"/>
+            <a:ext cx="3246120" cy="1051560"/>
           </a:xfrm>
           <a:prstGeom prst="roundRect">
             <a:avLst>
-              <a:gd name="adj" fmla="val 6154"/>
+              <a:gd name="adj" fmla="val 6957"/>
             </a:avLst>
           </a:prstGeom>
           <a:solidFill>
-            <a:srgbClr val="FBEDE9"/>
+            <a:srgbClr val="0B3C5D"/>
           </a:solidFill>
           <a:ln w="12700">
             <a:solidFill>
-              <a:srgbClr val="FBEDE9"/>
+              <a:srgbClr val="0B3C5D"/>
             </a:solidFill>
             <a:prstDash val="solid"/>
           </a:ln>
@@ -2692,17 +2959,17 @@
               <a:buNone/>
             </a:pPr>
             <a:r>
-              <a:rPr lang="en-US" sz="2600" b="1" dirty="0">
-                <a:solidFill>
-                  <a:srgbClr val="E4572E"/>
+              <a:rPr lang="en-US" sz="2400" b="1" dirty="0">
+                <a:solidFill>
+                  <a:srgbClr val="FFFFFF"/>
                 </a:solidFill>
                 <a:latin typeface="Cambria" pitchFamily="34" charset="0"/>
                 <a:ea typeface="Cambria" pitchFamily="34" charset="-122"/>
                 <a:cs typeface="Cambria" pitchFamily="34" charset="-120"/>
               </a:rPr>
-              <a:t>6 481</a:t>
-            </a:r>
-            <a:endParaRPr lang="en-US" sz="2600" dirty="0"/>
+              <a:t>r = −0,47</a:t>
+            </a:r>
+            <a:endParaRPr lang="en-US" sz="2400" dirty="0"/>
           </a:p>
         </p:txBody>
       </p:sp>
@@ -2715,7 +2982,7 @@
         <p:spPr>
           <a:xfrm>
             <a:off x="8513064" y="2093976"/>
-            <a:ext cx="2953512" cy="402336"/>
+            <a:ext cx="2953512" cy="265176"/>
           </a:xfrm>
           <a:prstGeom prst="rect">
             <a:avLst/>
@@ -2733,13 +3000,13 @@
             <a:r>
               <a:rPr lang="en-US" sz="1150" dirty="0">
                 <a:solidFill>
-                  <a:srgbClr val="5A6B7B"/>
-                </a:solidFill>
-                <a:latin typeface="Calibri" pitchFamily="34" charset="0"/>
-                <a:ea typeface="Calibri" pitchFamily="34" charset="-122"/>
-                <a:cs typeface="Calibri" pitchFamily="34" charset="-120"/>
-              </a:rPr>
-              <a:t>vols annulés sur 252 704</a:t>
+                  <a:srgbClr val="CFE3F1"/>
+                </a:solidFill>
+                <a:latin typeface="Calibri" pitchFamily="34" charset="0"/>
+                <a:ea typeface="Calibri" pitchFamily="34" charset="-122"/>
+                <a:cs typeface="Calibri" pitchFamily="34" charset="-120"/>
+              </a:rPr>
+              <a:t>corrélation distance / retard à l'arrivée, sur 100 destinations</a:t>
             </a:r>
             <a:endParaRPr lang="en-US" sz="1150" dirty="0"/>
           </a:p>
@@ -2753,124 +3020,12 @@
         </p:nvSpPr>
         <p:spPr>
           <a:xfrm>
-            <a:off x="8366760" y="2715768"/>
-            <a:ext cx="3246120" cy="1188720"/>
+            <a:off x="8366760" y="2578608"/>
+            <a:ext cx="3246120" cy="3611880"/>
           </a:xfrm>
           <a:prstGeom prst="roundRect">
             <a:avLst>
-              <a:gd name="adj" fmla="val 6154"/>
-            </a:avLst>
-          </a:prstGeom>
-          <a:solidFill>
-            <a:srgbClr val="E8F1F8"/>
-          </a:solidFill>
-          <a:ln w="12700">
-            <a:solidFill>
-              <a:srgbClr val="E8F1F8"/>
-            </a:solidFill>
-            <a:prstDash val="solid"/>
-          </a:ln>
-          <a:effectLst>
-            <a:outerShdw sx="100000" sy="100000" kx="0" ky="0" algn="bl" rotWithShape="0" blurRad="101600" dist="508" dir="5400000">
-              <a:srgbClr val="9FB3C4">
-                <a:alpha val="28000"/>
-              </a:srgbClr>
-            </a:outerShdw>
-          </a:effectLst>
-        </p:spPr>
-      </p:sp>
-      <p:sp>
-        <p:nvSpPr>
-          <p:cNvPr id="9" name="Text 6"/>
-          <p:cNvSpPr txBox="1"/>
-          <p:nvPr/>
-        </p:nvSpPr>
-        <p:spPr>
-          <a:xfrm>
-            <a:off x="8513064" y="2825496"/>
-            <a:ext cx="2953512" cy="566928"/>
-          </a:xfrm>
-          <a:prstGeom prst="rect">
-            <a:avLst/>
-          </a:prstGeom>
-          <a:noFill/>
-          <a:ln/>
-        </p:spPr>
-        <p:txBody>
-          <a:bodyPr wrap="square" lIns="0" tIns="0" rIns="0" bIns="0" rtlCol="0" anchor="ctr"/>
-          <a:lstStyle/>
-          <a:p>
-            <a:pPr indent="0" marL="0">
-              <a:buNone/>
-            </a:pPr>
-            <a:r>
-              <a:rPr lang="en-US" sz="2600" b="1" dirty="0">
-                <a:solidFill>
-                  <a:srgbClr val="0B3C5D"/>
-                </a:solidFill>
-                <a:latin typeface="Cambria" pitchFamily="34" charset="0"/>
-                <a:ea typeface="Cambria" pitchFamily="34" charset="-122"/>
-                <a:cs typeface="Cambria" pitchFamily="34" charset="-120"/>
-              </a:rPr>
-              <a:t>1 261</a:t>
-            </a:r>
-            <a:endParaRPr lang="en-US" sz="2600" dirty="0"/>
-          </a:p>
-        </p:txBody>
-      </p:sp>
-      <p:sp>
-        <p:nvSpPr>
-          <p:cNvPr id="10" name="Text 7"/>
-          <p:cNvSpPr txBox="1"/>
-          <p:nvPr/>
-        </p:nvSpPr>
-        <p:spPr>
-          <a:xfrm>
-            <a:off x="8513064" y="3392424"/>
-            <a:ext cx="2953512" cy="402336"/>
-          </a:xfrm>
-          <a:prstGeom prst="rect">
-            <a:avLst/>
-          </a:prstGeom>
-          <a:noFill/>
-          <a:ln/>
-        </p:spPr>
-        <p:txBody>
-          <a:bodyPr wrap="square" lIns="0" tIns="0" rIns="0" bIns="0" rtlCol="0" anchor="t"/>
-          <a:lstStyle/>
-          <a:p>
-            <a:pPr indent="0" marL="0">
-              <a:buNone/>
-            </a:pPr>
-            <a:r>
-              <a:rPr lang="en-US" sz="1150" dirty="0">
-                <a:solidFill>
-                  <a:srgbClr val="5A6B7B"/>
-                </a:solidFill>
-                <a:latin typeface="Calibri" pitchFamily="34" charset="0"/>
-                <a:ea typeface="Calibri" pitchFamily="34" charset="-122"/>
-                <a:cs typeface="Calibri" pitchFamily="34" charset="-120"/>
-              </a:rPr>
-              <a:t>annulations en février, le pic de l'année — près du double de la moyenne mensuelle</a:t>
-            </a:r>
-            <a:endParaRPr lang="en-US" sz="1150" dirty="0"/>
-          </a:p>
-        </p:txBody>
-      </p:sp>
-      <p:sp>
-        <p:nvSpPr>
-          <p:cNvPr id="11" name="Shape 8"/>
-          <p:cNvSpPr/>
-          <p:nvPr/>
-        </p:nvSpPr>
-        <p:spPr>
-          <a:xfrm>
-            <a:off x="8366760" y="4014216"/>
-            <a:ext cx="3246120" cy="1645920"/>
-          </a:xfrm>
-          <a:prstGeom prst="roundRect">
-            <a:avLst>
-              <a:gd name="adj" fmla="val 4444"/>
+              <a:gd name="adj" fmla="val 2254"/>
             </a:avLst>
           </a:prstGeom>
           <a:solidFill>
@@ -2893,13 +3048,13 @@
       </p:sp>
       <p:sp>
         <p:nvSpPr>
-          <p:cNvPr id="12" name="Text 9"/>
-          <p:cNvSpPr txBox="1"/>
-          <p:nvPr/>
-        </p:nvSpPr>
-        <p:spPr>
-          <a:xfrm>
-            <a:off x="8549640" y="4123944"/>
+          <p:cNvPr id="9" name="Text 6"/>
+          <p:cNvSpPr txBox="1"/>
+          <p:nvPr/>
+        </p:nvSpPr>
+        <p:spPr>
+          <a:xfrm>
+            <a:off x="8549640" y="2688336"/>
             <a:ext cx="2880360" cy="274320"/>
           </a:xfrm>
           <a:prstGeom prst="rect">
@@ -2924,7 +3079,7 @@
                 <a:ea typeface="Calibri" pitchFamily="34" charset="-122"/>
                 <a:cs typeface="Calibri" pitchFamily="34" charset="-120"/>
               </a:rPr>
-              <a:t>Compagnies les plus touchées</a:t>
+              <a:t>Deux extrêmes de retard</a:t>
             </a:r>
             <a:endParaRPr lang="en-US" sz="1100" dirty="0"/>
           </a:p>
@@ -2932,14 +3087,14 @@
       </p:sp>
       <p:sp>
         <p:nvSpPr>
-          <p:cNvPr id="13" name="Text 10"/>
-          <p:cNvSpPr txBox="1"/>
-          <p:nvPr/>
-        </p:nvSpPr>
-        <p:spPr>
-          <a:xfrm>
-            <a:off x="8549640" y="4434840"/>
-            <a:ext cx="2880360" cy="1143000"/>
+          <p:cNvPr id="10" name="Text 7"/>
+          <p:cNvSpPr txBox="1"/>
+          <p:nvPr/>
+        </p:nvSpPr>
+        <p:spPr>
+          <a:xfrm>
+            <a:off x="8549640" y="2980944"/>
+            <a:ext cx="2880360" cy="1325880"/>
           </a:xfrm>
           <a:prstGeom prst="rect">
             <a:avLst/>
@@ -2958,7 +3113,249 @@
               <a:buNone/>
             </a:pPr>
             <a:r>
-              <a:rPr lang="en-US" sz="1150" dirty="0">
+              <a:rPr lang="en-US" sz="1100" dirty="0">
+                <a:solidFill>
+                  <a:srgbClr val="12202B"/>
+                </a:solidFill>
+                <a:latin typeface="Calibri" pitchFamily="34" charset="0"/>
+                <a:ea typeface="Calibri" pitchFamily="34" charset="-122"/>
+                <a:cs typeface="Calibri" pitchFamily="34" charset="-120"/>
+              </a:rPr>
+              <a:t>PHL, 94 miles → 11,8 min de retard</a:t>
+            </a:r>
+            <a:endParaRPr lang="en-US" sz="1100" dirty="0"/>
+          </a:p>
+          <a:p>
+            <a:pPr indent="0" marL="0">
+              <a:lnSpc>
+                <a:spcPts val="1500"/>
+              </a:lnSpc>
+              <a:buNone/>
+            </a:pPr>
+            <a:r>
+              <a:rPr lang="en-US" sz="1100" dirty="0">
+                <a:solidFill>
+                  <a:srgbClr val="12202B"/>
+                </a:solidFill>
+                <a:latin typeface="Calibri" pitchFamily="34" charset="0"/>
+                <a:ea typeface="Calibri" pitchFamily="34" charset="-122"/>
+                <a:cs typeface="Calibri" pitchFamily="34" charset="-120"/>
+              </a:rPr>
+              <a:t>ALB, 143 miles → 17,5 min</a:t>
+            </a:r>
+            <a:endParaRPr lang="en-US" sz="1100" dirty="0"/>
+          </a:p>
+          <a:p>
+            <a:pPr indent="0" marL="0">
+              <a:lnSpc>
+                <a:spcPts val="1500"/>
+              </a:lnSpc>
+              <a:buNone/>
+            </a:pPr>
+            <a:r>
+              <a:rPr lang="en-US" sz="1100" b="1" dirty="0">
+                <a:solidFill>
+                  <a:srgbClr val="2E9E6B"/>
+                </a:solidFill>
+                <a:latin typeface="Calibri" pitchFamily="34" charset="0"/>
+                <a:ea typeface="Calibri" pitchFamily="34" charset="-122"/>
+                <a:cs typeface="Calibri" pitchFamily="34" charset="-120"/>
+              </a:rPr>
+              <a:t>SFO, 2 578 miles → 0,7 min</a:t>
+            </a:r>
+            <a:endParaRPr lang="en-US" sz="1100" dirty="0"/>
+          </a:p>
+          <a:p>
+            <a:pPr indent="0" marL="0">
+              <a:lnSpc>
+                <a:spcPts val="1500"/>
+              </a:lnSpc>
+              <a:buNone/>
+            </a:pPr>
+            <a:r>
+              <a:rPr lang="en-US" sz="1100" b="1" dirty="0">
+                <a:solidFill>
+                  <a:srgbClr val="2E9E6B"/>
+                </a:solidFill>
+                <a:latin typeface="Calibri" pitchFamily="34" charset="0"/>
+                <a:ea typeface="Calibri" pitchFamily="34" charset="-122"/>
+                <a:cs typeface="Calibri" pitchFamily="34" charset="-120"/>
+              </a:rPr>
+              <a:t>SJC, 2 569 miles → −0,2 min, soit en avance</a:t>
+            </a:r>
+            <a:endParaRPr lang="en-US" sz="1100" dirty="0"/>
+          </a:p>
+        </p:txBody>
+      </p:sp>
+      <p:sp>
+        <p:nvSpPr>
+          <p:cNvPr id="11" name="Text 8"/>
+          <p:cNvSpPr txBox="1"/>
+          <p:nvPr/>
+        </p:nvSpPr>
+        <p:spPr>
+          <a:xfrm>
+            <a:off x="8549640" y="4352544"/>
+            <a:ext cx="2880360" cy="256032"/>
+          </a:xfrm>
+          <a:prstGeom prst="rect">
+            <a:avLst/>
+          </a:prstGeom>
+          <a:noFill/>
+          <a:ln/>
+        </p:spPr>
+        <p:txBody>
+          <a:bodyPr wrap="square" lIns="0" tIns="0" rIns="0" bIns="0" rtlCol="0" anchor="ctr"/>
+          <a:lstStyle/>
+          <a:p>
+            <a:pPr indent="0" marL="0">
+              <a:buNone/>
+            </a:pPr>
+            <a:r>
+              <a:rPr lang="en-US" sz="1100" b="1" dirty="0">
+                <a:solidFill>
+                  <a:srgbClr val="1D8AC1"/>
+                </a:solidFill>
+                <a:latin typeface="Calibri" pitchFamily="34" charset="0"/>
+                <a:ea typeface="Calibri" pitchFamily="34" charset="-122"/>
+                <a:cs typeface="Calibri" pitchFamily="34" charset="-120"/>
+              </a:rPr>
+              <a:t>Et deux extrêmes de distance</a:t>
+            </a:r>
+            <a:endParaRPr lang="en-US" sz="1100" dirty="0"/>
+          </a:p>
+        </p:txBody>
+      </p:sp>
+      <p:sp>
+        <p:nvSpPr>
+          <p:cNvPr id="12" name="Text 9"/>
+          <p:cNvSpPr txBox="1"/>
+          <p:nvPr/>
+        </p:nvSpPr>
+        <p:spPr>
+          <a:xfrm>
+            <a:off x="8549640" y="4608576"/>
+            <a:ext cx="2880360" cy="566928"/>
+          </a:xfrm>
+          <a:prstGeom prst="rect">
+            <a:avLst/>
+          </a:prstGeom>
+          <a:noFill/>
+          <a:ln/>
+        </p:spPr>
+        <p:txBody>
+          <a:bodyPr wrap="square" lIns="0" tIns="0" rIns="0" bIns="0" rtlCol="0" anchor="t"/>
+          <a:lstStyle/>
+          <a:p>
+            <a:pPr indent="0" marL="0">
+              <a:lnSpc>
+                <a:spcPts val="1500"/>
+              </a:lnSpc>
+              <a:buNone/>
+            </a:pPr>
+            <a:r>
+              <a:rPr lang="en-US" sz="1100" dirty="0">
+                <a:solidFill>
+                  <a:srgbClr val="12202B"/>
+                </a:solidFill>
+                <a:latin typeface="Calibri" pitchFamily="34" charset="0"/>
+                <a:ea typeface="Calibri" pitchFamily="34" charset="-122"/>
+                <a:cs typeface="Calibri" pitchFamily="34" charset="-120"/>
+              </a:rPr>
+              <a:t>JFK → HNL, 4 983 mi — le plus long</a:t>
+            </a:r>
+            <a:endParaRPr lang="en-US" sz="1100" dirty="0"/>
+          </a:p>
+          <a:p>
+            <a:pPr indent="0" marL="0">
+              <a:lnSpc>
+                <a:spcPts val="1500"/>
+              </a:lnSpc>
+              <a:buNone/>
+            </a:pPr>
+            <a:r>
+              <a:rPr lang="en-US" sz="1100" dirty="0">
+                <a:solidFill>
+                  <a:srgbClr val="12202B"/>
+                </a:solidFill>
+                <a:latin typeface="Calibri" pitchFamily="34" charset="0"/>
+                <a:ea typeface="Calibri" pitchFamily="34" charset="-122"/>
+                <a:cs typeface="Calibri" pitchFamily="34" charset="-120"/>
+              </a:rPr>
+              <a:t>EWR → PHL, 80 mi — le plus court</a:t>
+            </a:r>
+            <a:endParaRPr lang="en-US" sz="1100" dirty="0"/>
+          </a:p>
+        </p:txBody>
+      </p:sp>
+      <p:sp>
+        <p:nvSpPr>
+          <p:cNvPr id="13" name="Text 10"/>
+          <p:cNvSpPr txBox="1"/>
+          <p:nvPr/>
+        </p:nvSpPr>
+        <p:spPr>
+          <a:xfrm>
+            <a:off x="8549640" y="5266944"/>
+            <a:ext cx="2880360" cy="256032"/>
+          </a:xfrm>
+          <a:prstGeom prst="rect">
+            <a:avLst/>
+          </a:prstGeom>
+          <a:noFill/>
+          <a:ln/>
+        </p:spPr>
+        <p:txBody>
+          <a:bodyPr wrap="square" lIns="0" tIns="0" rIns="0" bIns="0" rtlCol="0" anchor="ctr"/>
+          <a:lstStyle/>
+          <a:p>
+            <a:pPr indent="0" marL="0">
+              <a:buNone/>
+            </a:pPr>
+            <a:r>
+              <a:rPr lang="en-US" sz="1100" b="1" dirty="0">
+                <a:solidFill>
+                  <a:srgbClr val="1D8AC1"/>
+                </a:solidFill>
+                <a:latin typeface="Calibri" pitchFamily="34" charset="0"/>
+                <a:ea typeface="Calibri" pitchFamily="34" charset="-122"/>
+                <a:cs typeface="Calibri" pitchFamily="34" charset="-120"/>
+              </a:rPr>
+              <a:t>Et la vitesse le confirme</a:t>
+            </a:r>
+            <a:endParaRPr lang="en-US" sz="1100" dirty="0"/>
+          </a:p>
+        </p:txBody>
+      </p:sp>
+      <p:sp>
+        <p:nvSpPr>
+          <p:cNvPr id="14" name="Text 11"/>
+          <p:cNvSpPr txBox="1"/>
+          <p:nvPr/>
+        </p:nvSpPr>
+        <p:spPr>
+          <a:xfrm>
+            <a:off x="8549640" y="5522976"/>
+            <a:ext cx="2880360" cy="621792"/>
+          </a:xfrm>
+          <a:prstGeom prst="rect">
+            <a:avLst/>
+          </a:prstGeom>
+          <a:noFill/>
+          <a:ln/>
+        </p:spPr>
+        <p:txBody>
+          <a:bodyPr wrap="square" lIns="0" tIns="0" rIns="0" bIns="0" rtlCol="0" anchor="t"/>
+          <a:lstStyle/>
+          <a:p>
+            <a:pPr indent="0" marL="0">
+              <a:lnSpc>
+                <a:spcPts val="1300"/>
+              </a:lnSpc>
+              <a:buNone/>
+            </a:pPr>
+            <a:r>
+              <a:rPr lang="en-US" sz="1050" dirty="0">
                 <a:solidFill>
                   <a:srgbClr val="5A6B7B"/>
                 </a:solidFill>
@@ -2966,9 +3363,9 @@
                 <a:ea typeface="Calibri" pitchFamily="34" charset="-122"/>
                 <a:cs typeface="Calibri" pitchFamily="34" charset="-120"/>
               </a:rPr>
-              <a:t>EV — ExpressJet, MQ — Envoy Air et 9E — Endeavor concentrent l'essentiel des annulations : des flottes régionales, plus sensibles à la météo.</a:t>
-            </a:r>
-            <a:endParaRPr lang="en-US" sz="1150" dirty="0"/>
+              <a:t>460 mph en moyenne sur les longs courriers contre 180 sur les navettes, soit 282 mph d'écart : sur un vol long, la montée et la descente pèsent peu, et la marge horaire absorbe le retard.</a:t>
+            </a:r>
+            <a:endParaRPr lang="en-US" sz="1050" dirty="0"/>
           </a:p>
         </p:txBody>
       </p:sp>
@@ -3030,7 +3427,7 @@
                 <a:ea typeface="Calibri" pitchFamily="34" charset="-122"/>
                 <a:cs typeface="Calibri" pitchFamily="34" charset="-120"/>
               </a:rPr>
-              <a:t>HONNÊTETÉ MÉTHODOLOGIQUE</a:t>
+              <a:t>RÉSULTAT 6 — ANNULATIONS</a:t>
             </a:r>
             <a:endParaRPr lang="en-US" sz="1200" dirty="0"/>
           </a:p>
@@ -3069,65 +3466,50 @@
                 <a:ea typeface="Cambria" pitchFamily="34" charset="-122"/>
                 <a:cs typeface="Cambria" pitchFamily="34" charset="-120"/>
               </a:rPr>
-              <a:t>Ce que ces données ne permettent pas de dire</a:t>
+              <a:t>2,56 % des vols annulés, concentrés sur l'hiver</a:t>
             </a:r>
             <a:endParaRPr lang="en-US" sz="3200" dirty="0"/>
           </a:p>
         </p:txBody>
       </p:sp>
-      <p:sp>
-        <p:nvSpPr>
-          <p:cNvPr id="4" name="Text 2"/>
-          <p:cNvSpPr txBox="1"/>
-          <p:nvPr/>
-        </p:nvSpPr>
-        <p:spPr>
-          <a:xfrm>
-            <a:off x="566928" y="1298448"/>
-            <a:ext cx="10692079" cy="365760"/>
-          </a:xfrm>
-          <a:prstGeom prst="rect">
-            <a:avLst/>
-          </a:prstGeom>
-          <a:noFill/>
-          <a:ln/>
-        </p:spPr>
-        <p:txBody>
-          <a:bodyPr wrap="square" lIns="0" tIns="0" rIns="0" bIns="0" rtlCol="0" anchor="ctr"/>
-          <a:lstStyle/>
-          <a:p>
-            <a:pPr indent="0" marL="0">
-              <a:buNone/>
-            </a:pPr>
-            <a:r>
-              <a:rPr lang="en-US" sz="1400" dirty="0">
-                <a:solidFill>
-                  <a:srgbClr val="5A6B7B"/>
-                </a:solidFill>
-                <a:latin typeface="Calibri" pitchFamily="34" charset="0"/>
-                <a:ea typeface="Calibri" pitchFamily="34" charset="-122"/>
-                <a:cs typeface="Calibri" pitchFamily="34" charset="-120"/>
-              </a:rPr>
-              <a:t>Quatre limites que le dashboard signale à l'écran plutôt que de les masquer.</a:t>
-            </a:r>
-            <a:endParaRPr lang="en-US" sz="1400" dirty="0"/>
-          </a:p>
-        </p:txBody>
-      </p:sp>
-      <p:sp>
-        <p:nvSpPr>
-          <p:cNvPr id="5" name="Shape 3"/>
+      <p:pic>
+        <p:nvPicPr>
+          <p:cNvPr id="4" name="Image 0" descr="/Users/marcuslinguet/Downloads/trafic-aerien-adp/presentation/figures/05_annulations_mensuelles.png">    </p:cNvPr>
+          <p:cNvPicPr>
+            <a:picLocks noChangeAspect="1"/>
+          </p:cNvPicPr>
+          <p:nvPr/>
+        </p:nvPicPr>
+        <p:blipFill>
+          <a:blip r:embed="rId1"/>
+          <a:stretch>
+            <a:fillRect/>
+          </a:stretch>
+        </p:blipFill>
+        <p:spPr>
+          <a:xfrm>
+            <a:off x="566928" y="1371600"/>
+            <a:ext cx="7589520" cy="4251960"/>
+          </a:xfrm>
+          <a:prstGeom prst="rect">
+            <a:avLst/>
+          </a:prstGeom>
+        </p:spPr>
+      </p:pic>
+      <p:sp>
+        <p:nvSpPr>
+          <p:cNvPr id="5" name="Shape 2"/>
           <p:cNvSpPr/>
           <p:nvPr/>
         </p:nvSpPr>
         <p:spPr>
           <a:xfrm>
-            <a:off x="566928" y="2057400"/>
-            <a:ext cx="5532120" cy="1783080"/>
+            <a:off x="8366760" y="1417320"/>
+            <a:ext cx="3246120" cy="1188720"/>
           </a:xfrm>
           <a:prstGeom prst="roundRect">
             <a:avLst>
-              <a:gd name="adj" fmla="val 4103"/>
+              <a:gd name="adj" fmla="val 6154"/>
             </a:avLst>
           </a:prstGeom>
           <a:solidFill>
@@ -3135,7 +3517,7 @@
           </a:solidFill>
           <a:ln w="12700">
             <a:solidFill>
-              <a:srgbClr val="F3D3C9"/>
+              <a:srgbClr val="FBEDE9"/>
             </a:solidFill>
             <a:prstDash val="solid"/>
           </a:ln>
@@ -3150,117 +3532,165 @@
       </p:sp>
       <p:sp>
         <p:nvSpPr>
-          <p:cNvPr id="6" name="Shape 4"/>
+          <p:cNvPr id="6" name="Text 3"/>
+          <p:cNvSpPr txBox="1"/>
+          <p:nvPr/>
+        </p:nvSpPr>
+        <p:spPr>
+          <a:xfrm>
+            <a:off x="8513064" y="1527048"/>
+            <a:ext cx="2953512" cy="566928"/>
+          </a:xfrm>
+          <a:prstGeom prst="rect">
+            <a:avLst/>
+          </a:prstGeom>
+          <a:noFill/>
+          <a:ln/>
+        </p:spPr>
+        <p:txBody>
+          <a:bodyPr wrap="square" lIns="0" tIns="0" rIns="0" bIns="0" rtlCol="0" anchor="ctr"/>
+          <a:lstStyle/>
+          <a:p>
+            <a:pPr indent="0" marL="0">
+              <a:buNone/>
+            </a:pPr>
+            <a:r>
+              <a:rPr lang="en-US" sz="2600" b="1" dirty="0">
+                <a:solidFill>
+                  <a:srgbClr val="E4572E"/>
+                </a:solidFill>
+                <a:latin typeface="Cambria" pitchFamily="34" charset="0"/>
+                <a:ea typeface="Cambria" pitchFamily="34" charset="-122"/>
+                <a:cs typeface="Cambria" pitchFamily="34" charset="-120"/>
+              </a:rPr>
+              <a:t>6 481</a:t>
+            </a:r>
+            <a:endParaRPr lang="en-US" sz="2600" dirty="0"/>
+          </a:p>
+        </p:txBody>
+      </p:sp>
+      <p:sp>
+        <p:nvSpPr>
+          <p:cNvPr id="7" name="Text 4"/>
+          <p:cNvSpPr txBox="1"/>
+          <p:nvPr/>
+        </p:nvSpPr>
+        <p:spPr>
+          <a:xfrm>
+            <a:off x="8513064" y="2093976"/>
+            <a:ext cx="2953512" cy="402336"/>
+          </a:xfrm>
+          <a:prstGeom prst="rect">
+            <a:avLst/>
+          </a:prstGeom>
+          <a:noFill/>
+          <a:ln/>
+        </p:spPr>
+        <p:txBody>
+          <a:bodyPr wrap="square" lIns="0" tIns="0" rIns="0" bIns="0" rtlCol="0" anchor="t"/>
+          <a:lstStyle/>
+          <a:p>
+            <a:pPr indent="0" marL="0">
+              <a:buNone/>
+            </a:pPr>
+            <a:r>
+              <a:rPr lang="en-US" sz="1150" dirty="0">
+                <a:solidFill>
+                  <a:srgbClr val="5A6B7B"/>
+                </a:solidFill>
+                <a:latin typeface="Calibri" pitchFamily="34" charset="0"/>
+                <a:ea typeface="Calibri" pitchFamily="34" charset="-122"/>
+                <a:cs typeface="Calibri" pitchFamily="34" charset="-120"/>
+              </a:rPr>
+              <a:t>vols annulés sur 252 704</a:t>
+            </a:r>
+            <a:endParaRPr lang="en-US" sz="1150" dirty="0"/>
+          </a:p>
+        </p:txBody>
+      </p:sp>
+      <p:sp>
+        <p:nvSpPr>
+          <p:cNvPr id="8" name="Shape 5"/>
           <p:cNvSpPr/>
           <p:nvPr/>
         </p:nvSpPr>
         <p:spPr>
           <a:xfrm>
-            <a:off x="768096" y="2258568"/>
-            <a:ext cx="310896" cy="310896"/>
-          </a:xfrm>
-          <a:prstGeom prst="ellipse">
-            <a:avLst/>
+            <a:off x="8366760" y="2715768"/>
+            <a:ext cx="3246120" cy="1188720"/>
+          </a:xfrm>
+          <a:prstGeom prst="roundRect">
+            <a:avLst>
+              <a:gd name="adj" fmla="val 6154"/>
+            </a:avLst>
           </a:prstGeom>
           <a:solidFill>
-            <a:srgbClr val="E4572E"/>
+            <a:srgbClr val="E8F1F8"/>
           </a:solidFill>
           <a:ln w="12700">
             <a:solidFill>
-              <a:srgbClr val="E4572E"/>
+              <a:srgbClr val="E8F1F8"/>
             </a:solidFill>
             <a:prstDash val="solid"/>
           </a:ln>
-        </p:spPr>
-      </p:sp>
-      <p:sp>
-        <p:nvSpPr>
-          <p:cNvPr id="7" name="Text 5"/>
-          <p:cNvSpPr txBox="1"/>
-          <p:nvPr/>
-        </p:nvSpPr>
-        <p:spPr>
-          <a:xfrm>
-            <a:off x="768096" y="2286000"/>
-            <a:ext cx="310896" cy="256032"/>
-          </a:xfrm>
-          <a:prstGeom prst="rect">
-            <a:avLst/>
-          </a:prstGeom>
-          <a:noFill/>
-          <a:ln/>
-        </p:spPr>
-        <p:txBody>
-          <a:bodyPr wrap="square" lIns="0" tIns="0" rIns="0" bIns="0" rtlCol="0" anchor="ctr"/>
-          <a:lstStyle/>
-          <a:p>
-            <a:pPr algn="ctr" indent="0" marL="0">
-              <a:buNone/>
-            </a:pPr>
-            <a:r>
-              <a:rPr lang="en-US" sz="1100" b="1" dirty="0">
-                <a:solidFill>
-                  <a:srgbClr val="FFFFFF"/>
-                </a:solidFill>
-                <a:latin typeface="Calibri" pitchFamily="34" charset="0"/>
-                <a:ea typeface="Calibri" pitchFamily="34" charset="-122"/>
-                <a:cs typeface="Calibri" pitchFamily="34" charset="-120"/>
-              </a:rPr>
-              <a:t>1</a:t>
-            </a:r>
-            <a:endParaRPr lang="en-US" sz="1100" dirty="0"/>
-          </a:p>
-        </p:txBody>
-      </p:sp>
-      <p:sp>
-        <p:nvSpPr>
-          <p:cNvPr id="8" name="Text 6"/>
-          <p:cNvSpPr txBox="1"/>
-          <p:nvPr/>
-        </p:nvSpPr>
-        <p:spPr>
-          <a:xfrm>
-            <a:off x="1188720" y="2240280"/>
-            <a:ext cx="4663440" cy="329184"/>
-          </a:xfrm>
-          <a:prstGeom prst="rect">
-            <a:avLst/>
-          </a:prstGeom>
-          <a:noFill/>
-          <a:ln/>
-        </p:spPr>
-        <p:txBody>
-          <a:bodyPr wrap="square" lIns="0" tIns="0" rIns="0" bIns="0" rtlCol="0" anchor="ctr"/>
-          <a:lstStyle/>
-          <a:p>
-            <a:pPr indent="0" marL="0">
-              <a:buNone/>
-            </a:pPr>
-            <a:r>
-              <a:rPr lang="en-US" sz="1450" b="1" dirty="0">
-                <a:solidFill>
-                  <a:srgbClr val="12202B"/>
+          <a:effectLst>
+            <a:outerShdw sx="100000" sy="100000" kx="0" ky="0" algn="bl" rotWithShape="0" blurRad="101600" dist="508" dir="5400000">
+              <a:srgbClr val="9FB3C4">
+                <a:alpha val="28000"/>
+              </a:srgbClr>
+            </a:outerShdw>
+          </a:effectLst>
+        </p:spPr>
+      </p:sp>
+      <p:sp>
+        <p:nvSpPr>
+          <p:cNvPr id="9" name="Text 6"/>
+          <p:cNvSpPr txBox="1"/>
+          <p:nvPr/>
+        </p:nvSpPr>
+        <p:spPr>
+          <a:xfrm>
+            <a:off x="8513064" y="2825496"/>
+            <a:ext cx="2953512" cy="566928"/>
+          </a:xfrm>
+          <a:prstGeom prst="rect">
+            <a:avLst/>
+          </a:prstGeom>
+          <a:noFill/>
+          <a:ln/>
+        </p:spPr>
+        <p:txBody>
+          <a:bodyPr wrap="square" lIns="0" tIns="0" rIns="0" bIns="0" rtlCol="0" anchor="ctr"/>
+          <a:lstStyle/>
+          <a:p>
+            <a:pPr indent="0" marL="0">
+              <a:buNone/>
+            </a:pPr>
+            <a:r>
+              <a:rPr lang="en-US" sz="2600" b="1" dirty="0">
+                <a:solidFill>
+                  <a:srgbClr val="0B3C5D"/>
                 </a:solidFill>
                 <a:latin typeface="Cambria" pitchFamily="34" charset="0"/>
                 <a:ea typeface="Cambria" pitchFamily="34" charset="-122"/>
                 <a:cs typeface="Cambria" pitchFamily="34" charset="-120"/>
               </a:rPr>
-              <a:t>Presque trois mois manquants</a:t>
-            </a:r>
-            <a:endParaRPr lang="en-US" sz="1450" dirty="0"/>
-          </a:p>
-        </p:txBody>
-      </p:sp>
-      <p:sp>
-        <p:nvSpPr>
-          <p:cNvPr id="9" name="Text 7"/>
-          <p:cNvSpPr txBox="1"/>
-          <p:nvPr/>
-        </p:nvSpPr>
-        <p:spPr>
-          <a:xfrm>
-            <a:off x="1188720" y="2624328"/>
-            <a:ext cx="4709160" cy="1097280"/>
+              <a:t>1 261</a:t>
+            </a:r>
+            <a:endParaRPr lang="en-US" sz="2600" dirty="0"/>
+          </a:p>
+        </p:txBody>
+      </p:sp>
+      <p:sp>
+        <p:nvSpPr>
+          <p:cNvPr id="10" name="Text 7"/>
+          <p:cNvSpPr txBox="1"/>
+          <p:nvPr/>
+        </p:nvSpPr>
+        <p:spPr>
+          <a:xfrm>
+            <a:off x="8513064" y="3392424"/>
+            <a:ext cx="2953512" cy="402336"/>
           </a:xfrm>
           <a:prstGeom prst="rect">
             <a:avLst/>
@@ -3273,9 +3703,6 @@
           <a:lstStyle/>
           <a:p>
             <a:pPr indent="0" marL="0">
-              <a:lnSpc>
-                <a:spcPts val="1500"/>
-              </a:lnSpc>
               <a:buNone/>
             </a:pPr>
             <a:r>
@@ -3287,7 +3714,7 @@
                 <a:ea typeface="Calibri" pitchFamily="34" charset="-122"/>
                 <a:cs typeface="Calibri" pitchFamily="34" charset="-120"/>
               </a:rPr>
-              <a:t>flights.xlsx contient 252 704 vols quand l'énoncé en annonce 326 776. Août et septembre sont absents, juillet s'arrête au 3. Toute conclusion sur l'été est impossible.</a:t>
+              <a:t>annulations en février, le pic de l'année — près du double de la moyenne mensuelle</a:t>
             </a:r>
             <a:endParaRPr lang="en-US" sz="1150" dirty="0"/>
           </a:p>
@@ -3295,18 +3722,18 @@
       </p:sp>
       <p:sp>
         <p:nvSpPr>
-          <p:cNvPr id="10" name="Shape 8"/>
+          <p:cNvPr id="11" name="Shape 8"/>
           <p:cNvSpPr/>
           <p:nvPr/>
         </p:nvSpPr>
         <p:spPr>
           <a:xfrm>
-            <a:off x="6373368" y="2057400"/>
-            <a:ext cx="5532120" cy="1783080"/>
+            <a:off x="8366760" y="4014216"/>
+            <a:ext cx="3246120" cy="1645920"/>
           </a:xfrm>
           <a:prstGeom prst="roundRect">
             <a:avLst>
-              <a:gd name="adj" fmla="val 4103"/>
+              <a:gd name="adj" fmla="val 4444"/>
             </a:avLst>
           </a:prstGeom>
           <a:solidFill>
@@ -3329,63 +3756,38 @@
       </p:sp>
       <p:sp>
         <p:nvSpPr>
-          <p:cNvPr id="11" name="Shape 9"/>
-          <p:cNvSpPr/>
-          <p:nvPr/>
-        </p:nvSpPr>
-        <p:spPr>
-          <a:xfrm>
-            <a:off x="6574536" y="2258568"/>
-            <a:ext cx="310896" cy="310896"/>
-          </a:xfrm>
-          <a:prstGeom prst="ellipse">
-            <a:avLst/>
-          </a:prstGeom>
-          <a:solidFill>
-            <a:srgbClr val="1D8AC1"/>
-          </a:solidFill>
-          <a:ln w="12700">
-            <a:solidFill>
-              <a:srgbClr val="1D8AC1"/>
-            </a:solidFill>
-            <a:prstDash val="solid"/>
-          </a:ln>
-        </p:spPr>
-      </p:sp>
-      <p:sp>
-        <p:nvSpPr>
-          <p:cNvPr id="12" name="Text 10"/>
-          <p:cNvSpPr txBox="1"/>
-          <p:nvPr/>
-        </p:nvSpPr>
-        <p:spPr>
-          <a:xfrm>
-            <a:off x="6574536" y="2286000"/>
-            <a:ext cx="310896" cy="256032"/>
-          </a:xfrm>
-          <a:prstGeom prst="rect">
-            <a:avLst/>
-          </a:prstGeom>
-          <a:noFill/>
-          <a:ln/>
-        </p:spPr>
-        <p:txBody>
-          <a:bodyPr wrap="square" lIns="0" tIns="0" rIns="0" bIns="0" rtlCol="0" anchor="ctr"/>
-          <a:lstStyle/>
-          <a:p>
-            <a:pPr algn="ctr" indent="0" marL="0">
+          <p:cNvPr id="12" name="Text 9"/>
+          <p:cNvSpPr txBox="1"/>
+          <p:nvPr/>
+        </p:nvSpPr>
+        <p:spPr>
+          <a:xfrm>
+            <a:off x="8549640" y="4123944"/>
+            <a:ext cx="2880360" cy="274320"/>
+          </a:xfrm>
+          <a:prstGeom prst="rect">
+            <a:avLst/>
+          </a:prstGeom>
+          <a:noFill/>
+          <a:ln/>
+        </p:spPr>
+        <p:txBody>
+          <a:bodyPr wrap="square" lIns="0" tIns="0" rIns="0" bIns="0" rtlCol="0" anchor="ctr"/>
+          <a:lstStyle/>
+          <a:p>
+            <a:pPr indent="0" marL="0">
               <a:buNone/>
             </a:pPr>
             <a:r>
               <a:rPr lang="en-US" sz="1100" b="1" dirty="0">
                 <a:solidFill>
-                  <a:srgbClr val="FFFFFF"/>
-                </a:solidFill>
-                <a:latin typeface="Calibri" pitchFamily="34" charset="0"/>
-                <a:ea typeface="Calibri" pitchFamily="34" charset="-122"/>
-                <a:cs typeface="Calibri" pitchFamily="34" charset="-120"/>
-              </a:rPr>
-              <a:t>2</a:t>
+                  <a:srgbClr val="1D8AC1"/>
+                </a:solidFill>
+                <a:latin typeface="Calibri" pitchFamily="34" charset="0"/>
+                <a:ea typeface="Calibri" pitchFamily="34" charset="-122"/>
+                <a:cs typeface="Calibri" pitchFamily="34" charset="-120"/>
+              </a:rPr>
+              <a:t>Compagnies les plus touchées</a:t>
             </a:r>
             <a:endParaRPr lang="en-US" sz="1100" dirty="0"/>
           </a:p>
@@ -3393,53 +3795,14 @@
       </p:sp>
       <p:sp>
         <p:nvSpPr>
-          <p:cNvPr id="13" name="Text 11"/>
-          <p:cNvSpPr txBox="1"/>
-          <p:nvPr/>
-        </p:nvSpPr>
-        <p:spPr>
-          <a:xfrm>
-            <a:off x="6995160" y="2240280"/>
-            <a:ext cx="4663440" cy="329184"/>
-          </a:xfrm>
-          <a:prstGeom prst="rect">
-            <a:avLst/>
-          </a:prstGeom>
-          <a:noFill/>
-          <a:ln/>
-        </p:spPr>
-        <p:txBody>
-          <a:bodyPr wrap="square" lIns="0" tIns="0" rIns="0" bIns="0" rtlCol="0" anchor="ctr"/>
-          <a:lstStyle/>
-          <a:p>
-            <a:pPr indent="0" marL="0">
-              <a:buNone/>
-            </a:pPr>
-            <a:r>
-              <a:rPr lang="en-US" sz="1450" b="1" dirty="0">
-                <a:solidFill>
-                  <a:srgbClr val="12202B"/>
-                </a:solidFill>
-                <a:latin typeface="Cambria" pitchFamily="34" charset="0"/>
-                <a:ea typeface="Cambria" pitchFamily="34" charset="-122"/>
-                <a:cs typeface="Cambria" pitchFamily="34" charset="-120"/>
-              </a:rPr>
-              <a:t>Independence Day non mesurable</a:t>
-            </a:r>
-            <a:endParaRPr lang="en-US" sz="1450" dirty="0"/>
-          </a:p>
-        </p:txBody>
-      </p:sp>
-      <p:sp>
-        <p:nvSpPr>
-          <p:cNvPr id="14" name="Text 12"/>
-          <p:cNvSpPr txBox="1"/>
-          <p:nvPr/>
-        </p:nvSpPr>
-        <p:spPr>
-          <a:xfrm>
-            <a:off x="6995160" y="2624328"/>
-            <a:ext cx="4709160" cy="1097280"/>
+          <p:cNvPr id="13" name="Text 10"/>
+          <p:cNvSpPr txBox="1"/>
+          <p:nvPr/>
+        </p:nvSpPr>
+        <p:spPr>
+          <a:xfrm>
+            <a:off x="8549640" y="4434840"/>
+            <a:ext cx="2880360" cy="1143000"/>
           </a:xfrm>
           <a:prstGeom prst="rect">
             <a:avLst/>
@@ -3466,365 +3829,7 @@
                 <a:ea typeface="Calibri" pitchFamily="34" charset="-122"/>
                 <a:cs typeface="Calibri" pitchFamily="34" charset="-120"/>
               </a:rPr>
-              <a:t>Le 4 juillet tombe dans le trou. L'API renvoie la ligne avec des champs vides ; le dashboard l'écarte du graphique et l'annonce au lieu d'afficher « NA ».</a:t>
-            </a:r>
-            <a:endParaRPr lang="en-US" sz="1150" dirty="0"/>
-          </a:p>
-        </p:txBody>
-      </p:sp>
-      <p:sp>
-        <p:nvSpPr>
-          <p:cNvPr id="15" name="Shape 13"/>
-          <p:cNvSpPr/>
-          <p:nvPr/>
-        </p:nvSpPr>
-        <p:spPr>
-          <a:xfrm>
-            <a:off x="566928" y="4023360"/>
-            <a:ext cx="5532120" cy="1783080"/>
-          </a:xfrm>
-          <a:prstGeom prst="roundRect">
-            <a:avLst>
-              <a:gd name="adj" fmla="val 4103"/>
-            </a:avLst>
-          </a:prstGeom>
-          <a:solidFill>
-            <a:srgbClr val="E8F1F8"/>
-          </a:solidFill>
-          <a:ln w="12700">
-            <a:solidFill>
-              <a:srgbClr val="CFE3F1"/>
-            </a:solidFill>
-            <a:prstDash val="solid"/>
-          </a:ln>
-          <a:effectLst>
-            <a:outerShdw sx="100000" sy="100000" kx="0" ky="0" algn="bl" rotWithShape="0" blurRad="101600" dist="508" dir="5400000">
-              <a:srgbClr val="9FB3C4">
-                <a:alpha val="28000"/>
-              </a:srgbClr>
-            </a:outerShdw>
-          </a:effectLst>
-        </p:spPr>
-      </p:sp>
-      <p:sp>
-        <p:nvSpPr>
-          <p:cNvPr id="16" name="Shape 14"/>
-          <p:cNvSpPr/>
-          <p:nvPr/>
-        </p:nvSpPr>
-        <p:spPr>
-          <a:xfrm>
-            <a:off x="768096" y="4224528"/>
-            <a:ext cx="310896" cy="310896"/>
-          </a:xfrm>
-          <a:prstGeom prst="ellipse">
-            <a:avLst/>
-          </a:prstGeom>
-          <a:solidFill>
-            <a:srgbClr val="1D8AC1"/>
-          </a:solidFill>
-          <a:ln w="12700">
-            <a:solidFill>
-              <a:srgbClr val="1D8AC1"/>
-            </a:solidFill>
-            <a:prstDash val="solid"/>
-          </a:ln>
-        </p:spPr>
-      </p:sp>
-      <p:sp>
-        <p:nvSpPr>
-          <p:cNvPr id="17" name="Text 15"/>
-          <p:cNvSpPr txBox="1"/>
-          <p:nvPr/>
-        </p:nvSpPr>
-        <p:spPr>
-          <a:xfrm>
-            <a:off x="768096" y="4251960"/>
-            <a:ext cx="310896" cy="256032"/>
-          </a:xfrm>
-          <a:prstGeom prst="rect">
-            <a:avLst/>
-          </a:prstGeom>
-          <a:noFill/>
-          <a:ln/>
-        </p:spPr>
-        <p:txBody>
-          <a:bodyPr wrap="square" lIns="0" tIns="0" rIns="0" bIns="0" rtlCol="0" anchor="ctr"/>
-          <a:lstStyle/>
-          <a:p>
-            <a:pPr algn="ctr" indent="0" marL="0">
-              <a:buNone/>
-            </a:pPr>
-            <a:r>
-              <a:rPr lang="en-US" sz="1100" b="1" dirty="0">
-                <a:solidFill>
-                  <a:srgbClr val="FFFFFF"/>
-                </a:solidFill>
-                <a:latin typeface="Calibri" pitchFamily="34" charset="0"/>
-                <a:ea typeface="Calibri" pitchFamily="34" charset="-122"/>
-                <a:cs typeface="Calibri" pitchFamily="34" charset="-120"/>
-              </a:rPr>
-              <a:t>3</a:t>
-            </a:r>
-            <a:endParaRPr lang="en-US" sz="1100" dirty="0"/>
-          </a:p>
-        </p:txBody>
-      </p:sp>
-      <p:sp>
-        <p:nvSpPr>
-          <p:cNvPr id="18" name="Text 16"/>
-          <p:cNvSpPr txBox="1"/>
-          <p:nvPr/>
-        </p:nvSpPr>
-        <p:spPr>
-          <a:xfrm>
-            <a:off x="1188720" y="4206240"/>
-            <a:ext cx="4663440" cy="329184"/>
-          </a:xfrm>
-          <a:prstGeom prst="rect">
-            <a:avLst/>
-          </a:prstGeom>
-          <a:noFill/>
-          <a:ln/>
-        </p:spPr>
-        <p:txBody>
-          <a:bodyPr wrap="square" lIns="0" tIns="0" rIns="0" bIns="0" rtlCol="0" anchor="ctr"/>
-          <a:lstStyle/>
-          <a:p>
-            <a:pPr indent="0" marL="0">
-              <a:buNone/>
-            </a:pPr>
-            <a:r>
-              <a:rPr lang="en-US" sz="1450" b="1" dirty="0">
-                <a:solidFill>
-                  <a:srgbClr val="12202B"/>
-                </a:solidFill>
-                <a:latin typeface="Cambria" pitchFamily="34" charset="0"/>
-                <a:ea typeface="Cambria" pitchFamily="34" charset="-122"/>
-                <a:cs typeface="Cambria" pitchFamily="34" charset="-120"/>
-              </a:rPr>
-              <a:t>Météo : un aéroport, et un relevé impossible</a:t>
-            </a:r>
-            <a:endParaRPr lang="en-US" sz="1450" dirty="0"/>
-          </a:p>
-        </p:txBody>
-      </p:sp>
-      <p:sp>
-        <p:nvSpPr>
-          <p:cNvPr id="19" name="Text 17"/>
-          <p:cNvSpPr txBox="1"/>
-          <p:nvPr/>
-        </p:nvSpPr>
-        <p:spPr>
-          <a:xfrm>
-            <a:off x="1188720" y="4590288"/>
-            <a:ext cx="4709160" cy="1097280"/>
-          </a:xfrm>
-          <a:prstGeom prst="rect">
-            <a:avLst/>
-          </a:prstGeom>
-          <a:noFill/>
-          <a:ln/>
-        </p:spPr>
-        <p:txBody>
-          <a:bodyPr wrap="square" lIns="0" tIns="0" rIns="0" bIns="0" rtlCol="0" anchor="t"/>
-          <a:lstStyle/>
-          <a:p>
-            <a:pPr indent="0" marL="0">
-              <a:lnSpc>
-                <a:spcPts val="1500"/>
-              </a:lnSpc>
-              <a:buNone/>
-            </a:pPr>
-            <a:r>
-              <a:rPr lang="en-US" sz="1150" dirty="0">
-                <a:solidFill>
-                  <a:srgbClr val="5A6B7B"/>
-                </a:solidFill>
-                <a:latin typeface="Calibri" pitchFamily="34" charset="0"/>
-                <a:ea typeface="Calibri" pitchFamily="34" charset="-122"/>
-                <a:cs typeface="Calibri" pitchFamily="34" charset="-120"/>
-              </a:rPr>
-              <a:t>weather.pdf ne couvre qu'EWR de janvier à mai — l'onglet ne propose donc que cet aéroport. Il contient aussi un vent de 1 048 mph le 12/02, contre 40 mph au second maximum : écarté du tracé et des moyennes.</a:t>
-            </a:r>
-            <a:endParaRPr lang="en-US" sz="1150" dirty="0"/>
-          </a:p>
-        </p:txBody>
-      </p:sp>
-      <p:sp>
-        <p:nvSpPr>
-          <p:cNvPr id="20" name="Shape 18"/>
-          <p:cNvSpPr/>
-          <p:nvPr/>
-        </p:nvSpPr>
-        <p:spPr>
-          <a:xfrm>
-            <a:off x="6373368" y="4023360"/>
-            <a:ext cx="5532120" cy="1783080"/>
-          </a:xfrm>
-          <a:prstGeom prst="roundRect">
-            <a:avLst>
-              <a:gd name="adj" fmla="val 4103"/>
-            </a:avLst>
-          </a:prstGeom>
-          <a:solidFill>
-            <a:srgbClr val="E8F1F8"/>
-          </a:solidFill>
-          <a:ln w="12700">
-            <a:solidFill>
-              <a:srgbClr val="CFE3F1"/>
-            </a:solidFill>
-            <a:prstDash val="solid"/>
-          </a:ln>
-          <a:effectLst>
-            <a:outerShdw sx="100000" sy="100000" kx="0" ky="0" algn="bl" rotWithShape="0" blurRad="101600" dist="508" dir="5400000">
-              <a:srgbClr val="9FB3C4">
-                <a:alpha val="28000"/>
-              </a:srgbClr>
-            </a:outerShdw>
-          </a:effectLst>
-        </p:spPr>
-      </p:sp>
-      <p:sp>
-        <p:nvSpPr>
-          <p:cNvPr id="21" name="Shape 19"/>
-          <p:cNvSpPr/>
-          <p:nvPr/>
-        </p:nvSpPr>
-        <p:spPr>
-          <a:xfrm>
-            <a:off x="6574536" y="4224528"/>
-            <a:ext cx="310896" cy="310896"/>
-          </a:xfrm>
-          <a:prstGeom prst="ellipse">
-            <a:avLst/>
-          </a:prstGeom>
-          <a:solidFill>
-            <a:srgbClr val="1D8AC1"/>
-          </a:solidFill>
-          <a:ln w="12700">
-            <a:solidFill>
-              <a:srgbClr val="1D8AC1"/>
-            </a:solidFill>
-            <a:prstDash val="solid"/>
-          </a:ln>
-        </p:spPr>
-      </p:sp>
-      <p:sp>
-        <p:nvSpPr>
-          <p:cNvPr id="22" name="Text 20"/>
-          <p:cNvSpPr txBox="1"/>
-          <p:nvPr/>
-        </p:nvSpPr>
-        <p:spPr>
-          <a:xfrm>
-            <a:off x="6574536" y="4251960"/>
-            <a:ext cx="310896" cy="256032"/>
-          </a:xfrm>
-          <a:prstGeom prst="rect">
-            <a:avLst/>
-          </a:prstGeom>
-          <a:noFill/>
-          <a:ln/>
-        </p:spPr>
-        <p:txBody>
-          <a:bodyPr wrap="square" lIns="0" tIns="0" rIns="0" bIns="0" rtlCol="0" anchor="ctr"/>
-          <a:lstStyle/>
-          <a:p>
-            <a:pPr algn="ctr" indent="0" marL="0">
-              <a:buNone/>
-            </a:pPr>
-            <a:r>
-              <a:rPr lang="en-US" sz="1100" b="1" dirty="0">
-                <a:solidFill>
-                  <a:srgbClr val="FFFFFF"/>
-                </a:solidFill>
-                <a:latin typeface="Calibri" pitchFamily="34" charset="0"/>
-                <a:ea typeface="Calibri" pitchFamily="34" charset="-122"/>
-                <a:cs typeface="Calibri" pitchFamily="34" charset="-120"/>
-              </a:rPr>
-              <a:t>4</a:t>
-            </a:r>
-            <a:endParaRPr lang="en-US" sz="1100" dirty="0"/>
-          </a:p>
-        </p:txBody>
-      </p:sp>
-      <p:sp>
-        <p:nvSpPr>
-          <p:cNvPr id="23" name="Text 21"/>
-          <p:cNvSpPr txBox="1"/>
-          <p:nvPr/>
-        </p:nvSpPr>
-        <p:spPr>
-          <a:xfrm>
-            <a:off x="6995160" y="4206240"/>
-            <a:ext cx="4663440" cy="329184"/>
-          </a:xfrm>
-          <a:prstGeom prst="rect">
-            <a:avLst/>
-          </a:prstGeom>
-          <a:noFill/>
-          <a:ln/>
-        </p:spPr>
-        <p:txBody>
-          <a:bodyPr wrap="square" lIns="0" tIns="0" rIns="0" bIns="0" rtlCol="0" anchor="ctr"/>
-          <a:lstStyle/>
-          <a:p>
-            <a:pPr indent="0" marL="0">
-              <a:buNone/>
-            </a:pPr>
-            <a:r>
-              <a:rPr lang="en-US" sz="1450" b="1" dirty="0">
-                <a:solidFill>
-                  <a:srgbClr val="12202B"/>
-                </a:solidFill>
-                <a:latin typeface="Cambria" pitchFamily="34" charset="0"/>
-                <a:ea typeface="Cambria" pitchFamily="34" charset="-122"/>
-                <a:cs typeface="Cambria" pitchFamily="34" charset="-120"/>
-              </a:rPr>
-              <a:t>2,56 % d'heures manquantes</a:t>
-            </a:r>
-            <a:endParaRPr lang="en-US" sz="1450" dirty="0"/>
-          </a:p>
-        </p:txBody>
-      </p:sp>
-      <p:sp>
-        <p:nvSpPr>
-          <p:cNvPr id="24" name="Text 22"/>
-          <p:cNvSpPr txBox="1"/>
-          <p:nvPr/>
-        </p:nvSpPr>
-        <p:spPr>
-          <a:xfrm>
-            <a:off x="6995160" y="4590288"/>
-            <a:ext cx="4709160" cy="1097280"/>
-          </a:xfrm>
-          <a:prstGeom prst="rect">
-            <a:avLst/>
-          </a:prstGeom>
-          <a:noFill/>
-          <a:ln/>
-        </p:spPr>
-        <p:txBody>
-          <a:bodyPr wrap="square" lIns="0" tIns="0" rIns="0" bIns="0" rtlCol="0" anchor="t"/>
-          <a:lstStyle/>
-          <a:p>
-            <a:pPr indent="0" marL="0">
-              <a:lnSpc>
-                <a:spcPts val="1500"/>
-              </a:lnSpc>
-              <a:buNone/>
-            </a:pPr>
-            <a:r>
-              <a:rPr lang="en-US" sz="1150" dirty="0">
-                <a:solidFill>
-                  <a:srgbClr val="5A6B7B"/>
-                </a:solidFill>
-                <a:latin typeface="Calibri" pitchFamily="34" charset="0"/>
-                <a:ea typeface="Calibri" pitchFamily="34" charset="-122"/>
-                <a:cs typeface="Calibri" pitchFamily="34" charset="-120"/>
-              </a:rPr>
-              <a:t>Ce sont exactement les vols annulés. Les moyennes de retard portent donc sur 246 223 vols et non 252 704 : le dénominateur change selon l'indicateur.</a:t>
+              <a:t>EV — ExpressJet, MQ — Envoy Air et 9E — Endeavor concentrent l'essentiel des annulations : des flottes régionales, plus sensibles à la météo.</a:t>
             </a:r>
             <a:endParaRPr lang="en-US" sz="1150" dirty="0"/>
           </a:p>
@@ -3927,7 +3932,7 @@
                 <a:ea typeface="Cambria" pitchFamily="34" charset="-122"/>
                 <a:cs typeface="Cambria" pitchFamily="34" charset="-120"/>
               </a:rPr>
-              <a:t>Un endpoint de l'API donnait l'inverse de son intitulé</a:t>
+              <a:t>L'année inscrite dans la base n'est pas celle des données</a:t>
             </a:r>
             <a:endParaRPr lang="en-US" sz="3200" dirty="0"/>
           </a:p>
@@ -3966,7 +3971,7 @@
                 <a:ea typeface="Calibri" pitchFamily="34" charset="-122"/>
                 <a:cs typeface="Calibri" pitchFamily="34" charset="-120"/>
               </a:rPr>
-              <a:t>Construire les écrans oblige à relire les chiffres un par un — c'est ainsi que le défaut est apparu.</a:t>
+              <a:t>Construire un modèle qui utilise le jour de la semaine a suffi à le révéler.</a:t>
             </a:r>
             <a:endParaRPr lang="en-US" sz="1400" dirty="0"/>
           </a:p>
@@ -3981,11 +3986,11 @@
         <p:spPr>
           <a:xfrm>
             <a:off x="566928" y="2011680"/>
-            <a:ext cx="5440680" cy="2286000"/>
+            <a:ext cx="5440680" cy="2148840"/>
           </a:xfrm>
           <a:prstGeom prst="roundRect">
             <a:avLst>
-              <a:gd name="adj" fmla="val 3200"/>
+              <a:gd name="adj" fmla="val 3404"/>
             </a:avLst>
           </a:prstGeom>
           <a:solidFill>
@@ -4015,23 +4020,23 @@
         <p:spPr>
           <a:xfrm>
             <a:off x="786384" y="2139696"/>
-            <a:ext cx="4937760" cy="310896"/>
-          </a:xfrm>
-          <a:prstGeom prst="rect">
-            <a:avLst/>
-          </a:prstGeom>
-          <a:noFill/>
-          <a:ln/>
-        </p:spPr>
-        <p:txBody>
-          <a:bodyPr wrap="square" lIns="0" tIns="0" rIns="0" bIns="0" rtlCol="0" anchor="ctr"/>
-          <a:lstStyle/>
-          <a:p>
-            <a:pPr indent="0" marL="0">
-              <a:buNone/>
-            </a:pPr>
-            <a:r>
-              <a:rPr lang="en-US" sz="1200" b="1" dirty="0">
+            <a:ext cx="4937760" cy="274320"/>
+          </a:xfrm>
+          <a:prstGeom prst="rect">
+            <a:avLst/>
+          </a:prstGeom>
+          <a:noFill/>
+          <a:ln/>
+        </p:spPr>
+        <p:txBody>
+          <a:bodyPr wrap="square" lIns="0" tIns="0" rIns="0" bIns="0" rtlCol="0" anchor="ctr"/>
+          <a:lstStyle/>
+          <a:p>
+            <a:pPr indent="0" marL="0">
+              <a:buNone/>
+            </a:pPr>
+            <a:r>
+              <a:rPr lang="en-US" sz="1100" b="1" dirty="0">
                 <a:solidFill>
                   <a:srgbClr val="E4572E"/>
                 </a:solidFill>
@@ -4039,9 +4044,9 @@
                 <a:ea typeface="Calibri" pitchFamily="34" charset="-122"/>
                 <a:cs typeface="Calibri" pitchFamily="34" charset="-120"/>
               </a:rPr>
-              <a:t>Ce que renvoyait /delays/gain</a:t>
-            </a:r>
-            <a:endParaRPr lang="en-US" sz="1200" dirty="0"/>
+              <a:t>Avec le calendrier 2021 de la base</a:t>
+            </a:r>
+            <a:endParaRPr lang="en-US" sz="1100" dirty="0"/>
           </a:p>
         </p:txBody>
       </p:sp>
@@ -4053,8 +4058,8 @@
         </p:nvSpPr>
         <p:spPr>
           <a:xfrm>
-            <a:off x="786384" y="2514600"/>
-            <a:ext cx="4983480" cy="1645920"/>
+            <a:off x="786384" y="2468880"/>
+            <a:ext cx="4983480" cy="1554480"/>
           </a:xfrm>
           <a:prstGeom prst="rect">
             <a:avLst/>
@@ -4068,12 +4073,12 @@
           <a:p>
             <a:pPr indent="0" marL="0">
               <a:lnSpc>
-                <a:spcPts val="1700"/>
+                <a:spcPts val="1600"/>
               </a:lnSpc>
               <a:buNone/>
             </a:pPr>
             <a:r>
-              <a:rPr lang="en-US" sz="1300" b="1" dirty="0">
+              <a:rPr lang="en-US" sz="1150" dirty="0">
                 <a:solidFill>
                   <a:srgbClr val="12202B"/>
                 </a:solidFill>
@@ -4081,39 +4086,39 @@
                 <a:ea typeface="Calibri" pitchFamily="34" charset="-122"/>
                 <a:cs typeface="Calibri" pitchFamily="34" charset="-120"/>
               </a:rPr>
-              <a:t>gain = arr_delay − dep_delay</a:t>
-            </a:r>
-            <a:endParaRPr lang="en-US" sz="1200" dirty="0"/>
+              <a:t>Le jour le plus creux tombe un mardi : 741 vols</a:t>
+            </a:r>
+            <a:endParaRPr lang="en-US" sz="1150" dirty="0"/>
           </a:p>
           <a:p>
             <a:pPr indent="0" marL="0">
               <a:lnSpc>
-                <a:spcPts val="1700"/>
+                <a:spcPts val="1600"/>
               </a:lnSpc>
               <a:buNone/>
             </a:pPr>
             <a:r>
-              <a:rPr lang="en-US" sz="1200" dirty="0">
-                <a:solidFill>
-                  <a:srgbClr val="5A6B7B"/>
-                </a:solidFill>
-                <a:latin typeface="Calibri" pitchFamily="34" charset="0"/>
-                <a:ea typeface="Calibri" pitchFamily="34" charset="-122"/>
-                <a:cs typeface="Calibri" pitchFamily="34" charset="-120"/>
-              </a:rPr>
-              <a:t>1 363 vols remontés : 121,5 min de retard au départ, 171,3 min à l'arrivée.</a:t>
-            </a:r>
-            <a:endParaRPr lang="en-US" sz="1200" dirty="0"/>
+              <a:rPr lang="en-US" sz="1150" dirty="0">
+                <a:solidFill>
+                  <a:srgbClr val="12202B"/>
+                </a:solidFill>
+                <a:latin typeface="Calibri" pitchFamily="34" charset="0"/>
+                <a:ea typeface="Calibri" pitchFamily="34" charset="-122"/>
+                <a:cs typeface="Calibri" pitchFamily="34" charset="-120"/>
+              </a:rPr>
+              <a:t>Samedi et dimanche ressortent à 940 et 963</a:t>
+            </a:r>
+            <a:endParaRPr lang="en-US" sz="1150" dirty="0"/>
           </a:p>
           <a:p>
             <a:pPr indent="0" marL="0">
               <a:lnSpc>
-                <a:spcPts val="1700"/>
+                <a:spcPts val="1600"/>
               </a:lnSpc>
               <a:buNone/>
             </a:pPr>
             <a:r>
-              <a:rPr lang="en-US" sz="1200" b="1" dirty="0">
+              <a:rPr lang="en-US" sz="1150" b="1" dirty="0">
                 <a:solidFill>
                   <a:srgbClr val="E4572E"/>
                 </a:solidFill>
@@ -4121,9 +4126,9 @@
                 <a:ea typeface="Calibri" pitchFamily="34" charset="-122"/>
                 <a:cs typeface="Calibri" pitchFamily="34" charset="-120"/>
               </a:rPr>
-              <a:t>Ce sont les vols dont le retard s'aggrave en vol, présentés comme un gain.</a:t>
-            </a:r>
-            <a:endParaRPr lang="en-US" sz="1200" dirty="0"/>
+              <a:t>Autrement dit : un trafic qui s'effondrerait en milieu de semaine et resterait plein le week-end. Aucun sens pour du transport aérien.</a:t>
+            </a:r>
+            <a:endParaRPr lang="en-US" sz="1150" dirty="0"/>
           </a:p>
         </p:txBody>
       </p:sp>
@@ -4136,11 +4141,11 @@
         <p:spPr>
           <a:xfrm>
             <a:off x="6355080" y="2011680"/>
-            <a:ext cx="5285232" cy="2286000"/>
+            <a:ext cx="5285232" cy="2148840"/>
           </a:xfrm>
           <a:prstGeom prst="roundRect">
             <a:avLst>
-              <a:gd name="adj" fmla="val 3200"/>
+              <a:gd name="adj" fmla="val 3404"/>
             </a:avLst>
           </a:prstGeom>
           <a:solidFill>
@@ -4170,23 +4175,23 @@
         <p:spPr>
           <a:xfrm>
             <a:off x="6574536" y="2139696"/>
-            <a:ext cx="4846320" cy="310896"/>
-          </a:xfrm>
-          <a:prstGeom prst="rect">
-            <a:avLst/>
-          </a:prstGeom>
-          <a:noFill/>
-          <a:ln/>
-        </p:spPr>
-        <p:txBody>
-          <a:bodyPr wrap="square" lIns="0" tIns="0" rIns="0" bIns="0" rtlCol="0" anchor="ctr"/>
-          <a:lstStyle/>
-          <a:p>
-            <a:pPr indent="0" marL="0">
-              <a:buNone/>
-            </a:pPr>
-            <a:r>
-              <a:rPr lang="en-US" sz="1200" b="1" dirty="0">
+            <a:ext cx="4846320" cy="274320"/>
+          </a:xfrm>
+          <a:prstGeom prst="rect">
+            <a:avLst/>
+          </a:prstGeom>
+          <a:noFill/>
+          <a:ln/>
+        </p:spPr>
+        <p:txBody>
+          <a:bodyPr wrap="square" lIns="0" tIns="0" rIns="0" bIns="0" rtlCol="0" anchor="ctr"/>
+          <a:lstStyle/>
+          <a:p>
+            <a:pPr indent="0" marL="0">
+              <a:buNone/>
+            </a:pPr>
+            <a:r>
+              <a:rPr lang="en-US" sz="1100" b="1" dirty="0">
                 <a:solidFill>
                   <a:srgbClr val="2E9E6B"/>
                 </a:solidFill>
@@ -4194,9 +4199,9 @@
                 <a:ea typeface="Calibri" pitchFamily="34" charset="-122"/>
                 <a:cs typeface="Calibri" pitchFamily="34" charset="-120"/>
               </a:rPr>
-              <a:t>Le vrai rattrapage</a:t>
-            </a:r>
-            <a:endParaRPr lang="en-US" sz="1200" dirty="0"/>
+              <a:t>Avec le calendrier 2013</a:t>
+            </a:r>
+            <a:endParaRPr lang="en-US" sz="1100" dirty="0"/>
           </a:p>
         </p:txBody>
       </p:sp>
@@ -4208,8 +4213,8 @@
         </p:nvSpPr>
         <p:spPr>
           <a:xfrm>
-            <a:off x="6574536" y="2514600"/>
-            <a:ext cx="4846320" cy="1645920"/>
+            <a:off x="6574536" y="2468880"/>
+            <a:ext cx="4846320" cy="1554480"/>
           </a:xfrm>
           <a:prstGeom prst="rect">
             <a:avLst/>
@@ -4223,12 +4228,12 @@
           <a:p>
             <a:pPr indent="0" marL="0">
               <a:lnSpc>
-                <a:spcPts val="1700"/>
+                <a:spcPts val="1600"/>
               </a:lnSpc>
               <a:buNone/>
             </a:pPr>
             <a:r>
-              <a:rPr lang="en-US" sz="1300" b="1" dirty="0">
+              <a:rPr lang="en-US" sz="1150" dirty="0">
                 <a:solidFill>
                   <a:srgbClr val="12202B"/>
                 </a:solidFill>
@@ -4236,39 +4241,39 @@
                 <a:ea typeface="Calibri" pitchFamily="34" charset="-122"/>
                 <a:cs typeface="Calibri" pitchFamily="34" charset="-120"/>
               </a:rPr>
-              <a:t>rattrapage = dep_delay − arr_delay</a:t>
-            </a:r>
-            <a:endParaRPr lang="en-US" sz="1200" dirty="0"/>
+              <a:t>Le creux tombe exactement sur le samedi : 741 vols</a:t>
+            </a:r>
+            <a:endParaRPr lang="en-US" sz="1150" dirty="0"/>
           </a:p>
           <a:p>
             <a:pPr indent="0" marL="0">
               <a:lnSpc>
-                <a:spcPts val="1700"/>
+                <a:spcPts val="1600"/>
               </a:lnSpc>
               <a:buNone/>
             </a:pPr>
             <a:r>
-              <a:rPr lang="en-US" sz="1200" dirty="0">
-                <a:solidFill>
-                  <a:srgbClr val="5A6B7B"/>
-                </a:solidFill>
-                <a:latin typeface="Calibri" pitchFamily="34" charset="0"/>
-                <a:ea typeface="Calibri" pitchFamily="34" charset="-122"/>
-                <a:cs typeface="Calibri" pitchFamily="34" charset="-120"/>
-              </a:rPr>
-              <a:t>Autre population : 132,1 min au départ, 94,8 min à l'arrivée.</a:t>
-            </a:r>
-            <a:endParaRPr lang="en-US" sz="1200" dirty="0"/>
+              <a:rPr lang="en-US" sz="1150" dirty="0">
+                <a:solidFill>
+                  <a:srgbClr val="12202B"/>
+                </a:solidFill>
+                <a:latin typeface="Calibri" pitchFamily="34" charset="0"/>
+                <a:ea typeface="Calibri" pitchFamily="34" charset="-122"/>
+                <a:cs typeface="Calibri" pitchFamily="34" charset="-120"/>
+              </a:rPr>
+              <a:t>Dimanche 888, puis 940 et plus du lundi au vendredi</a:t>
+            </a:r>
+            <a:endParaRPr lang="en-US" sz="1150" dirty="0"/>
           </a:p>
           <a:p>
             <a:pPr indent="0" marL="0">
               <a:lnSpc>
-                <a:spcPts val="1700"/>
+                <a:spcPts val="1600"/>
               </a:lnSpc>
               <a:buNone/>
             </a:pPr>
             <a:r>
-              <a:rPr lang="en-US" sz="1200" b="1" dirty="0">
+              <a:rPr lang="en-US" sz="1150" b="1" dirty="0">
                 <a:solidFill>
                   <a:srgbClr val="2E9E6B"/>
                 </a:solidFill>
@@ -4276,9 +4281,9 @@
                 <a:ea typeface="Calibri" pitchFamily="34" charset="-122"/>
                 <a:cs typeface="Calibri" pitchFamily="34" charset="-120"/>
               </a:rPr>
-              <a:t>Reconstruit dans le dashboard à partir de /flights, sans attendre le correctif.</a:t>
-            </a:r>
-            <a:endParaRPr lang="en-US" sz="1200" dirty="0"/>
+              <a:t>Le profil hebdomadaire classique du transport aérien. Les données sont donc celles de 2013, avec la colonne year réécrite.</a:t>
+            </a:r>
+            <a:endParaRPr lang="en-US" sz="1150" dirty="0"/>
           </a:p>
         </p:txBody>
       </p:sp>
@@ -4290,7 +4295,7 @@
         </p:nvSpPr>
         <p:spPr>
           <a:xfrm>
-            <a:off x="566928" y="4572000"/>
+            <a:off x="566928" y="4434840"/>
             <a:ext cx="5486400" cy="292608"/>
           </a:xfrm>
           <a:prstGeom prst="rect">
@@ -4315,7 +4320,7 @@
                 <a:ea typeface="Cambria" pitchFamily="34" charset="-122"/>
                 <a:cs typeface="Cambria" pitchFamily="34" charset="-120"/>
               </a:rPr>
-              <a:t>Comment le dashboard s'en sort</a:t>
+              <a:t>Ce que ça change</a:t>
             </a:r>
             <a:endParaRPr lang="en-US" sz="1500" dirty="0"/>
           </a:p>
@@ -4329,8 +4334,8 @@
         </p:nvSpPr>
         <p:spPr>
           <a:xfrm>
-            <a:off x="566928" y="4901184"/>
-            <a:ext cx="5486400" cy="1371600"/>
+            <a:off x="566928" y="4754880"/>
+            <a:ext cx="5486400" cy="1463040"/>
           </a:xfrm>
           <a:prstGeom prst="rect">
             <a:avLst/>
@@ -4361,7 +4366,7 @@
                 <a:ea typeface="Calibri" pitchFamily="34" charset="-122"/>
                 <a:cs typeface="Calibri" pitchFamily="34" charset="-120"/>
               </a:rPr>
-              <a:t>Les vols partis avec au moins 1 h de retard sont demandés à /flights, triés par retard à l'arrivée</a:t>
+              <a:t>Sans correction, l'effet du samedi est attribué au mardi et le modèle apprend un rythme faux</a:t>
             </a:r>
             <a:endParaRPr lang="en-US" sz="1200" dirty="0"/>
           </a:p>
@@ -4385,7 +4390,7 @@
                 <a:ea typeface="Calibri" pitchFamily="34" charset="-122"/>
                 <a:cs typeface="Calibri" pitchFamily="34" charset="-120"/>
               </a:rPr>
-              <a:t>Le rattrapage est recalculé côté dashboard et la méthode est affichée sur la carte</a:t>
+              <a:t>L'onglet Prévisions raisonne donc en calendrier 2013 et l'affiche à l'écran</a:t>
             </a:r>
             <a:endParaRPr lang="en-US" sz="1200" dirty="0"/>
           </a:p>
@@ -4409,7 +4414,7 @@
                 <a:ea typeface="Calibri" pitchFamily="34" charset="-122"/>
                 <a:cs typeface="Calibri" pitchFamily="34" charset="-120"/>
               </a:rPr>
-              <a:t>Le correctif côté backend tient en une ligne : inverser la différence et le filtre</a:t>
+              <a:t>Le jeu de référence nycflights13 porte bien sur 2013 : tout concorde</a:t>
             </a:r>
             <a:endParaRPr lang="en-US" sz="1200" dirty="0"/>
           </a:p>
@@ -4423,12 +4428,12 @@
         </p:nvSpPr>
         <p:spPr>
           <a:xfrm>
-            <a:off x="6355080" y="4572000"/>
-            <a:ext cx="5285232" cy="1691640"/>
+            <a:off x="6355080" y="4434840"/>
+            <a:ext cx="5285232" cy="1783080"/>
           </a:xfrm>
           <a:prstGeom prst="roundRect">
             <a:avLst>
-              <a:gd name="adj" fmla="val 4324"/>
+              <a:gd name="adj" fmla="val 4103"/>
             </a:avLst>
           </a:prstGeom>
           <a:solidFill>
@@ -4457,7 +4462,7 @@
         </p:nvSpPr>
         <p:spPr>
           <a:xfrm>
-            <a:off x="6574536" y="4700016"/>
+            <a:off x="6574536" y="4562856"/>
             <a:ext cx="4846320" cy="274320"/>
           </a:xfrm>
           <a:prstGeom prst="rect">
@@ -4482,7 +4487,7 @@
                 <a:ea typeface="Calibri" pitchFamily="34" charset="-122"/>
                 <a:cs typeface="Calibri" pitchFamily="34" charset="-120"/>
               </a:rPr>
-              <a:t>À retenir</a:t>
+              <a:t>La leçon</a:t>
             </a:r>
             <a:endParaRPr lang="en-US" sz="1100" dirty="0"/>
           </a:p>
@@ -4496,8 +4501,8 @@
         </p:nvSpPr>
         <p:spPr>
           <a:xfrm>
-            <a:off x="6574536" y="5010912"/>
-            <a:ext cx="4846320" cy="1143000"/>
+            <a:off x="6574536" y="4873752"/>
+            <a:ext cx="4846320" cy="1188720"/>
           </a:xfrm>
           <a:prstGeom prst="rect">
             <a:avLst/>
@@ -4524,7 +4529,7 @@
                 <a:ea typeface="Calibri" pitchFamily="34" charset="-122"/>
                 <a:cs typeface="Calibri" pitchFamily="34" charset="-120"/>
               </a:rPr>
-              <a:t>Un chiffre qui « sort » du dashboard n'est pas forcément un bug d'affichage : ici l'API répondait 200, la requête SQL était valide, et seule la lecture métier du résultat révélait l'inversion.</a:t>
+              <a:t>Une colonne peut être syntaxiquement valide, contrainte, indexée, et pourtant fausse. Ce n'est pas le schéma qui l'a révélé, c'est un modèle qui s'appuyait dessus pour prédire.</a:t>
             </a:r>
             <a:endParaRPr lang="en-US" sz="1200" dirty="0"/>
           </a:p>
@@ -4541,6 +4546,2109 @@
 <file path=ppt/slides/slide13.xml><?xml version="1.0" encoding="utf-8"?>
 <p:sld xmlns:a="http://schemas.openxmlformats.org/drawingml/2006/main" xmlns:r="http://schemas.openxmlformats.org/officeDocument/2006/relationships" xmlns:p="http://schemas.openxmlformats.org/presentationml/2006/main">
   <p:cSld name="Slide 13">
+    <p:spTree>
+      <p:nvGrpSpPr>
+        <p:cNvPr id="1" name=""/>
+        <p:cNvGrpSpPr/>
+        <p:nvPr/>
+      </p:nvGrpSpPr>
+      <p:grpSpPr>
+        <a:xfrm>
+          <a:off x="0" y="0"/>
+          <a:ext cx="0" cy="0"/>
+          <a:chOff x="0" y="0"/>
+          <a:chExt cx="0" cy="0"/>
+        </a:xfrm>
+      </p:grpSpPr>
+      <p:sp>
+        <p:nvSpPr>
+          <p:cNvPr id="2" name="Text 0"/>
+          <p:cNvSpPr txBox="1"/>
+          <p:nvPr/>
+        </p:nvSpPr>
+        <p:spPr>
+          <a:xfrm>
+            <a:off x="566928" y="384048"/>
+            <a:ext cx="7315200" cy="256032"/>
+          </a:xfrm>
+          <a:prstGeom prst="rect">
+            <a:avLst/>
+          </a:prstGeom>
+          <a:noFill/>
+          <a:ln/>
+        </p:spPr>
+        <p:txBody>
+          <a:bodyPr wrap="square" lIns="0" tIns="0" rIns="0" bIns="0" rtlCol="0" anchor="ctr"/>
+          <a:lstStyle/>
+          <a:p>
+            <a:pPr indent="0" marL="0">
+              <a:buNone/>
+            </a:pPr>
+            <a:r>
+              <a:rPr lang="en-US" sz="1200" b="1" spc="160" kern="0" dirty="0">
+                <a:solidFill>
+                  <a:srgbClr val="1D8AC1"/>
+                </a:solidFill>
+                <a:latin typeface="Calibri" pitchFamily="34" charset="0"/>
+                <a:ea typeface="Calibri" pitchFamily="34" charset="-122"/>
+                <a:cs typeface="Calibri" pitchFamily="34" charset="-120"/>
+              </a:rPr>
+              <a:t>MISSION 3 — ANALYSE PRÉDICTIVE</a:t>
+            </a:r>
+            <a:endParaRPr lang="en-US" sz="1200" dirty="0"/>
+          </a:p>
+        </p:txBody>
+      </p:sp>
+      <p:sp>
+        <p:nvSpPr>
+          <p:cNvPr id="3" name="Text 1"/>
+          <p:cNvSpPr txBox="1"/>
+          <p:nvPr/>
+        </p:nvSpPr>
+        <p:spPr>
+          <a:xfrm>
+            <a:off x="566928" y="640080"/>
+            <a:ext cx="11057839" cy="658368"/>
+          </a:xfrm>
+          <a:prstGeom prst="rect">
+            <a:avLst/>
+          </a:prstGeom>
+          <a:noFill/>
+          <a:ln/>
+        </p:spPr>
+        <p:txBody>
+          <a:bodyPr wrap="square" lIns="0" tIns="0" rIns="0" bIns="0" rtlCol="0" anchor="ctr"/>
+          <a:lstStyle/>
+          <a:p>
+            <a:pPr indent="0" marL="0">
+              <a:buNone/>
+            </a:pPr>
+            <a:r>
+              <a:rPr lang="en-US" sz="3200" b="1" dirty="0">
+                <a:solidFill>
+                  <a:srgbClr val="12202B"/>
+                </a:solidFill>
+                <a:latin typeface="Cambria" pitchFamily="34" charset="0"/>
+                <a:ea typeface="Cambria" pitchFamily="34" charset="-122"/>
+                <a:cs typeface="Cambria" pitchFamily="34" charset="-120"/>
+              </a:rPr>
+              <a:t>Prévoir le trafic à 30 jours, avec 7,3 % d'erreur</a:t>
+            </a:r>
+            <a:endParaRPr lang="en-US" sz="3200" dirty="0"/>
+          </a:p>
+        </p:txBody>
+      </p:sp>
+      <p:pic>
+        <p:nvPicPr>
+          <p:cNvPr id="4" name="Image 0" descr="/Users/marcuslinguet/Downloads/trafic-aerien-adp/presentation/figures/07_prevision_trafic.png">    </p:cNvPr>
+          <p:cNvPicPr>
+            <a:picLocks noChangeAspect="1"/>
+          </p:cNvPicPr>
+          <p:nvPr/>
+        </p:nvPicPr>
+        <p:blipFill>
+          <a:blip r:embed="rId1"/>
+          <a:stretch>
+            <a:fillRect/>
+          </a:stretch>
+        </p:blipFill>
+        <p:spPr>
+          <a:xfrm>
+            <a:off x="566928" y="1371600"/>
+            <a:ext cx="7589520" cy="4251960"/>
+          </a:xfrm>
+          <a:prstGeom prst="rect">
+            <a:avLst/>
+          </a:prstGeom>
+        </p:spPr>
+      </p:pic>
+      <p:sp>
+        <p:nvSpPr>
+          <p:cNvPr id="5" name="Shape 2"/>
+          <p:cNvSpPr/>
+          <p:nvPr/>
+        </p:nvSpPr>
+        <p:spPr>
+          <a:xfrm>
+            <a:off x="8366760" y="1417320"/>
+            <a:ext cx="3246120" cy="1170432"/>
+          </a:xfrm>
+          <a:prstGeom prst="roundRect">
+            <a:avLst>
+              <a:gd name="adj" fmla="val 6250"/>
+            </a:avLst>
+          </a:prstGeom>
+          <a:solidFill>
+            <a:srgbClr val="0B3C5D"/>
+          </a:solidFill>
+          <a:ln w="12700">
+            <a:solidFill>
+              <a:srgbClr val="0B3C5D"/>
+            </a:solidFill>
+            <a:prstDash val="solid"/>
+          </a:ln>
+          <a:effectLst>
+            <a:outerShdw sx="100000" sy="100000" kx="0" ky="0" algn="bl" rotWithShape="0" blurRad="101600" dist="508" dir="5400000">
+              <a:srgbClr val="9FB3C4">
+                <a:alpha val="28000"/>
+              </a:srgbClr>
+            </a:outerShdw>
+          </a:effectLst>
+        </p:spPr>
+      </p:sp>
+      <p:sp>
+        <p:nvSpPr>
+          <p:cNvPr id="6" name="Text 3"/>
+          <p:cNvSpPr txBox="1"/>
+          <p:nvPr/>
+        </p:nvSpPr>
+        <p:spPr>
+          <a:xfrm>
+            <a:off x="8513064" y="1527048"/>
+            <a:ext cx="2953512" cy="566928"/>
+          </a:xfrm>
+          <a:prstGeom prst="rect">
+            <a:avLst/>
+          </a:prstGeom>
+          <a:noFill/>
+          <a:ln/>
+        </p:spPr>
+        <p:txBody>
+          <a:bodyPr wrap="square" lIns="0" tIns="0" rIns="0" bIns="0" rtlCol="0" anchor="ctr"/>
+          <a:lstStyle/>
+          <a:p>
+            <a:pPr indent="0" marL="0">
+              <a:buNone/>
+            </a:pPr>
+            <a:r>
+              <a:rPr lang="en-US" sz="2600" b="1" dirty="0">
+                <a:solidFill>
+                  <a:srgbClr val="FFFFFF"/>
+                </a:solidFill>
+                <a:latin typeface="Cambria" pitchFamily="34" charset="0"/>
+                <a:ea typeface="Cambria" pitchFamily="34" charset="-122"/>
+                <a:cs typeface="Cambria" pitchFamily="34" charset="-120"/>
+              </a:rPr>
+              <a:t>63 vols</a:t>
+            </a:r>
+            <a:endParaRPr lang="en-US" sz="2600" dirty="0"/>
+          </a:p>
+        </p:txBody>
+      </p:sp>
+      <p:sp>
+        <p:nvSpPr>
+          <p:cNvPr id="7" name="Text 4"/>
+          <p:cNvSpPr txBox="1"/>
+          <p:nvPr/>
+        </p:nvSpPr>
+        <p:spPr>
+          <a:xfrm>
+            <a:off x="8513064" y="2093976"/>
+            <a:ext cx="2953512" cy="384048"/>
+          </a:xfrm>
+          <a:prstGeom prst="rect">
+            <a:avLst/>
+          </a:prstGeom>
+          <a:noFill/>
+          <a:ln/>
+        </p:spPr>
+        <p:txBody>
+          <a:bodyPr wrap="square" lIns="0" tIns="0" rIns="0" bIns="0" rtlCol="0" anchor="t"/>
+          <a:lstStyle/>
+          <a:p>
+            <a:pPr indent="0" marL="0">
+              <a:buNone/>
+            </a:pPr>
+            <a:r>
+              <a:rPr lang="en-US" sz="1150" dirty="0">
+                <a:solidFill>
+                  <a:srgbClr val="CFE3F1"/>
+                </a:solidFill>
+                <a:latin typeface="Calibri" pitchFamily="34" charset="0"/>
+                <a:ea typeface="Calibri" pitchFamily="34" charset="-122"/>
+                <a:cs typeface="Calibri" pitchFamily="34" charset="-120"/>
+              </a:rPr>
+              <a:t>d'erreur moyenne par jour, sur les 28 derniers jours mis de côté</a:t>
+            </a:r>
+            <a:endParaRPr lang="en-US" sz="1150" dirty="0"/>
+          </a:p>
+        </p:txBody>
+      </p:sp>
+      <p:sp>
+        <p:nvSpPr>
+          <p:cNvPr id="8" name="Shape 5"/>
+          <p:cNvSpPr/>
+          <p:nvPr/>
+        </p:nvSpPr>
+        <p:spPr>
+          <a:xfrm>
+            <a:off x="8366760" y="2697480"/>
+            <a:ext cx="3246120" cy="1170432"/>
+          </a:xfrm>
+          <a:prstGeom prst="roundRect">
+            <a:avLst>
+              <a:gd name="adj" fmla="val 6250"/>
+            </a:avLst>
+          </a:prstGeom>
+          <a:solidFill>
+            <a:srgbClr val="EAF6F0"/>
+          </a:solidFill>
+          <a:ln w="12700">
+            <a:solidFill>
+              <a:srgbClr val="EAF6F0"/>
+            </a:solidFill>
+            <a:prstDash val="solid"/>
+          </a:ln>
+          <a:effectLst>
+            <a:outerShdw sx="100000" sy="100000" kx="0" ky="0" algn="bl" rotWithShape="0" blurRad="101600" dist="508" dir="5400000">
+              <a:srgbClr val="9FB3C4">
+                <a:alpha val="28000"/>
+              </a:srgbClr>
+            </a:outerShdw>
+          </a:effectLst>
+        </p:spPr>
+      </p:sp>
+      <p:sp>
+        <p:nvSpPr>
+          <p:cNvPr id="9" name="Text 6"/>
+          <p:cNvSpPr txBox="1"/>
+          <p:nvPr/>
+        </p:nvSpPr>
+        <p:spPr>
+          <a:xfrm>
+            <a:off x="8513064" y="2807208"/>
+            <a:ext cx="2953512" cy="566928"/>
+          </a:xfrm>
+          <a:prstGeom prst="rect">
+            <a:avLst/>
+          </a:prstGeom>
+          <a:noFill/>
+          <a:ln/>
+        </p:spPr>
+        <p:txBody>
+          <a:bodyPr wrap="square" lIns="0" tIns="0" rIns="0" bIns="0" rtlCol="0" anchor="ctr"/>
+          <a:lstStyle/>
+          <a:p>
+            <a:pPr indent="0" marL="0">
+              <a:buNone/>
+            </a:pPr>
+            <a:r>
+              <a:rPr lang="en-US" sz="2600" b="1" dirty="0">
+                <a:solidFill>
+                  <a:srgbClr val="2E9E6B"/>
+                </a:solidFill>
+                <a:latin typeface="Cambria" pitchFamily="34" charset="0"/>
+                <a:ea typeface="Cambria" pitchFamily="34" charset="-122"/>
+                <a:cs typeface="Cambria" pitchFamily="34" charset="-120"/>
+              </a:rPr>
+              <a:t>−61 %</a:t>
+            </a:r>
+            <a:endParaRPr lang="en-US" sz="2600" dirty="0"/>
+          </a:p>
+        </p:txBody>
+      </p:sp>
+      <p:sp>
+        <p:nvSpPr>
+          <p:cNvPr id="10" name="Text 7"/>
+          <p:cNvSpPr txBox="1"/>
+          <p:nvPr/>
+        </p:nvSpPr>
+        <p:spPr>
+          <a:xfrm>
+            <a:off x="8513064" y="3374136"/>
+            <a:ext cx="2953512" cy="384048"/>
+          </a:xfrm>
+          <a:prstGeom prst="rect">
+            <a:avLst/>
+          </a:prstGeom>
+          <a:noFill/>
+          <a:ln/>
+        </p:spPr>
+        <p:txBody>
+          <a:bodyPr wrap="square" lIns="0" tIns="0" rIns="0" bIns="0" rtlCol="0" anchor="t"/>
+          <a:lstStyle/>
+          <a:p>
+            <a:pPr indent="0" marL="0">
+              <a:buNone/>
+            </a:pPr>
+            <a:r>
+              <a:rPr lang="en-US" sz="1150" dirty="0">
+                <a:solidFill>
+                  <a:srgbClr val="5A6B7B"/>
+                </a:solidFill>
+                <a:latin typeface="Calibri" pitchFamily="34" charset="0"/>
+                <a:ea typeface="Calibri" pitchFamily="34" charset="-122"/>
+                <a:cs typeface="Calibri" pitchFamily="34" charset="-120"/>
+              </a:rPr>
+              <a:t>d'erreur par rapport à une référence naïve qui répète la dernière semaine</a:t>
+            </a:r>
+            <a:endParaRPr lang="en-US" sz="1150" dirty="0"/>
+          </a:p>
+        </p:txBody>
+      </p:sp>
+      <p:sp>
+        <p:nvSpPr>
+          <p:cNvPr id="11" name="Shape 8"/>
+          <p:cNvSpPr/>
+          <p:nvPr/>
+        </p:nvSpPr>
+        <p:spPr>
+          <a:xfrm>
+            <a:off x="8366760" y="3977640"/>
+            <a:ext cx="3246120" cy="1645920"/>
+          </a:xfrm>
+          <a:prstGeom prst="roundRect">
+            <a:avLst>
+              <a:gd name="adj" fmla="val 4444"/>
+            </a:avLst>
+          </a:prstGeom>
+          <a:solidFill>
+            <a:srgbClr val="E8F1F8"/>
+          </a:solidFill>
+          <a:ln w="12700">
+            <a:solidFill>
+              <a:srgbClr val="CFE3F1"/>
+            </a:solidFill>
+            <a:prstDash val="solid"/>
+          </a:ln>
+          <a:effectLst>
+            <a:outerShdw sx="100000" sy="100000" kx="0" ky="0" algn="bl" rotWithShape="0" blurRad="101600" dist="508" dir="5400000">
+              <a:srgbClr val="9FB3C4">
+                <a:alpha val="28000"/>
+              </a:srgbClr>
+            </a:outerShdw>
+          </a:effectLst>
+        </p:spPr>
+      </p:sp>
+      <p:sp>
+        <p:nvSpPr>
+          <p:cNvPr id="12" name="Text 9"/>
+          <p:cNvSpPr txBox="1"/>
+          <p:nvPr/>
+        </p:nvSpPr>
+        <p:spPr>
+          <a:xfrm>
+            <a:off x="8549640" y="4087368"/>
+            <a:ext cx="2880360" cy="274320"/>
+          </a:xfrm>
+          <a:prstGeom prst="rect">
+            <a:avLst/>
+          </a:prstGeom>
+          <a:noFill/>
+          <a:ln/>
+        </p:spPr>
+        <p:txBody>
+          <a:bodyPr wrap="square" lIns="0" tIns="0" rIns="0" bIns="0" rtlCol="0" anchor="ctr"/>
+          <a:lstStyle/>
+          <a:p>
+            <a:pPr indent="0" marL="0">
+              <a:buNone/>
+            </a:pPr>
+            <a:r>
+              <a:rPr lang="en-US" sz="1100" b="1" dirty="0">
+                <a:solidFill>
+                  <a:srgbClr val="1D8AC1"/>
+                </a:solidFill>
+                <a:latin typeface="Calibri" pitchFamily="34" charset="0"/>
+                <a:ea typeface="Calibri" pitchFamily="34" charset="-122"/>
+                <a:cs typeface="Calibri" pitchFamily="34" charset="-120"/>
+              </a:rPr>
+              <a:t>Ce que le modèle a appris</a:t>
+            </a:r>
+            <a:endParaRPr lang="en-US" sz="1100" dirty="0"/>
+          </a:p>
+        </p:txBody>
+      </p:sp>
+      <p:sp>
+        <p:nvSpPr>
+          <p:cNvPr id="13" name="Text 10"/>
+          <p:cNvSpPr txBox="1"/>
+          <p:nvPr/>
+        </p:nvSpPr>
+        <p:spPr>
+          <a:xfrm>
+            <a:off x="8549640" y="4389120"/>
+            <a:ext cx="2880360" cy="1143000"/>
+          </a:xfrm>
+          <a:prstGeom prst="rect">
+            <a:avLst/>
+          </a:prstGeom>
+          <a:noFill/>
+          <a:ln/>
+        </p:spPr>
+        <p:txBody>
+          <a:bodyPr wrap="square" lIns="0" tIns="0" rIns="0" bIns="0" rtlCol="0" anchor="t"/>
+          <a:lstStyle/>
+          <a:p>
+            <a:pPr indent="0" marL="0">
+              <a:lnSpc>
+                <a:spcPts val="1500"/>
+              </a:lnSpc>
+              <a:buNone/>
+            </a:pPr>
+            <a:r>
+              <a:rPr lang="en-US" sz="1100" b="1" dirty="0">
+                <a:solidFill>
+                  <a:srgbClr val="12202B"/>
+                </a:solidFill>
+                <a:latin typeface="Calibri" pitchFamily="34" charset="0"/>
+                <a:ea typeface="Calibri" pitchFamily="34" charset="-122"/>
+                <a:cs typeface="Calibri" pitchFamily="34" charset="-120"/>
+              </a:rPr>
+              <a:t>Samedi : −24,5 % de trafic</a:t>
+            </a:r>
+            <a:endParaRPr lang="en-US" sz="1100" dirty="0"/>
+          </a:p>
+          <a:p>
+            <a:pPr indent="0" marL="0">
+              <a:lnSpc>
+                <a:spcPts val="1500"/>
+              </a:lnSpc>
+              <a:buNone/>
+            </a:pPr>
+            <a:r>
+              <a:rPr lang="en-US" sz="1100" b="1" dirty="0">
+                <a:solidFill>
+                  <a:srgbClr val="12202B"/>
+                </a:solidFill>
+                <a:latin typeface="Calibri" pitchFamily="34" charset="0"/>
+                <a:ea typeface="Calibri" pitchFamily="34" charset="-122"/>
+                <a:cs typeface="Calibri" pitchFamily="34" charset="-120"/>
+              </a:rPr>
+              <a:t>Jour férié : −25,0 %</a:t>
+            </a:r>
+            <a:endParaRPr lang="en-US" sz="1100" dirty="0"/>
+          </a:p>
+          <a:p>
+            <a:pPr indent="0" marL="0">
+              <a:lnSpc>
+                <a:spcPts val="1500"/>
+              </a:lnSpc>
+              <a:buNone/>
+            </a:pPr>
+            <a:r>
+              <a:rPr lang="en-US" sz="1100" dirty="0">
+                <a:solidFill>
+                  <a:srgbClr val="5A6B7B"/>
+                </a:solidFill>
+                <a:latin typeface="Calibri" pitchFamily="34" charset="0"/>
+                <a:ea typeface="Calibri" pitchFamily="34" charset="-122"/>
+                <a:cs typeface="Calibri" pitchFamily="34" charset="-120"/>
+              </a:rPr>
+              <a:t>Dimanche : −9,4 %, le reste de la semaine à l'équilibre</a:t>
+            </a:r>
+            <a:endParaRPr lang="en-US" sz="1100" dirty="0"/>
+          </a:p>
+        </p:txBody>
+      </p:sp>
+      <p:sp>
+        <p:nvSpPr>
+          <p:cNvPr id="14" name="Text 11"/>
+          <p:cNvSpPr txBox="1"/>
+          <p:nvPr/>
+        </p:nvSpPr>
+        <p:spPr>
+          <a:xfrm>
+            <a:off x="566928" y="5779008"/>
+            <a:ext cx="11057839" cy="274320"/>
+          </a:xfrm>
+          <a:prstGeom prst="rect">
+            <a:avLst/>
+          </a:prstGeom>
+          <a:noFill/>
+          <a:ln/>
+        </p:spPr>
+        <p:txBody>
+          <a:bodyPr wrap="square" lIns="0" tIns="0" rIns="0" bIns="0" rtlCol="0" anchor="ctr"/>
+          <a:lstStyle/>
+          <a:p>
+            <a:pPr indent="0" marL="0">
+              <a:buNone/>
+            </a:pPr>
+            <a:r>
+              <a:rPr lang="en-US" sz="1000" i="1" dirty="0">
+                <a:solidFill>
+                  <a:srgbClr val="5A6B7B"/>
+                </a:solidFill>
+                <a:latin typeface="Calibri" pitchFamily="34" charset="0"/>
+                <a:ea typeface="Calibri" pitchFamily="34" charset="-122"/>
+                <a:cs typeface="Calibri" pitchFamily="34" charset="-120"/>
+              </a:rPr>
+              <a:t>Régression sur le logarithme du trafic : tendance + mois + jour de la semaine + jours fériés. R² ajusté 0,72.</a:t>
+            </a:r>
+            <a:endParaRPr lang="en-US" sz="1000" dirty="0"/>
+          </a:p>
+        </p:txBody>
+      </p:sp>
+    </p:spTree>
+  </p:cSld>
+  <p:clrMapOvr>
+    <a:masterClrMapping/>
+  </p:clrMapOvr>
+</p:sld>
+</file>
+
+<file path=ppt/slides/slide14.xml><?xml version="1.0" encoding="utf-8"?>
+<p:sld xmlns:a="http://schemas.openxmlformats.org/drawingml/2006/main" xmlns:r="http://schemas.openxmlformats.org/officeDocument/2006/relationships" xmlns:p="http://schemas.openxmlformats.org/presentationml/2006/main">
+  <p:cSld name="Slide 14">
+    <p:spTree>
+      <p:nvGrpSpPr>
+        <p:cNvPr id="1" name=""/>
+        <p:cNvGrpSpPr/>
+        <p:nvPr/>
+      </p:nvGrpSpPr>
+      <p:grpSpPr>
+        <a:xfrm>
+          <a:off x="0" y="0"/>
+          <a:ext cx="0" cy="0"/>
+          <a:chOff x="0" y="0"/>
+          <a:chExt cx="0" cy="0"/>
+        </a:xfrm>
+      </p:grpSpPr>
+      <p:sp>
+        <p:nvSpPr>
+          <p:cNvPr id="2" name="Text 0"/>
+          <p:cNvSpPr txBox="1"/>
+          <p:nvPr/>
+        </p:nvSpPr>
+        <p:spPr>
+          <a:xfrm>
+            <a:off x="566928" y="384048"/>
+            <a:ext cx="7315200" cy="256032"/>
+          </a:xfrm>
+          <a:prstGeom prst="rect">
+            <a:avLst/>
+          </a:prstGeom>
+          <a:noFill/>
+          <a:ln/>
+        </p:spPr>
+        <p:txBody>
+          <a:bodyPr wrap="square" lIns="0" tIns="0" rIns="0" bIns="0" rtlCol="0" anchor="ctr"/>
+          <a:lstStyle/>
+          <a:p>
+            <a:pPr indent="0" marL="0">
+              <a:buNone/>
+            </a:pPr>
+            <a:r>
+              <a:rPr lang="en-US" sz="1200" b="1" spc="160" kern="0" dirty="0">
+                <a:solidFill>
+                  <a:srgbClr val="1D8AC1"/>
+                </a:solidFill>
+                <a:latin typeface="Calibri" pitchFamily="34" charset="0"/>
+                <a:ea typeface="Calibri" pitchFamily="34" charset="-122"/>
+                <a:cs typeface="Calibri" pitchFamily="34" charset="-120"/>
+              </a:rPr>
+              <a:t>HONNÊTETÉ MÉTHODOLOGIQUE</a:t>
+            </a:r>
+            <a:endParaRPr lang="en-US" sz="1200" dirty="0"/>
+          </a:p>
+        </p:txBody>
+      </p:sp>
+      <p:sp>
+        <p:nvSpPr>
+          <p:cNvPr id="3" name="Text 1"/>
+          <p:cNvSpPr txBox="1"/>
+          <p:nvPr/>
+        </p:nvSpPr>
+        <p:spPr>
+          <a:xfrm>
+            <a:off x="566928" y="640080"/>
+            <a:ext cx="11057839" cy="658368"/>
+          </a:xfrm>
+          <a:prstGeom prst="rect">
+            <a:avLst/>
+          </a:prstGeom>
+          <a:noFill/>
+          <a:ln/>
+        </p:spPr>
+        <p:txBody>
+          <a:bodyPr wrap="square" lIns="0" tIns="0" rIns="0" bIns="0" rtlCol="0" anchor="ctr"/>
+          <a:lstStyle/>
+          <a:p>
+            <a:pPr indent="0" marL="0">
+              <a:buNone/>
+            </a:pPr>
+            <a:r>
+              <a:rPr lang="en-US" sz="3200" b="1" dirty="0">
+                <a:solidFill>
+                  <a:srgbClr val="12202B"/>
+                </a:solidFill>
+                <a:latin typeface="Cambria" pitchFamily="34" charset="0"/>
+                <a:ea typeface="Cambria" pitchFamily="34" charset="-122"/>
+                <a:cs typeface="Cambria" pitchFamily="34" charset="-120"/>
+              </a:rPr>
+              <a:t>Ce que ces données ne permettent pas de dire</a:t>
+            </a:r>
+            <a:endParaRPr lang="en-US" sz="3200" dirty="0"/>
+          </a:p>
+        </p:txBody>
+      </p:sp>
+      <p:sp>
+        <p:nvSpPr>
+          <p:cNvPr id="4" name="Text 2"/>
+          <p:cNvSpPr txBox="1"/>
+          <p:nvPr/>
+        </p:nvSpPr>
+        <p:spPr>
+          <a:xfrm>
+            <a:off x="566928" y="1298448"/>
+            <a:ext cx="10692079" cy="365760"/>
+          </a:xfrm>
+          <a:prstGeom prst="rect">
+            <a:avLst/>
+          </a:prstGeom>
+          <a:noFill/>
+          <a:ln/>
+        </p:spPr>
+        <p:txBody>
+          <a:bodyPr wrap="square" lIns="0" tIns="0" rIns="0" bIns="0" rtlCol="0" anchor="ctr"/>
+          <a:lstStyle/>
+          <a:p>
+            <a:pPr indent="0" marL="0">
+              <a:buNone/>
+            </a:pPr>
+            <a:r>
+              <a:rPr lang="en-US" sz="1400" dirty="0">
+                <a:solidFill>
+                  <a:srgbClr val="5A6B7B"/>
+                </a:solidFill>
+                <a:latin typeface="Calibri" pitchFamily="34" charset="0"/>
+                <a:ea typeface="Calibri" pitchFamily="34" charset="-122"/>
+                <a:cs typeface="Calibri" pitchFamily="34" charset="-120"/>
+              </a:rPr>
+              <a:t>Quatre limites que le dashboard signale à l'écran plutôt que de les masquer.</a:t>
+            </a:r>
+            <a:endParaRPr lang="en-US" sz="1400" dirty="0"/>
+          </a:p>
+        </p:txBody>
+      </p:sp>
+      <p:sp>
+        <p:nvSpPr>
+          <p:cNvPr id="5" name="Shape 3"/>
+          <p:cNvSpPr/>
+          <p:nvPr/>
+        </p:nvSpPr>
+        <p:spPr>
+          <a:xfrm>
+            <a:off x="566928" y="2057400"/>
+            <a:ext cx="5532120" cy="1783080"/>
+          </a:xfrm>
+          <a:prstGeom prst="roundRect">
+            <a:avLst>
+              <a:gd name="adj" fmla="val 4103"/>
+            </a:avLst>
+          </a:prstGeom>
+          <a:solidFill>
+            <a:srgbClr val="FBEDE9"/>
+          </a:solidFill>
+          <a:ln w="12700">
+            <a:solidFill>
+              <a:srgbClr val="F3D3C9"/>
+            </a:solidFill>
+            <a:prstDash val="solid"/>
+          </a:ln>
+          <a:effectLst>
+            <a:outerShdw sx="100000" sy="100000" kx="0" ky="0" algn="bl" rotWithShape="0" blurRad="101600" dist="508" dir="5400000">
+              <a:srgbClr val="9FB3C4">
+                <a:alpha val="28000"/>
+              </a:srgbClr>
+            </a:outerShdw>
+          </a:effectLst>
+        </p:spPr>
+      </p:sp>
+      <p:sp>
+        <p:nvSpPr>
+          <p:cNvPr id="6" name="Shape 4"/>
+          <p:cNvSpPr/>
+          <p:nvPr/>
+        </p:nvSpPr>
+        <p:spPr>
+          <a:xfrm>
+            <a:off x="768096" y="2258568"/>
+            <a:ext cx="310896" cy="310896"/>
+          </a:xfrm>
+          <a:prstGeom prst="ellipse">
+            <a:avLst/>
+          </a:prstGeom>
+          <a:solidFill>
+            <a:srgbClr val="E4572E"/>
+          </a:solidFill>
+          <a:ln w="12700">
+            <a:solidFill>
+              <a:srgbClr val="E4572E"/>
+            </a:solidFill>
+            <a:prstDash val="solid"/>
+          </a:ln>
+        </p:spPr>
+      </p:sp>
+      <p:sp>
+        <p:nvSpPr>
+          <p:cNvPr id="7" name="Text 5"/>
+          <p:cNvSpPr txBox="1"/>
+          <p:nvPr/>
+        </p:nvSpPr>
+        <p:spPr>
+          <a:xfrm>
+            <a:off x="768096" y="2286000"/>
+            <a:ext cx="310896" cy="256032"/>
+          </a:xfrm>
+          <a:prstGeom prst="rect">
+            <a:avLst/>
+          </a:prstGeom>
+          <a:noFill/>
+          <a:ln/>
+        </p:spPr>
+        <p:txBody>
+          <a:bodyPr wrap="square" lIns="0" tIns="0" rIns="0" bIns="0" rtlCol="0" anchor="ctr"/>
+          <a:lstStyle/>
+          <a:p>
+            <a:pPr algn="ctr" indent="0" marL="0">
+              <a:buNone/>
+            </a:pPr>
+            <a:r>
+              <a:rPr lang="en-US" sz="1100" b="1" dirty="0">
+                <a:solidFill>
+                  <a:srgbClr val="FFFFFF"/>
+                </a:solidFill>
+                <a:latin typeface="Calibri" pitchFamily="34" charset="0"/>
+                <a:ea typeface="Calibri" pitchFamily="34" charset="-122"/>
+                <a:cs typeface="Calibri" pitchFamily="34" charset="-120"/>
+              </a:rPr>
+              <a:t>1</a:t>
+            </a:r>
+            <a:endParaRPr lang="en-US" sz="1100" dirty="0"/>
+          </a:p>
+        </p:txBody>
+      </p:sp>
+      <p:sp>
+        <p:nvSpPr>
+          <p:cNvPr id="8" name="Text 6"/>
+          <p:cNvSpPr txBox="1"/>
+          <p:nvPr/>
+        </p:nvSpPr>
+        <p:spPr>
+          <a:xfrm>
+            <a:off x="1188720" y="2240280"/>
+            <a:ext cx="4663440" cy="329184"/>
+          </a:xfrm>
+          <a:prstGeom prst="rect">
+            <a:avLst/>
+          </a:prstGeom>
+          <a:noFill/>
+          <a:ln/>
+        </p:spPr>
+        <p:txBody>
+          <a:bodyPr wrap="square" lIns="0" tIns="0" rIns="0" bIns="0" rtlCol="0" anchor="ctr"/>
+          <a:lstStyle/>
+          <a:p>
+            <a:pPr indent="0" marL="0">
+              <a:buNone/>
+            </a:pPr>
+            <a:r>
+              <a:rPr lang="en-US" sz="1450" b="1" dirty="0">
+                <a:solidFill>
+                  <a:srgbClr val="12202B"/>
+                </a:solidFill>
+                <a:latin typeface="Cambria" pitchFamily="34" charset="0"/>
+                <a:ea typeface="Cambria" pitchFamily="34" charset="-122"/>
+                <a:cs typeface="Cambria" pitchFamily="34" charset="-120"/>
+              </a:rPr>
+              <a:t>Presque trois mois manquants</a:t>
+            </a:r>
+            <a:endParaRPr lang="en-US" sz="1450" dirty="0"/>
+          </a:p>
+        </p:txBody>
+      </p:sp>
+      <p:sp>
+        <p:nvSpPr>
+          <p:cNvPr id="9" name="Text 7"/>
+          <p:cNvSpPr txBox="1"/>
+          <p:nvPr/>
+        </p:nvSpPr>
+        <p:spPr>
+          <a:xfrm>
+            <a:off x="1188720" y="2624328"/>
+            <a:ext cx="4709160" cy="1097280"/>
+          </a:xfrm>
+          <a:prstGeom prst="rect">
+            <a:avLst/>
+          </a:prstGeom>
+          <a:noFill/>
+          <a:ln/>
+        </p:spPr>
+        <p:txBody>
+          <a:bodyPr wrap="square" lIns="0" tIns="0" rIns="0" bIns="0" rtlCol="0" anchor="t"/>
+          <a:lstStyle/>
+          <a:p>
+            <a:pPr indent="0" marL="0">
+              <a:lnSpc>
+                <a:spcPts val="1500"/>
+              </a:lnSpc>
+              <a:buNone/>
+            </a:pPr>
+            <a:r>
+              <a:rPr lang="en-US" sz="1150" dirty="0">
+                <a:solidFill>
+                  <a:srgbClr val="5A6B7B"/>
+                </a:solidFill>
+                <a:latin typeface="Calibri" pitchFamily="34" charset="0"/>
+                <a:ea typeface="Calibri" pitchFamily="34" charset="-122"/>
+                <a:cs typeface="Calibri" pitchFamily="34" charset="-120"/>
+              </a:rPr>
+              <a:t>flights.xlsx contient 252 704 vols quand l'énoncé en annonce 326 776. Août et septembre sont absents, juillet s'arrête au 3. Toute conclusion sur l'été est impossible.</a:t>
+            </a:r>
+            <a:endParaRPr lang="en-US" sz="1150" dirty="0"/>
+          </a:p>
+        </p:txBody>
+      </p:sp>
+      <p:sp>
+        <p:nvSpPr>
+          <p:cNvPr id="10" name="Shape 8"/>
+          <p:cNvSpPr/>
+          <p:nvPr/>
+        </p:nvSpPr>
+        <p:spPr>
+          <a:xfrm>
+            <a:off x="6373368" y="2057400"/>
+            <a:ext cx="5532120" cy="1783080"/>
+          </a:xfrm>
+          <a:prstGeom prst="roundRect">
+            <a:avLst>
+              <a:gd name="adj" fmla="val 4103"/>
+            </a:avLst>
+          </a:prstGeom>
+          <a:solidFill>
+            <a:srgbClr val="E8F1F8"/>
+          </a:solidFill>
+          <a:ln w="12700">
+            <a:solidFill>
+              <a:srgbClr val="CFE3F1"/>
+            </a:solidFill>
+            <a:prstDash val="solid"/>
+          </a:ln>
+          <a:effectLst>
+            <a:outerShdw sx="100000" sy="100000" kx="0" ky="0" algn="bl" rotWithShape="0" blurRad="101600" dist="508" dir="5400000">
+              <a:srgbClr val="9FB3C4">
+                <a:alpha val="28000"/>
+              </a:srgbClr>
+            </a:outerShdw>
+          </a:effectLst>
+        </p:spPr>
+      </p:sp>
+      <p:sp>
+        <p:nvSpPr>
+          <p:cNvPr id="11" name="Shape 9"/>
+          <p:cNvSpPr/>
+          <p:nvPr/>
+        </p:nvSpPr>
+        <p:spPr>
+          <a:xfrm>
+            <a:off x="6574536" y="2258568"/>
+            <a:ext cx="310896" cy="310896"/>
+          </a:xfrm>
+          <a:prstGeom prst="ellipse">
+            <a:avLst/>
+          </a:prstGeom>
+          <a:solidFill>
+            <a:srgbClr val="1D8AC1"/>
+          </a:solidFill>
+          <a:ln w="12700">
+            <a:solidFill>
+              <a:srgbClr val="1D8AC1"/>
+            </a:solidFill>
+            <a:prstDash val="solid"/>
+          </a:ln>
+        </p:spPr>
+      </p:sp>
+      <p:sp>
+        <p:nvSpPr>
+          <p:cNvPr id="12" name="Text 10"/>
+          <p:cNvSpPr txBox="1"/>
+          <p:nvPr/>
+        </p:nvSpPr>
+        <p:spPr>
+          <a:xfrm>
+            <a:off x="6574536" y="2286000"/>
+            <a:ext cx="310896" cy="256032"/>
+          </a:xfrm>
+          <a:prstGeom prst="rect">
+            <a:avLst/>
+          </a:prstGeom>
+          <a:noFill/>
+          <a:ln/>
+        </p:spPr>
+        <p:txBody>
+          <a:bodyPr wrap="square" lIns="0" tIns="0" rIns="0" bIns="0" rtlCol="0" anchor="ctr"/>
+          <a:lstStyle/>
+          <a:p>
+            <a:pPr algn="ctr" indent="0" marL="0">
+              <a:buNone/>
+            </a:pPr>
+            <a:r>
+              <a:rPr lang="en-US" sz="1100" b="1" dirty="0">
+                <a:solidFill>
+                  <a:srgbClr val="FFFFFF"/>
+                </a:solidFill>
+                <a:latin typeface="Calibri" pitchFamily="34" charset="0"/>
+                <a:ea typeface="Calibri" pitchFamily="34" charset="-122"/>
+                <a:cs typeface="Calibri" pitchFamily="34" charset="-120"/>
+              </a:rPr>
+              <a:t>2</a:t>
+            </a:r>
+            <a:endParaRPr lang="en-US" sz="1100" dirty="0"/>
+          </a:p>
+        </p:txBody>
+      </p:sp>
+      <p:sp>
+        <p:nvSpPr>
+          <p:cNvPr id="13" name="Text 11"/>
+          <p:cNvSpPr txBox="1"/>
+          <p:nvPr/>
+        </p:nvSpPr>
+        <p:spPr>
+          <a:xfrm>
+            <a:off x="6995160" y="2240280"/>
+            <a:ext cx="4663440" cy="329184"/>
+          </a:xfrm>
+          <a:prstGeom prst="rect">
+            <a:avLst/>
+          </a:prstGeom>
+          <a:noFill/>
+          <a:ln/>
+        </p:spPr>
+        <p:txBody>
+          <a:bodyPr wrap="square" lIns="0" tIns="0" rIns="0" bIns="0" rtlCol="0" anchor="ctr"/>
+          <a:lstStyle/>
+          <a:p>
+            <a:pPr indent="0" marL="0">
+              <a:buNone/>
+            </a:pPr>
+            <a:r>
+              <a:rPr lang="en-US" sz="1450" b="1" dirty="0">
+                <a:solidFill>
+                  <a:srgbClr val="12202B"/>
+                </a:solidFill>
+                <a:latin typeface="Cambria" pitchFamily="34" charset="0"/>
+                <a:ea typeface="Cambria" pitchFamily="34" charset="-122"/>
+                <a:cs typeface="Cambria" pitchFamily="34" charset="-120"/>
+              </a:rPr>
+              <a:t>Independence Day non mesurable</a:t>
+            </a:r>
+            <a:endParaRPr lang="en-US" sz="1450" dirty="0"/>
+          </a:p>
+        </p:txBody>
+      </p:sp>
+      <p:sp>
+        <p:nvSpPr>
+          <p:cNvPr id="14" name="Text 12"/>
+          <p:cNvSpPr txBox="1"/>
+          <p:nvPr/>
+        </p:nvSpPr>
+        <p:spPr>
+          <a:xfrm>
+            <a:off x="6995160" y="2624328"/>
+            <a:ext cx="4709160" cy="1097280"/>
+          </a:xfrm>
+          <a:prstGeom prst="rect">
+            <a:avLst/>
+          </a:prstGeom>
+          <a:noFill/>
+          <a:ln/>
+        </p:spPr>
+        <p:txBody>
+          <a:bodyPr wrap="square" lIns="0" tIns="0" rIns="0" bIns="0" rtlCol="0" anchor="t"/>
+          <a:lstStyle/>
+          <a:p>
+            <a:pPr indent="0" marL="0">
+              <a:lnSpc>
+                <a:spcPts val="1500"/>
+              </a:lnSpc>
+              <a:buNone/>
+            </a:pPr>
+            <a:r>
+              <a:rPr lang="en-US" sz="1150" dirty="0">
+                <a:solidFill>
+                  <a:srgbClr val="5A6B7B"/>
+                </a:solidFill>
+                <a:latin typeface="Calibri" pitchFamily="34" charset="0"/>
+                <a:ea typeface="Calibri" pitchFamily="34" charset="-122"/>
+                <a:cs typeface="Calibri" pitchFamily="34" charset="-120"/>
+              </a:rPr>
+              <a:t>Le 4 juillet tombe dans le trou. L'API renvoie la ligne avec des champs vides ; le dashboard l'écarte du graphique et l'annonce au lieu d'afficher « NA ».</a:t>
+            </a:r>
+            <a:endParaRPr lang="en-US" sz="1150" dirty="0"/>
+          </a:p>
+        </p:txBody>
+      </p:sp>
+      <p:sp>
+        <p:nvSpPr>
+          <p:cNvPr id="15" name="Shape 13"/>
+          <p:cNvSpPr/>
+          <p:nvPr/>
+        </p:nvSpPr>
+        <p:spPr>
+          <a:xfrm>
+            <a:off x="566928" y="4023360"/>
+            <a:ext cx="5532120" cy="1783080"/>
+          </a:xfrm>
+          <a:prstGeom prst="roundRect">
+            <a:avLst>
+              <a:gd name="adj" fmla="val 4103"/>
+            </a:avLst>
+          </a:prstGeom>
+          <a:solidFill>
+            <a:srgbClr val="E8F1F8"/>
+          </a:solidFill>
+          <a:ln w="12700">
+            <a:solidFill>
+              <a:srgbClr val="CFE3F1"/>
+            </a:solidFill>
+            <a:prstDash val="solid"/>
+          </a:ln>
+          <a:effectLst>
+            <a:outerShdw sx="100000" sy="100000" kx="0" ky="0" algn="bl" rotWithShape="0" blurRad="101600" dist="508" dir="5400000">
+              <a:srgbClr val="9FB3C4">
+                <a:alpha val="28000"/>
+              </a:srgbClr>
+            </a:outerShdw>
+          </a:effectLst>
+        </p:spPr>
+      </p:sp>
+      <p:sp>
+        <p:nvSpPr>
+          <p:cNvPr id="16" name="Shape 14"/>
+          <p:cNvSpPr/>
+          <p:nvPr/>
+        </p:nvSpPr>
+        <p:spPr>
+          <a:xfrm>
+            <a:off x="768096" y="4224528"/>
+            <a:ext cx="310896" cy="310896"/>
+          </a:xfrm>
+          <a:prstGeom prst="ellipse">
+            <a:avLst/>
+          </a:prstGeom>
+          <a:solidFill>
+            <a:srgbClr val="1D8AC1"/>
+          </a:solidFill>
+          <a:ln w="12700">
+            <a:solidFill>
+              <a:srgbClr val="1D8AC1"/>
+            </a:solidFill>
+            <a:prstDash val="solid"/>
+          </a:ln>
+        </p:spPr>
+      </p:sp>
+      <p:sp>
+        <p:nvSpPr>
+          <p:cNvPr id="17" name="Text 15"/>
+          <p:cNvSpPr txBox="1"/>
+          <p:nvPr/>
+        </p:nvSpPr>
+        <p:spPr>
+          <a:xfrm>
+            <a:off x="768096" y="4251960"/>
+            <a:ext cx="310896" cy="256032"/>
+          </a:xfrm>
+          <a:prstGeom prst="rect">
+            <a:avLst/>
+          </a:prstGeom>
+          <a:noFill/>
+          <a:ln/>
+        </p:spPr>
+        <p:txBody>
+          <a:bodyPr wrap="square" lIns="0" tIns="0" rIns="0" bIns="0" rtlCol="0" anchor="ctr"/>
+          <a:lstStyle/>
+          <a:p>
+            <a:pPr algn="ctr" indent="0" marL="0">
+              <a:buNone/>
+            </a:pPr>
+            <a:r>
+              <a:rPr lang="en-US" sz="1100" b="1" dirty="0">
+                <a:solidFill>
+                  <a:srgbClr val="FFFFFF"/>
+                </a:solidFill>
+                <a:latin typeface="Calibri" pitchFamily="34" charset="0"/>
+                <a:ea typeface="Calibri" pitchFamily="34" charset="-122"/>
+                <a:cs typeface="Calibri" pitchFamily="34" charset="-120"/>
+              </a:rPr>
+              <a:t>3</a:t>
+            </a:r>
+            <a:endParaRPr lang="en-US" sz="1100" dirty="0"/>
+          </a:p>
+        </p:txBody>
+      </p:sp>
+      <p:sp>
+        <p:nvSpPr>
+          <p:cNvPr id="18" name="Text 16"/>
+          <p:cNvSpPr txBox="1"/>
+          <p:nvPr/>
+        </p:nvSpPr>
+        <p:spPr>
+          <a:xfrm>
+            <a:off x="1188720" y="4206240"/>
+            <a:ext cx="4663440" cy="329184"/>
+          </a:xfrm>
+          <a:prstGeom prst="rect">
+            <a:avLst/>
+          </a:prstGeom>
+          <a:noFill/>
+          <a:ln/>
+        </p:spPr>
+        <p:txBody>
+          <a:bodyPr wrap="square" lIns="0" tIns="0" rIns="0" bIns="0" rtlCol="0" anchor="ctr"/>
+          <a:lstStyle/>
+          <a:p>
+            <a:pPr indent="0" marL="0">
+              <a:buNone/>
+            </a:pPr>
+            <a:r>
+              <a:rPr lang="en-US" sz="1450" b="1" dirty="0">
+                <a:solidFill>
+                  <a:srgbClr val="12202B"/>
+                </a:solidFill>
+                <a:latin typeface="Cambria" pitchFamily="34" charset="0"/>
+                <a:ea typeface="Cambria" pitchFamily="34" charset="-122"/>
+                <a:cs typeface="Cambria" pitchFamily="34" charset="-120"/>
+              </a:rPr>
+              <a:t>Météo : un aéroport, et un relevé impossible</a:t>
+            </a:r>
+            <a:endParaRPr lang="en-US" sz="1450" dirty="0"/>
+          </a:p>
+        </p:txBody>
+      </p:sp>
+      <p:sp>
+        <p:nvSpPr>
+          <p:cNvPr id="19" name="Text 17"/>
+          <p:cNvSpPr txBox="1"/>
+          <p:nvPr/>
+        </p:nvSpPr>
+        <p:spPr>
+          <a:xfrm>
+            <a:off x="1188720" y="4590288"/>
+            <a:ext cx="4709160" cy="1097280"/>
+          </a:xfrm>
+          <a:prstGeom prst="rect">
+            <a:avLst/>
+          </a:prstGeom>
+          <a:noFill/>
+          <a:ln/>
+        </p:spPr>
+        <p:txBody>
+          <a:bodyPr wrap="square" lIns="0" tIns="0" rIns="0" bIns="0" rtlCol="0" anchor="t"/>
+          <a:lstStyle/>
+          <a:p>
+            <a:pPr indent="0" marL="0">
+              <a:lnSpc>
+                <a:spcPts val="1500"/>
+              </a:lnSpc>
+              <a:buNone/>
+            </a:pPr>
+            <a:r>
+              <a:rPr lang="en-US" sz="1150" dirty="0">
+                <a:solidFill>
+                  <a:srgbClr val="5A6B7B"/>
+                </a:solidFill>
+                <a:latin typeface="Calibri" pitchFamily="34" charset="0"/>
+                <a:ea typeface="Calibri" pitchFamily="34" charset="-122"/>
+                <a:cs typeface="Calibri" pitchFamily="34" charset="-120"/>
+              </a:rPr>
+              <a:t>weather.pdf ne couvre qu'EWR de janvier à mai — l'onglet ne propose donc que cet aéroport. Il contient aussi un vent de 1 048 mph le 12/02, contre 40 mph au second maximum : écarté du tracé et des moyennes.</a:t>
+            </a:r>
+            <a:endParaRPr lang="en-US" sz="1150" dirty="0"/>
+          </a:p>
+        </p:txBody>
+      </p:sp>
+      <p:sp>
+        <p:nvSpPr>
+          <p:cNvPr id="20" name="Shape 18"/>
+          <p:cNvSpPr/>
+          <p:nvPr/>
+        </p:nvSpPr>
+        <p:spPr>
+          <a:xfrm>
+            <a:off x="6373368" y="4023360"/>
+            <a:ext cx="5532120" cy="1783080"/>
+          </a:xfrm>
+          <a:prstGeom prst="roundRect">
+            <a:avLst>
+              <a:gd name="adj" fmla="val 4103"/>
+            </a:avLst>
+          </a:prstGeom>
+          <a:solidFill>
+            <a:srgbClr val="E8F1F8"/>
+          </a:solidFill>
+          <a:ln w="12700">
+            <a:solidFill>
+              <a:srgbClr val="CFE3F1"/>
+            </a:solidFill>
+            <a:prstDash val="solid"/>
+          </a:ln>
+          <a:effectLst>
+            <a:outerShdw sx="100000" sy="100000" kx="0" ky="0" algn="bl" rotWithShape="0" blurRad="101600" dist="508" dir="5400000">
+              <a:srgbClr val="9FB3C4">
+                <a:alpha val="28000"/>
+              </a:srgbClr>
+            </a:outerShdw>
+          </a:effectLst>
+        </p:spPr>
+      </p:sp>
+      <p:sp>
+        <p:nvSpPr>
+          <p:cNvPr id="21" name="Shape 19"/>
+          <p:cNvSpPr/>
+          <p:nvPr/>
+        </p:nvSpPr>
+        <p:spPr>
+          <a:xfrm>
+            <a:off x="6574536" y="4224528"/>
+            <a:ext cx="310896" cy="310896"/>
+          </a:xfrm>
+          <a:prstGeom prst="ellipse">
+            <a:avLst/>
+          </a:prstGeom>
+          <a:solidFill>
+            <a:srgbClr val="1D8AC1"/>
+          </a:solidFill>
+          <a:ln w="12700">
+            <a:solidFill>
+              <a:srgbClr val="1D8AC1"/>
+            </a:solidFill>
+            <a:prstDash val="solid"/>
+          </a:ln>
+        </p:spPr>
+      </p:sp>
+      <p:sp>
+        <p:nvSpPr>
+          <p:cNvPr id="22" name="Text 20"/>
+          <p:cNvSpPr txBox="1"/>
+          <p:nvPr/>
+        </p:nvSpPr>
+        <p:spPr>
+          <a:xfrm>
+            <a:off x="6574536" y="4251960"/>
+            <a:ext cx="310896" cy="256032"/>
+          </a:xfrm>
+          <a:prstGeom prst="rect">
+            <a:avLst/>
+          </a:prstGeom>
+          <a:noFill/>
+          <a:ln/>
+        </p:spPr>
+        <p:txBody>
+          <a:bodyPr wrap="square" lIns="0" tIns="0" rIns="0" bIns="0" rtlCol="0" anchor="ctr"/>
+          <a:lstStyle/>
+          <a:p>
+            <a:pPr algn="ctr" indent="0" marL="0">
+              <a:buNone/>
+            </a:pPr>
+            <a:r>
+              <a:rPr lang="en-US" sz="1100" b="1" dirty="0">
+                <a:solidFill>
+                  <a:srgbClr val="FFFFFF"/>
+                </a:solidFill>
+                <a:latin typeface="Calibri" pitchFamily="34" charset="0"/>
+                <a:ea typeface="Calibri" pitchFamily="34" charset="-122"/>
+                <a:cs typeface="Calibri" pitchFamily="34" charset="-120"/>
+              </a:rPr>
+              <a:t>4</a:t>
+            </a:r>
+            <a:endParaRPr lang="en-US" sz="1100" dirty="0"/>
+          </a:p>
+        </p:txBody>
+      </p:sp>
+      <p:sp>
+        <p:nvSpPr>
+          <p:cNvPr id="23" name="Text 21"/>
+          <p:cNvSpPr txBox="1"/>
+          <p:nvPr/>
+        </p:nvSpPr>
+        <p:spPr>
+          <a:xfrm>
+            <a:off x="6995160" y="4206240"/>
+            <a:ext cx="4663440" cy="329184"/>
+          </a:xfrm>
+          <a:prstGeom prst="rect">
+            <a:avLst/>
+          </a:prstGeom>
+          <a:noFill/>
+          <a:ln/>
+        </p:spPr>
+        <p:txBody>
+          <a:bodyPr wrap="square" lIns="0" tIns="0" rIns="0" bIns="0" rtlCol="0" anchor="ctr"/>
+          <a:lstStyle/>
+          <a:p>
+            <a:pPr indent="0" marL="0">
+              <a:buNone/>
+            </a:pPr>
+            <a:r>
+              <a:rPr lang="en-US" sz="1450" b="1" dirty="0">
+                <a:solidFill>
+                  <a:srgbClr val="12202B"/>
+                </a:solidFill>
+                <a:latin typeface="Cambria" pitchFamily="34" charset="0"/>
+                <a:ea typeface="Cambria" pitchFamily="34" charset="-122"/>
+                <a:cs typeface="Cambria" pitchFamily="34" charset="-120"/>
+              </a:rPr>
+              <a:t>2,56 % d'heures manquantes</a:t>
+            </a:r>
+            <a:endParaRPr lang="en-US" sz="1450" dirty="0"/>
+          </a:p>
+        </p:txBody>
+      </p:sp>
+      <p:sp>
+        <p:nvSpPr>
+          <p:cNvPr id="24" name="Text 22"/>
+          <p:cNvSpPr txBox="1"/>
+          <p:nvPr/>
+        </p:nvSpPr>
+        <p:spPr>
+          <a:xfrm>
+            <a:off x="6995160" y="4590288"/>
+            <a:ext cx="4709160" cy="1097280"/>
+          </a:xfrm>
+          <a:prstGeom prst="rect">
+            <a:avLst/>
+          </a:prstGeom>
+          <a:noFill/>
+          <a:ln/>
+        </p:spPr>
+        <p:txBody>
+          <a:bodyPr wrap="square" lIns="0" tIns="0" rIns="0" bIns="0" rtlCol="0" anchor="t"/>
+          <a:lstStyle/>
+          <a:p>
+            <a:pPr indent="0" marL="0">
+              <a:lnSpc>
+                <a:spcPts val="1500"/>
+              </a:lnSpc>
+              <a:buNone/>
+            </a:pPr>
+            <a:r>
+              <a:rPr lang="en-US" sz="1150" dirty="0">
+                <a:solidFill>
+                  <a:srgbClr val="5A6B7B"/>
+                </a:solidFill>
+                <a:latin typeface="Calibri" pitchFamily="34" charset="0"/>
+                <a:ea typeface="Calibri" pitchFamily="34" charset="-122"/>
+                <a:cs typeface="Calibri" pitchFamily="34" charset="-120"/>
+              </a:rPr>
+              <a:t>Ce sont exactement les vols annulés. Les moyennes de retard portent donc sur 246 223 vols et non 252 704 : le dénominateur change selon l'indicateur.</a:t>
+            </a:r>
+            <a:endParaRPr lang="en-US" sz="1150" dirty="0"/>
+          </a:p>
+        </p:txBody>
+      </p:sp>
+    </p:spTree>
+  </p:cSld>
+  <p:clrMapOvr>
+    <a:masterClrMapping/>
+  </p:clrMapOvr>
+</p:sld>
+</file>
+
+<file path=ppt/slides/slide15.xml><?xml version="1.0" encoding="utf-8"?>
+<p:sld xmlns:a="http://schemas.openxmlformats.org/drawingml/2006/main" xmlns:r="http://schemas.openxmlformats.org/officeDocument/2006/relationships" xmlns:p="http://schemas.openxmlformats.org/presentationml/2006/main">
+  <p:cSld name="Slide 15">
+    <p:spTree>
+      <p:nvGrpSpPr>
+        <p:cNvPr id="1" name=""/>
+        <p:cNvGrpSpPr/>
+        <p:nvPr/>
+      </p:nvGrpSpPr>
+      <p:grpSpPr>
+        <a:xfrm>
+          <a:off x="0" y="0"/>
+          <a:ext cx="0" cy="0"/>
+          <a:chOff x="0" y="0"/>
+          <a:chExt cx="0" cy="0"/>
+        </a:xfrm>
+      </p:grpSpPr>
+      <p:sp>
+        <p:nvSpPr>
+          <p:cNvPr id="2" name="Text 0"/>
+          <p:cNvSpPr txBox="1"/>
+          <p:nvPr/>
+        </p:nvSpPr>
+        <p:spPr>
+          <a:xfrm>
+            <a:off x="566928" y="384048"/>
+            <a:ext cx="7315200" cy="256032"/>
+          </a:xfrm>
+          <a:prstGeom prst="rect">
+            <a:avLst/>
+          </a:prstGeom>
+          <a:noFill/>
+          <a:ln/>
+        </p:spPr>
+        <p:txBody>
+          <a:bodyPr wrap="square" lIns="0" tIns="0" rIns="0" bIns="0" rtlCol="0" anchor="ctr"/>
+          <a:lstStyle/>
+          <a:p>
+            <a:pPr indent="0" marL="0">
+              <a:buNone/>
+            </a:pPr>
+            <a:r>
+              <a:rPr lang="en-US" sz="1200" b="1" spc="160" kern="0" dirty="0">
+                <a:solidFill>
+                  <a:srgbClr val="1D8AC1"/>
+                </a:solidFill>
+                <a:latin typeface="Calibri" pitchFamily="34" charset="0"/>
+                <a:ea typeface="Calibri" pitchFamily="34" charset="-122"/>
+                <a:cs typeface="Calibri" pitchFamily="34" charset="-120"/>
+              </a:rPr>
+              <a:t>CONTRÔLE CROISÉ</a:t>
+            </a:r>
+            <a:endParaRPr lang="en-US" sz="1200" dirty="0"/>
+          </a:p>
+        </p:txBody>
+      </p:sp>
+      <p:sp>
+        <p:nvSpPr>
+          <p:cNvPr id="3" name="Text 1"/>
+          <p:cNvSpPr txBox="1"/>
+          <p:nvPr/>
+        </p:nvSpPr>
+        <p:spPr>
+          <a:xfrm>
+            <a:off x="566928" y="640080"/>
+            <a:ext cx="11057839" cy="658368"/>
+          </a:xfrm>
+          <a:prstGeom prst="rect">
+            <a:avLst/>
+          </a:prstGeom>
+          <a:noFill/>
+          <a:ln/>
+        </p:spPr>
+        <p:txBody>
+          <a:bodyPr wrap="square" lIns="0" tIns="0" rIns="0" bIns="0" rtlCol="0" anchor="ctr"/>
+          <a:lstStyle/>
+          <a:p>
+            <a:pPr indent="0" marL="0">
+              <a:buNone/>
+            </a:pPr>
+            <a:r>
+              <a:rPr lang="en-US" sz="3200" b="1" dirty="0">
+                <a:solidFill>
+                  <a:srgbClr val="12202B"/>
+                </a:solidFill>
+                <a:latin typeface="Cambria" pitchFamily="34" charset="0"/>
+                <a:ea typeface="Cambria" pitchFamily="34" charset="-122"/>
+                <a:cs typeface="Cambria" pitchFamily="34" charset="-120"/>
+              </a:rPr>
+              <a:t>Un endpoint de l'API donnait l'inverse de son intitulé</a:t>
+            </a:r>
+            <a:endParaRPr lang="en-US" sz="3200" dirty="0"/>
+          </a:p>
+        </p:txBody>
+      </p:sp>
+      <p:sp>
+        <p:nvSpPr>
+          <p:cNvPr id="4" name="Text 2"/>
+          <p:cNvSpPr txBox="1"/>
+          <p:nvPr/>
+        </p:nvSpPr>
+        <p:spPr>
+          <a:xfrm>
+            <a:off x="566928" y="1298448"/>
+            <a:ext cx="10692079" cy="365760"/>
+          </a:xfrm>
+          <a:prstGeom prst="rect">
+            <a:avLst/>
+          </a:prstGeom>
+          <a:noFill/>
+          <a:ln/>
+        </p:spPr>
+        <p:txBody>
+          <a:bodyPr wrap="square" lIns="0" tIns="0" rIns="0" bIns="0" rtlCol="0" anchor="ctr"/>
+          <a:lstStyle/>
+          <a:p>
+            <a:pPr indent="0" marL="0">
+              <a:buNone/>
+            </a:pPr>
+            <a:r>
+              <a:rPr lang="en-US" sz="1400" dirty="0">
+                <a:solidFill>
+                  <a:srgbClr val="5A6B7B"/>
+                </a:solidFill>
+                <a:latin typeface="Calibri" pitchFamily="34" charset="0"/>
+                <a:ea typeface="Calibri" pitchFamily="34" charset="-122"/>
+                <a:cs typeface="Calibri" pitchFamily="34" charset="-120"/>
+              </a:rPr>
+              <a:t>Construire les écrans oblige à relire les chiffres un par un — c'est ainsi que le défaut est apparu.</a:t>
+            </a:r>
+            <a:endParaRPr lang="en-US" sz="1400" dirty="0"/>
+          </a:p>
+        </p:txBody>
+      </p:sp>
+      <p:sp>
+        <p:nvSpPr>
+          <p:cNvPr id="5" name="Shape 3"/>
+          <p:cNvSpPr/>
+          <p:nvPr/>
+        </p:nvSpPr>
+        <p:spPr>
+          <a:xfrm>
+            <a:off x="566928" y="2011680"/>
+            <a:ext cx="5440680" cy="2286000"/>
+          </a:xfrm>
+          <a:prstGeom prst="roundRect">
+            <a:avLst>
+              <a:gd name="adj" fmla="val 3200"/>
+            </a:avLst>
+          </a:prstGeom>
+          <a:solidFill>
+            <a:srgbClr val="FBEDE9"/>
+          </a:solidFill>
+          <a:ln w="12700">
+            <a:solidFill>
+              <a:srgbClr val="F3D3C9"/>
+            </a:solidFill>
+            <a:prstDash val="solid"/>
+          </a:ln>
+          <a:effectLst>
+            <a:outerShdw sx="100000" sy="100000" kx="0" ky="0" algn="bl" rotWithShape="0" blurRad="101600" dist="508" dir="5400000">
+              <a:srgbClr val="9FB3C4">
+                <a:alpha val="28000"/>
+              </a:srgbClr>
+            </a:outerShdw>
+          </a:effectLst>
+        </p:spPr>
+      </p:sp>
+      <p:sp>
+        <p:nvSpPr>
+          <p:cNvPr id="6" name="Text 4"/>
+          <p:cNvSpPr txBox="1"/>
+          <p:nvPr/>
+        </p:nvSpPr>
+        <p:spPr>
+          <a:xfrm>
+            <a:off x="786384" y="2139696"/>
+            <a:ext cx="4937760" cy="310896"/>
+          </a:xfrm>
+          <a:prstGeom prst="rect">
+            <a:avLst/>
+          </a:prstGeom>
+          <a:noFill/>
+          <a:ln/>
+        </p:spPr>
+        <p:txBody>
+          <a:bodyPr wrap="square" lIns="0" tIns="0" rIns="0" bIns="0" rtlCol="0" anchor="ctr"/>
+          <a:lstStyle/>
+          <a:p>
+            <a:pPr indent="0" marL="0">
+              <a:buNone/>
+            </a:pPr>
+            <a:r>
+              <a:rPr lang="en-US" sz="1200" b="1" dirty="0">
+                <a:solidFill>
+                  <a:srgbClr val="E4572E"/>
+                </a:solidFill>
+                <a:latin typeface="Calibri" pitchFamily="34" charset="0"/>
+                <a:ea typeface="Calibri" pitchFamily="34" charset="-122"/>
+                <a:cs typeface="Calibri" pitchFamily="34" charset="-120"/>
+              </a:rPr>
+              <a:t>Ce que renvoyait /delays/gain</a:t>
+            </a:r>
+            <a:endParaRPr lang="en-US" sz="1200" dirty="0"/>
+          </a:p>
+        </p:txBody>
+      </p:sp>
+      <p:sp>
+        <p:nvSpPr>
+          <p:cNvPr id="7" name="Text 5"/>
+          <p:cNvSpPr txBox="1"/>
+          <p:nvPr/>
+        </p:nvSpPr>
+        <p:spPr>
+          <a:xfrm>
+            <a:off x="786384" y="2514600"/>
+            <a:ext cx="4983480" cy="1645920"/>
+          </a:xfrm>
+          <a:prstGeom prst="rect">
+            <a:avLst/>
+          </a:prstGeom>
+          <a:noFill/>
+          <a:ln/>
+        </p:spPr>
+        <p:txBody>
+          <a:bodyPr wrap="square" lIns="0" tIns="0" rIns="0" bIns="0" rtlCol="0" anchor="t"/>
+          <a:lstStyle/>
+          <a:p>
+            <a:pPr indent="0" marL="0">
+              <a:lnSpc>
+                <a:spcPts val="1700"/>
+              </a:lnSpc>
+              <a:buNone/>
+            </a:pPr>
+            <a:r>
+              <a:rPr lang="en-US" sz="1300" b="1" dirty="0">
+                <a:solidFill>
+                  <a:srgbClr val="12202B"/>
+                </a:solidFill>
+                <a:latin typeface="Calibri" pitchFamily="34" charset="0"/>
+                <a:ea typeface="Calibri" pitchFamily="34" charset="-122"/>
+                <a:cs typeface="Calibri" pitchFamily="34" charset="-120"/>
+              </a:rPr>
+              <a:t>gain = arr_delay − dep_delay</a:t>
+            </a:r>
+            <a:endParaRPr lang="en-US" sz="1200" dirty="0"/>
+          </a:p>
+          <a:p>
+            <a:pPr indent="0" marL="0">
+              <a:lnSpc>
+                <a:spcPts val="1700"/>
+              </a:lnSpc>
+              <a:buNone/>
+            </a:pPr>
+            <a:r>
+              <a:rPr lang="en-US" sz="1200" dirty="0">
+                <a:solidFill>
+                  <a:srgbClr val="5A6B7B"/>
+                </a:solidFill>
+                <a:latin typeface="Calibri" pitchFamily="34" charset="0"/>
+                <a:ea typeface="Calibri" pitchFamily="34" charset="-122"/>
+                <a:cs typeface="Calibri" pitchFamily="34" charset="-120"/>
+              </a:rPr>
+              <a:t>1 363 vols remontés : 121,5 min de retard au départ, 171,3 min à l'arrivée.</a:t>
+            </a:r>
+            <a:endParaRPr lang="en-US" sz="1200" dirty="0"/>
+          </a:p>
+          <a:p>
+            <a:pPr indent="0" marL="0">
+              <a:lnSpc>
+                <a:spcPts val="1700"/>
+              </a:lnSpc>
+              <a:buNone/>
+            </a:pPr>
+            <a:r>
+              <a:rPr lang="en-US" sz="1200" b="1" dirty="0">
+                <a:solidFill>
+                  <a:srgbClr val="E4572E"/>
+                </a:solidFill>
+                <a:latin typeface="Calibri" pitchFamily="34" charset="0"/>
+                <a:ea typeface="Calibri" pitchFamily="34" charset="-122"/>
+                <a:cs typeface="Calibri" pitchFamily="34" charset="-120"/>
+              </a:rPr>
+              <a:t>Ce sont les vols dont le retard s'aggrave en vol, présentés comme un gain.</a:t>
+            </a:r>
+            <a:endParaRPr lang="en-US" sz="1200" dirty="0"/>
+          </a:p>
+        </p:txBody>
+      </p:sp>
+      <p:sp>
+        <p:nvSpPr>
+          <p:cNvPr id="8" name="Shape 6"/>
+          <p:cNvSpPr/>
+          <p:nvPr/>
+        </p:nvSpPr>
+        <p:spPr>
+          <a:xfrm>
+            <a:off x="6355080" y="2011680"/>
+            <a:ext cx="5285232" cy="2286000"/>
+          </a:xfrm>
+          <a:prstGeom prst="roundRect">
+            <a:avLst>
+              <a:gd name="adj" fmla="val 3200"/>
+            </a:avLst>
+          </a:prstGeom>
+          <a:solidFill>
+            <a:srgbClr val="EAF6F0"/>
+          </a:solidFill>
+          <a:ln w="12700">
+            <a:solidFill>
+              <a:srgbClr val="CDE8DC"/>
+            </a:solidFill>
+            <a:prstDash val="solid"/>
+          </a:ln>
+          <a:effectLst>
+            <a:outerShdw sx="100000" sy="100000" kx="0" ky="0" algn="bl" rotWithShape="0" blurRad="101600" dist="508" dir="5400000">
+              <a:srgbClr val="9FB3C4">
+                <a:alpha val="28000"/>
+              </a:srgbClr>
+            </a:outerShdw>
+          </a:effectLst>
+        </p:spPr>
+      </p:sp>
+      <p:sp>
+        <p:nvSpPr>
+          <p:cNvPr id="9" name="Text 7"/>
+          <p:cNvSpPr txBox="1"/>
+          <p:nvPr/>
+        </p:nvSpPr>
+        <p:spPr>
+          <a:xfrm>
+            <a:off x="6574536" y="2139696"/>
+            <a:ext cx="4846320" cy="310896"/>
+          </a:xfrm>
+          <a:prstGeom prst="rect">
+            <a:avLst/>
+          </a:prstGeom>
+          <a:noFill/>
+          <a:ln/>
+        </p:spPr>
+        <p:txBody>
+          <a:bodyPr wrap="square" lIns="0" tIns="0" rIns="0" bIns="0" rtlCol="0" anchor="ctr"/>
+          <a:lstStyle/>
+          <a:p>
+            <a:pPr indent="0" marL="0">
+              <a:buNone/>
+            </a:pPr>
+            <a:r>
+              <a:rPr lang="en-US" sz="1200" b="1" dirty="0">
+                <a:solidFill>
+                  <a:srgbClr val="2E9E6B"/>
+                </a:solidFill>
+                <a:latin typeface="Calibri" pitchFamily="34" charset="0"/>
+                <a:ea typeface="Calibri" pitchFamily="34" charset="-122"/>
+                <a:cs typeface="Calibri" pitchFamily="34" charset="-120"/>
+              </a:rPr>
+              <a:t>Le vrai rattrapage</a:t>
+            </a:r>
+            <a:endParaRPr lang="en-US" sz="1200" dirty="0"/>
+          </a:p>
+        </p:txBody>
+      </p:sp>
+      <p:sp>
+        <p:nvSpPr>
+          <p:cNvPr id="10" name="Text 8"/>
+          <p:cNvSpPr txBox="1"/>
+          <p:nvPr/>
+        </p:nvSpPr>
+        <p:spPr>
+          <a:xfrm>
+            <a:off x="6574536" y="2514600"/>
+            <a:ext cx="4846320" cy="1645920"/>
+          </a:xfrm>
+          <a:prstGeom prst="rect">
+            <a:avLst/>
+          </a:prstGeom>
+          <a:noFill/>
+          <a:ln/>
+        </p:spPr>
+        <p:txBody>
+          <a:bodyPr wrap="square" lIns="0" tIns="0" rIns="0" bIns="0" rtlCol="0" anchor="t"/>
+          <a:lstStyle/>
+          <a:p>
+            <a:pPr indent="0" marL="0">
+              <a:lnSpc>
+                <a:spcPts val="1700"/>
+              </a:lnSpc>
+              <a:buNone/>
+            </a:pPr>
+            <a:r>
+              <a:rPr lang="en-US" sz="1300" b="1" dirty="0">
+                <a:solidFill>
+                  <a:srgbClr val="12202B"/>
+                </a:solidFill>
+                <a:latin typeface="Calibri" pitchFamily="34" charset="0"/>
+                <a:ea typeface="Calibri" pitchFamily="34" charset="-122"/>
+                <a:cs typeface="Calibri" pitchFamily="34" charset="-120"/>
+              </a:rPr>
+              <a:t>rattrapage = dep_delay − arr_delay</a:t>
+            </a:r>
+            <a:endParaRPr lang="en-US" sz="1200" dirty="0"/>
+          </a:p>
+          <a:p>
+            <a:pPr indent="0" marL="0">
+              <a:lnSpc>
+                <a:spcPts val="1700"/>
+              </a:lnSpc>
+              <a:buNone/>
+            </a:pPr>
+            <a:r>
+              <a:rPr lang="en-US" sz="1200" dirty="0">
+                <a:solidFill>
+                  <a:srgbClr val="5A6B7B"/>
+                </a:solidFill>
+                <a:latin typeface="Calibri" pitchFamily="34" charset="0"/>
+                <a:ea typeface="Calibri" pitchFamily="34" charset="-122"/>
+                <a:cs typeface="Calibri" pitchFamily="34" charset="-120"/>
+              </a:rPr>
+              <a:t>Autre population : 132,1 min au départ, 94,8 min à l'arrivée.</a:t>
+            </a:r>
+            <a:endParaRPr lang="en-US" sz="1200" dirty="0"/>
+          </a:p>
+          <a:p>
+            <a:pPr indent="0" marL="0">
+              <a:lnSpc>
+                <a:spcPts val="1700"/>
+              </a:lnSpc>
+              <a:buNone/>
+            </a:pPr>
+            <a:r>
+              <a:rPr lang="en-US" sz="1200" b="1" dirty="0">
+                <a:solidFill>
+                  <a:srgbClr val="2E9E6B"/>
+                </a:solidFill>
+                <a:latin typeface="Calibri" pitchFamily="34" charset="0"/>
+                <a:ea typeface="Calibri" pitchFamily="34" charset="-122"/>
+                <a:cs typeface="Calibri" pitchFamily="34" charset="-120"/>
+              </a:rPr>
+              <a:t>Reconstruit dans le dashboard à partir de /flights, sans attendre le correctif.</a:t>
+            </a:r>
+            <a:endParaRPr lang="en-US" sz="1200" dirty="0"/>
+          </a:p>
+        </p:txBody>
+      </p:sp>
+      <p:sp>
+        <p:nvSpPr>
+          <p:cNvPr id="11" name="Text 9"/>
+          <p:cNvSpPr txBox="1"/>
+          <p:nvPr/>
+        </p:nvSpPr>
+        <p:spPr>
+          <a:xfrm>
+            <a:off x="566928" y="4572000"/>
+            <a:ext cx="5486400" cy="292608"/>
+          </a:xfrm>
+          <a:prstGeom prst="rect">
+            <a:avLst/>
+          </a:prstGeom>
+          <a:noFill/>
+          <a:ln/>
+        </p:spPr>
+        <p:txBody>
+          <a:bodyPr wrap="square" lIns="0" tIns="0" rIns="0" bIns="0" rtlCol="0" anchor="ctr"/>
+          <a:lstStyle/>
+          <a:p>
+            <a:pPr indent="0" marL="0">
+              <a:buNone/>
+            </a:pPr>
+            <a:r>
+              <a:rPr lang="en-US" sz="1500" b="1" dirty="0">
+                <a:solidFill>
+                  <a:srgbClr val="12202B"/>
+                </a:solidFill>
+                <a:latin typeface="Cambria" pitchFamily="34" charset="0"/>
+                <a:ea typeface="Cambria" pitchFamily="34" charset="-122"/>
+                <a:cs typeface="Cambria" pitchFamily="34" charset="-120"/>
+              </a:rPr>
+              <a:t>Comment le dashboard s'en sort</a:t>
+            </a:r>
+            <a:endParaRPr lang="en-US" sz="1500" dirty="0"/>
+          </a:p>
+        </p:txBody>
+      </p:sp>
+      <p:sp>
+        <p:nvSpPr>
+          <p:cNvPr id="12" name="Text 10"/>
+          <p:cNvSpPr txBox="1"/>
+          <p:nvPr/>
+        </p:nvSpPr>
+        <p:spPr>
+          <a:xfrm>
+            <a:off x="566928" y="4901184"/>
+            <a:ext cx="5486400" cy="1371600"/>
+          </a:xfrm>
+          <a:prstGeom prst="rect">
+            <a:avLst/>
+          </a:prstGeom>
+          <a:noFill/>
+          <a:ln/>
+        </p:spPr>
+        <p:txBody>
+          <a:bodyPr wrap="square" lIns="0" tIns="0" rIns="0" bIns="0" rtlCol="0" anchor="t"/>
+          <a:lstStyle/>
+          <a:p>
+            <a:pPr marL="342900" indent="-342900">
+              <a:lnSpc>
+                <a:spcPts val="1800"/>
+              </a:lnSpc>
+              <a:spcAft>
+                <a:spcPts val="700"/>
+              </a:spcAft>
+              <a:buSzPct val="100000"/>
+              <a:buChar char="•"/>
+            </a:pPr>
+            <a:r>
+              <a:rPr lang="en-US" sz="1200" dirty="0">
+                <a:solidFill>
+                  <a:srgbClr val="12202B"/>
+                </a:solidFill>
+                <a:latin typeface="Calibri" pitchFamily="34" charset="0"/>
+                <a:ea typeface="Calibri" pitchFamily="34" charset="-122"/>
+                <a:cs typeface="Calibri" pitchFamily="34" charset="-120"/>
+              </a:rPr>
+              <a:t>Les vols partis avec au moins 1 h de retard sont demandés à /flights, triés par retard à l'arrivée</a:t>
+            </a:r>
+            <a:endParaRPr lang="en-US" sz="1200" dirty="0"/>
+          </a:p>
+          <a:p>
+            <a:pPr marL="342900" indent="-342900">
+              <a:lnSpc>
+                <a:spcPts val="1800"/>
+              </a:lnSpc>
+              <a:spcAft>
+                <a:spcPts val="700"/>
+              </a:spcAft>
+              <a:buSzPct val="100000"/>
+              <a:buChar char="•"/>
+            </a:pPr>
+            <a:r>
+              <a:rPr lang="en-US" sz="1200" dirty="0">
+                <a:solidFill>
+                  <a:srgbClr val="12202B"/>
+                </a:solidFill>
+                <a:latin typeface="Calibri" pitchFamily="34" charset="0"/>
+                <a:ea typeface="Calibri" pitchFamily="34" charset="-122"/>
+                <a:cs typeface="Calibri" pitchFamily="34" charset="-120"/>
+              </a:rPr>
+              <a:t>Le rattrapage est recalculé côté dashboard et la méthode est affichée sur la carte</a:t>
+            </a:r>
+            <a:endParaRPr lang="en-US" sz="1200" dirty="0"/>
+          </a:p>
+          <a:p>
+            <a:pPr marL="342900" indent="-342900">
+              <a:lnSpc>
+                <a:spcPts val="1800"/>
+              </a:lnSpc>
+              <a:spcAft>
+                <a:spcPts val="700"/>
+              </a:spcAft>
+              <a:buSzPct val="100000"/>
+              <a:buChar char="•"/>
+            </a:pPr>
+            <a:r>
+              <a:rPr lang="en-US" sz="1200" dirty="0">
+                <a:solidFill>
+                  <a:srgbClr val="12202B"/>
+                </a:solidFill>
+                <a:latin typeface="Calibri" pitchFamily="34" charset="0"/>
+                <a:ea typeface="Calibri" pitchFamily="34" charset="-122"/>
+                <a:cs typeface="Calibri" pitchFamily="34" charset="-120"/>
+              </a:rPr>
+              <a:t>Le correctif côté backend tient en une ligne : inverser la différence et le filtre</a:t>
+            </a:r>
+            <a:endParaRPr lang="en-US" sz="1200" dirty="0"/>
+          </a:p>
+        </p:txBody>
+      </p:sp>
+      <p:sp>
+        <p:nvSpPr>
+          <p:cNvPr id="13" name="Shape 11"/>
+          <p:cNvSpPr/>
+          <p:nvPr/>
+        </p:nvSpPr>
+        <p:spPr>
+          <a:xfrm>
+            <a:off x="6355080" y="4572000"/>
+            <a:ext cx="5285232" cy="1691640"/>
+          </a:xfrm>
+          <a:prstGeom prst="roundRect">
+            <a:avLst>
+              <a:gd name="adj" fmla="val 4324"/>
+            </a:avLst>
+          </a:prstGeom>
+          <a:solidFill>
+            <a:srgbClr val="0B3C5D"/>
+          </a:solidFill>
+          <a:ln w="12700">
+            <a:solidFill>
+              <a:srgbClr val="0B3C5D"/>
+            </a:solidFill>
+            <a:prstDash val="solid"/>
+          </a:ln>
+          <a:effectLst>
+            <a:outerShdw sx="100000" sy="100000" kx="0" ky="0" algn="bl" rotWithShape="0" blurRad="101600" dist="508" dir="5400000">
+              <a:srgbClr val="9FB3C4">
+                <a:alpha val="28000"/>
+              </a:srgbClr>
+            </a:outerShdw>
+          </a:effectLst>
+        </p:spPr>
+      </p:sp>
+      <p:sp>
+        <p:nvSpPr>
+          <p:cNvPr id="14" name="Text 12"/>
+          <p:cNvSpPr txBox="1"/>
+          <p:nvPr/>
+        </p:nvSpPr>
+        <p:spPr>
+          <a:xfrm>
+            <a:off x="6574536" y="4700016"/>
+            <a:ext cx="4846320" cy="274320"/>
+          </a:xfrm>
+          <a:prstGeom prst="rect">
+            <a:avLst/>
+          </a:prstGeom>
+          <a:noFill/>
+          <a:ln/>
+        </p:spPr>
+        <p:txBody>
+          <a:bodyPr wrap="square" lIns="0" tIns="0" rIns="0" bIns="0" rtlCol="0" anchor="ctr"/>
+          <a:lstStyle/>
+          <a:p>
+            <a:pPr indent="0" marL="0">
+              <a:buNone/>
+            </a:pPr>
+            <a:r>
+              <a:rPr lang="en-US" sz="1100" b="1" dirty="0">
+                <a:solidFill>
+                  <a:srgbClr val="E8A33D"/>
+                </a:solidFill>
+                <a:latin typeface="Calibri" pitchFamily="34" charset="0"/>
+                <a:ea typeface="Calibri" pitchFamily="34" charset="-122"/>
+                <a:cs typeface="Calibri" pitchFamily="34" charset="-120"/>
+              </a:rPr>
+              <a:t>À retenir</a:t>
+            </a:r>
+            <a:endParaRPr lang="en-US" sz="1100" dirty="0"/>
+          </a:p>
+        </p:txBody>
+      </p:sp>
+      <p:sp>
+        <p:nvSpPr>
+          <p:cNvPr id="15" name="Text 13"/>
+          <p:cNvSpPr txBox="1"/>
+          <p:nvPr/>
+        </p:nvSpPr>
+        <p:spPr>
+          <a:xfrm>
+            <a:off x="6574536" y="5010912"/>
+            <a:ext cx="4846320" cy="1143000"/>
+          </a:xfrm>
+          <a:prstGeom prst="rect">
+            <a:avLst/>
+          </a:prstGeom>
+          <a:noFill/>
+          <a:ln/>
+        </p:spPr>
+        <p:txBody>
+          <a:bodyPr wrap="square" lIns="0" tIns="0" rIns="0" bIns="0" rtlCol="0" anchor="t"/>
+          <a:lstStyle/>
+          <a:p>
+            <a:pPr indent="0" marL="0">
+              <a:lnSpc>
+                <a:spcPts val="1600"/>
+              </a:lnSpc>
+              <a:buNone/>
+            </a:pPr>
+            <a:r>
+              <a:rPr lang="en-US" sz="1200" dirty="0">
+                <a:solidFill>
+                  <a:srgbClr val="CFE3F1"/>
+                </a:solidFill>
+                <a:latin typeface="Calibri" pitchFamily="34" charset="0"/>
+                <a:ea typeface="Calibri" pitchFamily="34" charset="-122"/>
+                <a:cs typeface="Calibri" pitchFamily="34" charset="-120"/>
+              </a:rPr>
+              <a:t>Un chiffre qui « sort » du dashboard n'est pas forcément un bug d'affichage : ici l'API répondait 200, la requête SQL était valide, et seule la lecture métier du résultat révélait l'inversion.</a:t>
+            </a:r>
+            <a:endParaRPr lang="en-US" sz="1200" dirty="0"/>
+          </a:p>
+        </p:txBody>
+      </p:sp>
+    </p:spTree>
+  </p:cSld>
+  <p:clrMapOvr>
+    <a:masterClrMapping/>
+  </p:clrMapOvr>
+</p:sld>
+</file>
+
+<file path=ppt/slides/slide16.xml><?xml version="1.0" encoding="utf-8"?>
+<p:sld xmlns:a="http://schemas.openxmlformats.org/drawingml/2006/main" xmlns:r="http://schemas.openxmlformats.org/officeDocument/2006/relationships" xmlns:p="http://schemas.openxmlformats.org/presentationml/2006/main">
+  <p:cSld name="Slide 16">
     <p:bg>
       <p:bgPr>
         <a:solidFill>
@@ -5060,7 +7168,7 @@
                 <a:ea typeface="Calibri" pitchFamily="34" charset="-122"/>
                 <a:cs typeface="Calibri" pitchFamily="34" charset="-120"/>
               </a:rPr>
-              <a:t>Dashboard Shiny sur le port 3838</a:t>
+              <a:t>Dashboard Shiny sur le port 3838 — neuf onglets, dont les prévisions</a:t>
             </a:r>
             <a:endParaRPr lang="en-US" sz="1150" dirty="0"/>
           </a:p>
@@ -5172,7 +7280,7 @@
                 <a:ea typeface="Calibri" pitchFamily="34" charset="-122"/>
                 <a:cs typeface="Calibri" pitchFamily="34" charset="-120"/>
               </a:rPr>
-              <a:t>Corriger /delays/gain côté backend</a:t>
+              <a:t>Vérifier la colonne year : les données sont celles de 2013</a:t>
             </a:r>
             <a:endParaRPr lang="en-US" sz="1200" dirty="0"/>
           </a:p>
@@ -5196,7 +7304,7 @@
                 <a:ea typeface="Calibri" pitchFamily="34" charset="-122"/>
                 <a:cs typeface="Calibri" pitchFamily="34" charset="-120"/>
               </a:rPr>
-              <a:t>Compléter flights.xlsx pour retrouver l'été</a:t>
+              <a:t>Corriger /delays/gain côté backend</a:t>
             </a:r>
             <a:endParaRPr lang="en-US" sz="1200" dirty="0"/>
           </a:p>
@@ -5220,7 +7328,7 @@
                 <a:ea typeface="Calibri" pitchFamily="34" charset="-122"/>
                 <a:cs typeface="Calibri" pitchFamily="34" charset="-120"/>
               </a:rPr>
-              <a:t>Étendre weather.pdf à JFK et LGA</a:t>
+              <a:t>Compléter flights.xlsx pour retrouver l'été</a:t>
             </a:r>
             <a:endParaRPr lang="en-US" sz="1200" dirty="0"/>
           </a:p>
@@ -5244,7 +7352,7 @@
                 <a:ea typeface="Calibri" pitchFamily="34" charset="-122"/>
                 <a:cs typeface="Calibri" pitchFamily="34" charset="-120"/>
               </a:rPr>
-              <a:t>Croiser météo et retards une fois la couverture complète</a:t>
+              <a:t>Ajouter la météo au modèle de prévision</a:t>
             </a:r>
             <a:endParaRPr lang="en-US" sz="1200" dirty="0"/>
           </a:p>
@@ -7737,7 +9845,7 @@
                 <a:ea typeface="Cambria" pitchFamily="34" charset="-122"/>
                 <a:cs typeface="Cambria" pitchFamily="34" charset="-120"/>
               </a:rPr>
-              <a:t>Un dashboard en huit onglets</a:t>
+              <a:t>Un dashboard en neuf onglets</a:t>
             </a:r>
             <a:endParaRPr lang="en-US" sz="3200" dirty="0"/>
           </a:p>
@@ -7775,7 +9883,7 @@
         </p:nvSpPr>
         <p:spPr>
           <a:xfrm>
-            <a:off x="5806440" y="1536192"/>
+            <a:off x="5806440" y="1517904"/>
             <a:ext cx="274320" cy="274320"/>
           </a:xfrm>
           <a:prstGeom prst="ellipse">
@@ -7800,7 +9908,7 @@
         </p:nvSpPr>
         <p:spPr>
           <a:xfrm>
-            <a:off x="5806440" y="1563624"/>
+            <a:off x="5806440" y="1545336"/>
             <a:ext cx="274320" cy="237744"/>
           </a:xfrm>
           <a:prstGeom prst="rect">
@@ -7839,7 +9947,7 @@
         </p:nvSpPr>
         <p:spPr>
           <a:xfrm>
-            <a:off x="6236208" y="1481328"/>
+            <a:off x="6236208" y="1463040"/>
             <a:ext cx="5394960" cy="384048"/>
           </a:xfrm>
           <a:prstGeom prst="rect">
@@ -7892,7 +10000,7 @@
         </p:nvSpPr>
         <p:spPr>
           <a:xfrm>
-            <a:off x="5806440" y="2103120"/>
+            <a:off x="5806440" y="2029968"/>
             <a:ext cx="274320" cy="274320"/>
           </a:xfrm>
           <a:prstGeom prst="ellipse">
@@ -7917,7 +10025,7 @@
         </p:nvSpPr>
         <p:spPr>
           <a:xfrm>
-            <a:off x="5806440" y="2130552"/>
+            <a:off x="5806440" y="2057400"/>
             <a:ext cx="274320" cy="237744"/>
           </a:xfrm>
           <a:prstGeom prst="rect">
@@ -7956,7 +10064,7 @@
         </p:nvSpPr>
         <p:spPr>
           <a:xfrm>
-            <a:off x="6236208" y="2048256"/>
+            <a:off x="6236208" y="1975104"/>
             <a:ext cx="5394960" cy="384048"/>
           </a:xfrm>
           <a:prstGeom prst="rect">
@@ -8009,7 +10117,7 @@
         </p:nvSpPr>
         <p:spPr>
           <a:xfrm>
-            <a:off x="5806440" y="2670048"/>
+            <a:off x="5806440" y="2542032"/>
             <a:ext cx="274320" cy="274320"/>
           </a:xfrm>
           <a:prstGeom prst="ellipse">
@@ -8034,7 +10142,7 @@
         </p:nvSpPr>
         <p:spPr>
           <a:xfrm>
-            <a:off x="5806440" y="2697480"/>
+            <a:off x="5806440" y="2569464"/>
             <a:ext cx="274320" cy="237744"/>
           </a:xfrm>
           <a:prstGeom prst="rect">
@@ -8073,7 +10181,7 @@
         </p:nvSpPr>
         <p:spPr>
           <a:xfrm>
-            <a:off x="6236208" y="2615184"/>
+            <a:off x="6236208" y="2487168"/>
             <a:ext cx="5394960" cy="384048"/>
           </a:xfrm>
           <a:prstGeom prst="rect">
@@ -8126,7 +10234,7 @@
         </p:nvSpPr>
         <p:spPr>
           <a:xfrm>
-            <a:off x="5806440" y="3236976"/>
+            <a:off x="5806440" y="3054096"/>
             <a:ext cx="274320" cy="274320"/>
           </a:xfrm>
           <a:prstGeom prst="ellipse">
@@ -8151,7 +10259,7 @@
         </p:nvSpPr>
         <p:spPr>
           <a:xfrm>
-            <a:off x="5806440" y="3264408"/>
+            <a:off x="5806440" y="3081528"/>
             <a:ext cx="274320" cy="237744"/>
           </a:xfrm>
           <a:prstGeom prst="rect">
@@ -8190,7 +10298,7 @@
         </p:nvSpPr>
         <p:spPr>
           <a:xfrm>
-            <a:off x="6236208" y="3182112"/>
+            <a:off x="6236208" y="2999232"/>
             <a:ext cx="5394960" cy="384048"/>
           </a:xfrm>
           <a:prstGeom prst="rect">
@@ -8243,7 +10351,7 @@
         </p:nvSpPr>
         <p:spPr>
           <a:xfrm>
-            <a:off x="5806440" y="3803904"/>
+            <a:off x="5806440" y="3566160"/>
             <a:ext cx="274320" cy="274320"/>
           </a:xfrm>
           <a:prstGeom prst="ellipse">
@@ -8268,7 +10376,7 @@
         </p:nvSpPr>
         <p:spPr>
           <a:xfrm>
-            <a:off x="5806440" y="3831336"/>
+            <a:off x="5806440" y="3593592"/>
             <a:ext cx="274320" cy="237744"/>
           </a:xfrm>
           <a:prstGeom prst="rect">
@@ -8307,7 +10415,7 @@
         </p:nvSpPr>
         <p:spPr>
           <a:xfrm>
-            <a:off x="6236208" y="3749040"/>
+            <a:off x="6236208" y="3511296"/>
             <a:ext cx="5394960" cy="384048"/>
           </a:xfrm>
           <a:prstGeom prst="rect">
@@ -8360,7 +10468,7 @@
         </p:nvSpPr>
         <p:spPr>
           <a:xfrm>
-            <a:off x="5806440" y="4370832"/>
+            <a:off x="5806440" y="4078224"/>
             <a:ext cx="274320" cy="274320"/>
           </a:xfrm>
           <a:prstGeom prst="ellipse">
@@ -8385,7 +10493,7 @@
         </p:nvSpPr>
         <p:spPr>
           <a:xfrm>
-            <a:off x="5806440" y="4398264"/>
+            <a:off x="5806440" y="4105656"/>
             <a:ext cx="274320" cy="237744"/>
           </a:xfrm>
           <a:prstGeom prst="rect">
@@ -8424,7 +10532,7 @@
         </p:nvSpPr>
         <p:spPr>
           <a:xfrm>
-            <a:off x="6236208" y="4315968"/>
+            <a:off x="6236208" y="4023360"/>
             <a:ext cx="5394960" cy="384048"/>
           </a:xfrm>
           <a:prstGeom prst="rect">
@@ -8477,7 +10585,7 @@
         </p:nvSpPr>
         <p:spPr>
           <a:xfrm>
-            <a:off x="5806440" y="4937760"/>
+            <a:off x="5806440" y="4590288"/>
             <a:ext cx="274320" cy="274320"/>
           </a:xfrm>
           <a:prstGeom prst="ellipse">
@@ -8502,7 +10610,7 @@
         </p:nvSpPr>
         <p:spPr>
           <a:xfrm>
-            <a:off x="5806440" y="4965192"/>
+            <a:off x="5806440" y="4617720"/>
             <a:ext cx="274320" cy="237744"/>
           </a:xfrm>
           <a:prstGeom prst="rect">
@@ -8541,7 +10649,7 @@
         </p:nvSpPr>
         <p:spPr>
           <a:xfrm>
-            <a:off x="6236208" y="4882896"/>
+            <a:off x="6236208" y="4535424"/>
             <a:ext cx="5394960" cy="384048"/>
           </a:xfrm>
           <a:prstGeom prst="rect">
@@ -8594,7 +10702,124 @@
         </p:nvSpPr>
         <p:spPr>
           <a:xfrm>
-            <a:off x="5806440" y="5504688"/>
+            <a:off x="5806440" y="5102352"/>
+            <a:ext cx="274320" cy="274320"/>
+          </a:xfrm>
+          <a:prstGeom prst="ellipse">
+            <a:avLst/>
+          </a:prstGeom>
+          <a:solidFill>
+            <a:srgbClr val="E4572E"/>
+          </a:solidFill>
+          <a:ln w="12700">
+            <a:solidFill>
+              <a:srgbClr val="E4572E"/>
+            </a:solidFill>
+            <a:prstDash val="solid"/>
+          </a:ln>
+        </p:spPr>
+      </p:sp>
+      <p:sp>
+        <p:nvSpPr>
+          <p:cNvPr id="27" name="Text 24"/>
+          <p:cNvSpPr txBox="1"/>
+          <p:nvPr/>
+        </p:nvSpPr>
+        <p:spPr>
+          <a:xfrm>
+            <a:off x="5806440" y="5129784"/>
+            <a:ext cx="274320" cy="237744"/>
+          </a:xfrm>
+          <a:prstGeom prst="rect">
+            <a:avLst/>
+          </a:prstGeom>
+          <a:noFill/>
+          <a:ln/>
+        </p:spPr>
+        <p:txBody>
+          <a:bodyPr wrap="square" lIns="0" tIns="0" rIns="0" bIns="0" rtlCol="0" anchor="ctr"/>
+          <a:lstStyle/>
+          <a:p>
+            <a:pPr algn="ctr" indent="0" marL="0">
+              <a:buNone/>
+            </a:pPr>
+            <a:r>
+              <a:rPr lang="en-US" sz="1000" b="1" dirty="0">
+                <a:solidFill>
+                  <a:srgbClr val="FFFFFF"/>
+                </a:solidFill>
+                <a:latin typeface="Calibri" pitchFamily="34" charset="0"/>
+                <a:ea typeface="Calibri" pitchFamily="34" charset="-122"/>
+                <a:cs typeface="Calibri" pitchFamily="34" charset="-120"/>
+              </a:rPr>
+              <a:t>8</a:t>
+            </a:r>
+            <a:endParaRPr lang="en-US" sz="1000" dirty="0"/>
+          </a:p>
+        </p:txBody>
+      </p:sp>
+      <p:sp>
+        <p:nvSpPr>
+          <p:cNvPr id="28" name="Text 25"/>
+          <p:cNvSpPr txBox="1"/>
+          <p:nvPr/>
+        </p:nvSpPr>
+        <p:spPr>
+          <a:xfrm>
+            <a:off x="6236208" y="5047488"/>
+            <a:ext cx="5394960" cy="384048"/>
+          </a:xfrm>
+          <a:prstGeom prst="rect">
+            <a:avLst/>
+          </a:prstGeom>
+          <a:noFill/>
+          <a:ln/>
+        </p:spPr>
+        <p:txBody>
+          <a:bodyPr wrap="square" lIns="0" tIns="0" rIns="0" bIns="0" rtlCol="0" anchor="ctr"/>
+          <a:lstStyle/>
+          <a:p>
+            <a:pPr indent="0" marL="0">
+              <a:buNone/>
+            </a:pPr>
+            <a:r>
+              <a:rPr lang="en-US" sz="1300" b="1" dirty="0">
+                <a:solidFill>
+                  <a:srgbClr val="12202B"/>
+                </a:solidFill>
+                <a:latin typeface="Calibri" pitchFamily="34" charset="0"/>
+                <a:ea typeface="Calibri" pitchFamily="34" charset="-122"/>
+                <a:cs typeface="Calibri" pitchFamily="34" charset="-120"/>
+              </a:rPr>
+              <a:t>Prévisions  </a:t>
+            </a:r>
+            <a:pPr indent="0" marL="0">
+              <a:buNone/>
+            </a:pPr>
+            <a:r>
+              <a:rPr lang="en-US" sz="1150" dirty="0">
+                <a:solidFill>
+                  <a:srgbClr val="5A6B7B"/>
+                </a:solidFill>
+                <a:latin typeface="Calibri" pitchFamily="34" charset="0"/>
+                <a:ea typeface="Calibri" pitchFamily="34" charset="-122"/>
+                <a:cs typeface="Calibri" pitchFamily="34" charset="-120"/>
+              </a:rPr>
+              <a:t>modèle saisonnier et validation</a:t>
+            </a:r>
+            <a:endParaRPr lang="en-US" sz="1300" dirty="0"/>
+          </a:p>
+        </p:txBody>
+      </p:sp>
+      <p:sp>
+        <p:nvSpPr>
+          <p:cNvPr id="29" name="Shape 26"/>
+          <p:cNvSpPr/>
+          <p:nvPr/>
+        </p:nvSpPr>
+        <p:spPr>
+          <a:xfrm>
+            <a:off x="5806440" y="5614416"/>
             <a:ext cx="274320" cy="274320"/>
           </a:xfrm>
           <a:prstGeom prst="ellipse">
@@ -8613,13 +10838,13 @@
       </p:sp>
       <p:sp>
         <p:nvSpPr>
-          <p:cNvPr id="27" name="Text 24"/>
-          <p:cNvSpPr txBox="1"/>
-          <p:nvPr/>
-        </p:nvSpPr>
-        <p:spPr>
-          <a:xfrm>
-            <a:off x="5806440" y="5532120"/>
+          <p:cNvPr id="30" name="Text 27"/>
+          <p:cNvSpPr txBox="1"/>
+          <p:nvPr/>
+        </p:nvSpPr>
+        <p:spPr>
+          <a:xfrm>
+            <a:off x="5806440" y="5641848"/>
             <a:ext cx="274320" cy="237744"/>
           </a:xfrm>
           <a:prstGeom prst="rect">
@@ -8644,7 +10869,7 @@
                 <a:ea typeface="Calibri" pitchFamily="34" charset="-122"/>
                 <a:cs typeface="Calibri" pitchFamily="34" charset="-120"/>
               </a:rPr>
-              <a:t>8</a:t>
+              <a:t>9</a:t>
             </a:r>
             <a:endParaRPr lang="en-US" sz="1000" dirty="0"/>
           </a:p>
@@ -8652,13 +10877,13 @@
       </p:sp>
       <p:sp>
         <p:nvSpPr>
-          <p:cNvPr id="28" name="Text 25"/>
-          <p:cNvSpPr txBox="1"/>
-          <p:nvPr/>
-        </p:nvSpPr>
-        <p:spPr>
-          <a:xfrm>
-            <a:off x="6236208" y="5449824"/>
+          <p:cNvPr id="31" name="Text 28"/>
+          <p:cNvSpPr txBox="1"/>
+          <p:nvPr/>
+        </p:nvSpPr>
+        <p:spPr>
+          <a:xfrm>
+            <a:off x="6236208" y="5559552"/>
             <a:ext cx="5394960" cy="384048"/>
           </a:xfrm>
           <a:prstGeom prst="rect">
@@ -8705,7 +10930,7 @@
       </p:sp>
       <p:sp>
         <p:nvSpPr>
-          <p:cNvPr id="29" name="Shape 26"/>
+          <p:cNvPr id="32" name="Shape 29"/>
           <p:cNvSpPr/>
           <p:nvPr/>
         </p:nvSpPr>
@@ -8732,7 +10957,7 @@
       </p:sp>
       <p:sp>
         <p:nvSpPr>
-          <p:cNvPr id="30" name="Text 27"/>
+          <p:cNvPr id="33" name="Text 30"/>
           <p:cNvSpPr txBox="1"/>
           <p:nvPr/>
         </p:nvSpPr>
@@ -10450,7 +12675,7 @@
                 <a:ea typeface="Calibri" pitchFamily="34" charset="-122"/>
                 <a:cs typeface="Calibri" pitchFamily="34" charset="-120"/>
               </a:rPr>
-              <a:t>RÉSULTAT 3 — RETARDS</a:t>
+              <a:t>RÉSULTAT 2 BIS — PAR AÉROPORT</a:t>
             </a:r>
             <a:endParaRPr lang="en-US" sz="1200" dirty="0"/>
           </a:p>
@@ -10489,7 +12714,7 @@
                 <a:ea typeface="Cambria" pitchFamily="34" charset="-122"/>
                 <a:cs typeface="Cambria" pitchFamily="34" charset="-120"/>
               </a:rPr>
-              <a:t>Le retard n'est pas subi, il s'accumule</a:t>
+              <a:t>Trois aéroports, trois régimes de trafic</a:t>
             </a:r>
             <a:endParaRPr lang="en-US" sz="3200" dirty="0"/>
           </a:p>
@@ -10497,7 +12722,7 @@
       </p:sp>
       <p:pic>
         <p:nvPicPr>
-          <p:cNvPr id="4" name="Image 0" descr="/Users/marcuslinguet/Downloads/trafic-aerien-adp/presentation/figures/01_retard_par_heure.png">    </p:cNvPr>
+          <p:cNvPr id="4" name="Image 0" descr="/Users/marcuslinguet/Downloads/trafic-aerien-adp/presentation/figures/06_facettes_mensuelles.png">    </p:cNvPr>
           <p:cNvPicPr>
             <a:picLocks noChangeAspect="1"/>
           </p:cNvPicPr>
@@ -10512,7 +12737,7 @@
         <p:spPr>
           <a:xfrm>
             <a:off x="566928" y="1371600"/>
-            <a:ext cx="7726680" cy="4325112"/>
+            <a:ext cx="7772400" cy="3675888"/>
           </a:xfrm>
           <a:prstGeom prst="rect">
             <a:avLst/>
@@ -10527,12 +12752,12 @@
         </p:nvSpPr>
         <p:spPr>
           <a:xfrm>
-            <a:off x="8503920" y="1417320"/>
-            <a:ext cx="3108960" cy="1874520"/>
+            <a:off x="8549640" y="1371600"/>
+            <a:ext cx="3090672" cy="1600200"/>
           </a:xfrm>
           <a:prstGeom prst="roundRect">
             <a:avLst>
-              <a:gd name="adj" fmla="val 3902"/>
+              <a:gd name="adj" fmla="val 4571"/>
             </a:avLst>
           </a:prstGeom>
           <a:solidFill>
@@ -10561,34 +12786,34 @@
         </p:nvSpPr>
         <p:spPr>
           <a:xfrm>
-            <a:off x="8686800" y="1554480"/>
-            <a:ext cx="2743200" cy="566928"/>
-          </a:xfrm>
-          <a:prstGeom prst="rect">
-            <a:avLst/>
-          </a:prstGeom>
-          <a:noFill/>
-          <a:ln/>
-        </p:spPr>
-        <p:txBody>
-          <a:bodyPr wrap="square" lIns="0" tIns="0" rIns="0" bIns="0" rtlCol="0" anchor="ctr"/>
-          <a:lstStyle/>
-          <a:p>
-            <a:pPr indent="0" marL="0">
-              <a:buNone/>
-            </a:pPr>
-            <a:r>
-              <a:rPr lang="en-US" sz="3000" b="1" dirty="0">
+            <a:off x="8732520" y="1499616"/>
+            <a:ext cx="2743200" cy="274320"/>
+          </a:xfrm>
+          <a:prstGeom prst="rect">
+            <a:avLst/>
+          </a:prstGeom>
+          <a:noFill/>
+          <a:ln/>
+        </p:spPr>
+        <p:txBody>
+          <a:bodyPr wrap="square" lIns="0" tIns="0" rIns="0" bIns="0" rtlCol="0" anchor="ctr"/>
+          <a:lstStyle/>
+          <a:p>
+            <a:pPr indent="0" marL="0">
+              <a:buNone/>
+            </a:pPr>
+            <a:r>
+              <a:rPr lang="en-US" sz="1100" b="1" dirty="0">
                 <a:solidFill>
                   <a:srgbClr val="E8A33D"/>
                 </a:solidFill>
-                <a:latin typeface="Cambria" pitchFamily="34" charset="0"/>
-                <a:ea typeface="Cambria" pitchFamily="34" charset="-122"/>
-                <a:cs typeface="Cambria" pitchFamily="34" charset="-120"/>
-              </a:rPr>
-              <a:t>× 30</a:t>
-            </a:r>
-            <a:endParaRPr lang="en-US" sz="3000" dirty="0"/>
+                <a:latin typeface="Calibri" pitchFamily="34" charset="0"/>
+                <a:ea typeface="Calibri" pitchFamily="34" charset="-122"/>
+                <a:cs typeface="Calibri" pitchFamily="34" charset="-120"/>
+              </a:rPr>
+              <a:t>Pourquoi ramener au jour</a:t>
+            </a:r>
+            <a:endParaRPr lang="en-US" sz="1100" dirty="0"/>
           </a:p>
         </p:txBody>
       </p:sp>
@@ -10600,8 +12825,8 @@
         </p:nvSpPr>
         <p:spPr>
           <a:xfrm>
-            <a:off x="8686800" y="2148840"/>
-            <a:ext cx="2743200" cy="1051560"/>
+            <a:off x="8732520" y="1792224"/>
+            <a:ext cx="2743200" cy="1097280"/>
           </a:xfrm>
           <a:prstGeom prst="rect">
             <a:avLst/>
@@ -10628,7 +12853,7 @@
                 <a:ea typeface="Calibri" pitchFamily="34" charset="-122"/>
                 <a:cs typeface="Calibri" pitchFamily="34" charset="-120"/>
               </a:rPr>
-              <a:t>Entre un décollage à 5 h (0,8 min de retard moyen) et un décollage à 19 h (24 min), le retard moyen est multiplié par trente.</a:t>
+              <a:t>Février compte 28 jours et juillet n'en a que 3 dans nos données. Comparer des totaux mensuels reviendrait à comparer des durées différentes.</a:t>
             </a:r>
             <a:endParaRPr lang="en-US" sz="1150" dirty="0"/>
           </a:p>
@@ -10642,8 +12867,8 @@
         </p:nvSpPr>
         <p:spPr>
           <a:xfrm>
-            <a:off x="8503920" y="3474720"/>
-            <a:ext cx="3108960" cy="2194560"/>
+            <a:off x="8549640" y="3127248"/>
+            <a:ext cx="3108960" cy="1920240"/>
           </a:xfrm>
           <a:prstGeom prst="rect">
             <a:avLst/>
@@ -10674,7 +12899,7 @@
                 <a:ea typeface="Calibri" pitchFamily="34" charset="-122"/>
                 <a:cs typeface="Calibri" pitchFamily="34" charset="-120"/>
               </a:rPr>
-              <a:t>39,1 % des départs partent en retard</a:t>
+              <a:t>EWR domine à 331 vols/jour</a:t>
             </a:r>
             <a:endParaRPr lang="en-US" sz="1200" dirty="0"/>
           </a:p>
@@ -10698,7 +12923,7 @@
                 <a:ea typeface="Calibri" pitchFamily="34" charset="-122"/>
                 <a:cs typeface="Calibri" pitchFamily="34" charset="-120"/>
               </a:rPr>
-              <a:t>12,4 min de retard moyen au départ</a:t>
+              <a:t>JFK suit à 302, LGA à 284</a:t>
             </a:r>
             <a:endParaRPr lang="en-US" sz="1200" dirty="0"/>
           </a:p>
@@ -10722,7 +12947,7 @@
                 <a:ea typeface="Calibri" pitchFamily="34" charset="-122"/>
                 <a:cs typeface="Calibri" pitchFamily="34" charset="-120"/>
               </a:rPr>
-              <a:t>7,3 min seulement à l'arrivée : une partie se rattrape en vol</a:t>
+              <a:t>Les trois suivent la même courbe : creux en février, sommet en avril</a:t>
             </a:r>
             <a:endParaRPr lang="en-US" sz="1200" dirty="0"/>
           </a:p>
@@ -10746,9 +12971,48 @@
                 <a:ea typeface="Calibri" pitchFamily="34" charset="-122"/>
                 <a:cs typeface="Calibri" pitchFamily="34" charset="-120"/>
               </a:rPr>
-              <a:t>Record : 1 301 min, un JFK → Honolulu</a:t>
+              <a:t>Chaque aéroport est comparé à sa propre moyenne, pas à celle des autres</a:t>
             </a:r>
             <a:endParaRPr lang="en-US" sz="1200" dirty="0"/>
+          </a:p>
+        </p:txBody>
+      </p:sp>
+      <p:sp>
+        <p:nvSpPr>
+          <p:cNvPr id="9" name="Text 6"/>
+          <p:cNvSpPr txBox="1"/>
+          <p:nvPr/>
+        </p:nvSpPr>
+        <p:spPr>
+          <a:xfrm>
+            <a:off x="566928" y="5257800"/>
+            <a:ext cx="11057839" cy="274320"/>
+          </a:xfrm>
+          <a:prstGeom prst="rect">
+            <a:avLst/>
+          </a:prstGeom>
+          <a:noFill/>
+          <a:ln/>
+        </p:spPr>
+        <p:txBody>
+          <a:bodyPr wrap="square" lIns="0" tIns="0" rIns="0" bIns="0" rtlCol="0" anchor="ctr"/>
+          <a:lstStyle/>
+          <a:p>
+            <a:pPr indent="0" marL="0">
+              <a:buNone/>
+            </a:pPr>
+            <a:r>
+              <a:rPr lang="en-US" sz="1000" i="1" dirty="0">
+                <a:solidFill>
+                  <a:srgbClr val="5A6B7B"/>
+                </a:solidFill>
+                <a:latin typeface="Calibri" pitchFamily="34" charset="0"/>
+                <a:ea typeface="Calibri" pitchFamily="34" charset="-122"/>
+                <a:cs typeface="Calibri" pitchFamily="34" charset="-120"/>
+              </a:rPr>
+              <a:t>Réponse à la Mission 2, §3.1 Q2 : une facette par aéroport, avec sa moyenne.</a:t>
+            </a:r>
+            <a:endParaRPr lang="en-US" sz="1000" dirty="0"/>
           </a:p>
         </p:txBody>
       </p:sp>
@@ -10810,7 +13074,7 @@
                 <a:ea typeface="Calibri" pitchFamily="34" charset="-122"/>
                 <a:cs typeface="Calibri" pitchFamily="34" charset="-120"/>
               </a:rPr>
-              <a:t>RÉSULTAT 4 — COMPAGNIES</a:t>
+              <a:t>RÉSULTAT 3 — RETARDS</a:t>
             </a:r>
             <a:endParaRPr lang="en-US" sz="1200" dirty="0"/>
           </a:p>
@@ -10849,7 +13113,7 @@
                 <a:ea typeface="Cambria" pitchFamily="34" charset="-122"/>
                 <a:cs typeface="Cambria" pitchFamily="34" charset="-120"/>
               </a:rPr>
-              <a:t>De 24 % à 59 % de vols en retard selon la compagnie</a:t>
+              <a:t>Le retard n'est pas subi, il s'accumule</a:t>
             </a:r>
             <a:endParaRPr lang="en-US" sz="3200" dirty="0"/>
           </a:p>
@@ -10857,7 +13121,7 @@
       </p:sp>
       <p:pic>
         <p:nvPicPr>
-          <p:cNvPr id="4" name="Image 0" descr="/Users/marcuslinguet/Downloads/trafic-aerien-adp/presentation/figures/03_fiabilite_compagnies.png">    </p:cNvPr>
+          <p:cNvPr id="4" name="Image 0" descr="/Users/marcuslinguet/Downloads/trafic-aerien-adp/presentation/figures/01_retard_par_heure.png">    </p:cNvPr>
           <p:cNvPicPr>
             <a:picLocks noChangeAspect="1"/>
           </p:cNvPicPr>
@@ -10872,7 +13136,7 @@
         <p:spPr>
           <a:xfrm>
             <a:off x="566928" y="1371600"/>
-            <a:ext cx="6949440" cy="4443984"/>
+            <a:ext cx="7726680" cy="4325112"/>
           </a:xfrm>
           <a:prstGeom prst="rect">
             <a:avLst/>
@@ -10887,20 +13151,20 @@
         </p:nvSpPr>
         <p:spPr>
           <a:xfrm>
-            <a:off x="7680960" y="1417320"/>
-            <a:ext cx="3931920" cy="1417320"/>
+            <a:off x="8503920" y="1417320"/>
+            <a:ext cx="3108960" cy="1874520"/>
           </a:xfrm>
           <a:prstGeom prst="roundRect">
             <a:avLst>
-              <a:gd name="adj" fmla="val 5161"/>
+              <a:gd name="adj" fmla="val 3902"/>
             </a:avLst>
           </a:prstGeom>
           <a:solidFill>
-            <a:srgbClr val="FBEDE9"/>
+            <a:srgbClr val="0B3C5D"/>
           </a:solidFill>
           <a:ln w="12700">
             <a:solidFill>
-              <a:srgbClr val="F3D3C9"/>
+              <a:srgbClr val="0B3C5D"/>
             </a:solidFill>
             <a:prstDash val="solid"/>
           </a:ln>
@@ -10921,34 +13185,34 @@
         </p:nvSpPr>
         <p:spPr>
           <a:xfrm>
-            <a:off x="7863840" y="1536192"/>
-            <a:ext cx="3566160" cy="274320"/>
-          </a:xfrm>
-          <a:prstGeom prst="rect">
-            <a:avLst/>
-          </a:prstGeom>
-          <a:noFill/>
-          <a:ln/>
-        </p:spPr>
-        <p:txBody>
-          <a:bodyPr wrap="square" lIns="0" tIns="0" rIns="0" bIns="0" rtlCol="0" anchor="ctr"/>
-          <a:lstStyle/>
-          <a:p>
-            <a:pPr indent="0" marL="0">
-              <a:buNone/>
-            </a:pPr>
-            <a:r>
-              <a:rPr lang="en-US" sz="1100" b="1" dirty="0">
-                <a:solidFill>
-                  <a:srgbClr val="E4572E"/>
-                </a:solidFill>
-                <a:latin typeface="Calibri" pitchFamily="34" charset="0"/>
-                <a:ea typeface="Calibri" pitchFamily="34" charset="-122"/>
-                <a:cs typeface="Calibri" pitchFamily="34" charset="-120"/>
-              </a:rPr>
-              <a:t>Les deux extrêmes</a:t>
-            </a:r>
-            <a:endParaRPr lang="en-US" sz="1100" dirty="0"/>
+            <a:off x="8686800" y="1554480"/>
+            <a:ext cx="2743200" cy="566928"/>
+          </a:xfrm>
+          <a:prstGeom prst="rect">
+            <a:avLst/>
+          </a:prstGeom>
+          <a:noFill/>
+          <a:ln/>
+        </p:spPr>
+        <p:txBody>
+          <a:bodyPr wrap="square" lIns="0" tIns="0" rIns="0" bIns="0" rtlCol="0" anchor="ctr"/>
+          <a:lstStyle/>
+          <a:p>
+            <a:pPr indent="0" marL="0">
+              <a:buNone/>
+            </a:pPr>
+            <a:r>
+              <a:rPr lang="en-US" sz="3000" b="1" dirty="0">
+                <a:solidFill>
+                  <a:srgbClr val="E8A33D"/>
+                </a:solidFill>
+                <a:latin typeface="Cambria" pitchFamily="34" charset="0"/>
+                <a:ea typeface="Cambria" pitchFamily="34" charset="-122"/>
+                <a:cs typeface="Cambria" pitchFamily="34" charset="-120"/>
+              </a:rPr>
+              <a:t>× 30</a:t>
+            </a:r>
+            <a:endParaRPr lang="en-US" sz="3000" dirty="0"/>
           </a:p>
         </p:txBody>
       </p:sp>
@@ -10960,8 +13224,8 @@
         </p:nvSpPr>
         <p:spPr>
           <a:xfrm>
-            <a:off x="7863840" y="1847088"/>
-            <a:ext cx="3566160" cy="914400"/>
+            <a:off x="8686800" y="2148840"/>
+            <a:ext cx="2743200" cy="1051560"/>
           </a:xfrm>
           <a:prstGeom prst="rect">
             <a:avLst/>
@@ -10974,13 +13238,59 @@
           <a:lstStyle/>
           <a:p>
             <a:pPr indent="0" marL="0">
+              <a:lnSpc>
+                <a:spcPts val="1500"/>
+              </a:lnSpc>
+              <a:buNone/>
+            </a:pPr>
+            <a:r>
+              <a:rPr lang="en-US" sz="1150" dirty="0">
+                <a:solidFill>
+                  <a:srgbClr val="CFE3F1"/>
+                </a:solidFill>
+                <a:latin typeface="Calibri" pitchFamily="34" charset="0"/>
+                <a:ea typeface="Calibri" pitchFamily="34" charset="-122"/>
+                <a:cs typeface="Calibri" pitchFamily="34" charset="-120"/>
+              </a:rPr>
+              <a:t>Entre un décollage à 5 h (0,8 min de retard moyen) et un décollage à 19 h (24 min), le retard moyen est multiplié par trente.</a:t>
+            </a:r>
+            <a:endParaRPr lang="en-US" sz="1150" dirty="0"/>
+          </a:p>
+        </p:txBody>
+      </p:sp>
+      <p:sp>
+        <p:nvSpPr>
+          <p:cNvPr id="8" name="Text 5"/>
+          <p:cNvSpPr txBox="1"/>
+          <p:nvPr/>
+        </p:nvSpPr>
+        <p:spPr>
+          <a:xfrm>
+            <a:off x="8503920" y="3474720"/>
+            <a:ext cx="3108960" cy="2194560"/>
+          </a:xfrm>
+          <a:prstGeom prst="rect">
+            <a:avLst/>
+          </a:prstGeom>
+          <a:noFill/>
+          <a:ln/>
+        </p:spPr>
+        <p:txBody>
+          <a:bodyPr wrap="square" lIns="0" tIns="0" rIns="0" bIns="0" rtlCol="0" anchor="t"/>
+          <a:lstStyle/>
+          <a:p>
+            <a:pPr marL="342900" indent="-342900">
               <a:lnSpc>
                 <a:spcPts val="1800"/>
               </a:lnSpc>
-              <a:buNone/>
-            </a:pPr>
-            <a:r>
-              <a:rPr lang="en-US" sz="1300" b="1" dirty="0">
+              <a:spcAft>
+                <a:spcPts val="700"/>
+              </a:spcAft>
+              <a:buSzPct val="100000"/>
+              <a:buChar char="•"/>
+            </a:pPr>
+            <a:r>
+              <a:rPr lang="en-US" sz="1200" dirty="0">
                 <a:solidFill>
                   <a:srgbClr val="12202B"/>
                 </a:solidFill>
@@ -10988,19 +13298,23 @@
                 <a:ea typeface="Calibri" pitchFamily="34" charset="-122"/>
                 <a:cs typeface="Calibri" pitchFamily="34" charset="-120"/>
               </a:rPr>
-              <a:t>FL — AirTran   59,2 %</a:t>
-            </a:r>
-            <a:endParaRPr lang="en-US" sz="1300" dirty="0"/>
-          </a:p>
-          <a:p>
-            <a:pPr indent="0" marL="0">
+              <a:t>39,1 % des départs partent en retard</a:t>
+            </a:r>
+            <a:endParaRPr lang="en-US" sz="1200" dirty="0"/>
+          </a:p>
+          <a:p>
+            <a:pPr marL="342900" indent="-342900">
               <a:lnSpc>
                 <a:spcPts val="1800"/>
               </a:lnSpc>
-              <a:buNone/>
-            </a:pPr>
-            <a:r>
-              <a:rPr lang="en-US" sz="1300" b="1" dirty="0">
+              <a:spcAft>
+                <a:spcPts val="700"/>
+              </a:spcAft>
+              <a:buSzPct val="100000"/>
+              <a:buChar char="•"/>
+            </a:pPr>
+            <a:r>
+              <a:rPr lang="en-US" sz="1200" dirty="0">
                 <a:solidFill>
                   <a:srgbClr val="12202B"/>
                 </a:solidFill>
@@ -11008,154 +13322,47 @@
                 <a:ea typeface="Calibri" pitchFamily="34" charset="-122"/>
                 <a:cs typeface="Calibri" pitchFamily="34" charset="-120"/>
               </a:rPr>
-              <a:t>HA — Hawaiian   24,4 %</a:t>
-            </a:r>
-            <a:endParaRPr lang="en-US" sz="1300" dirty="0"/>
-          </a:p>
-          <a:p>
-            <a:pPr indent="0" marL="0">
+              <a:t>12,4 min de retard moyen au départ</a:t>
+            </a:r>
+            <a:endParaRPr lang="en-US" sz="1200" dirty="0"/>
+          </a:p>
+          <a:p>
+            <a:pPr marL="342900" indent="-342900">
               <a:lnSpc>
                 <a:spcPts val="1800"/>
               </a:lnSpc>
-              <a:buNone/>
-            </a:pPr>
-            <a:r>
-              <a:rPr lang="en-US" sz="1050" dirty="0">
-                <a:solidFill>
-                  <a:srgbClr val="5A6B7B"/>
-                </a:solidFill>
-                <a:latin typeface="Calibri" pitchFamily="34" charset="0"/>
-                <a:ea typeface="Calibri" pitchFamily="34" charset="-122"/>
-                <a:cs typeface="Calibri" pitchFamily="34" charset="-120"/>
-              </a:rPr>
-              <a:t>Soit 34,8 points d'écart — mais sur 2 438 et 258 vols seulement.</a:t>
-            </a:r>
-            <a:endParaRPr lang="en-US" sz="1300" dirty="0"/>
-          </a:p>
-        </p:txBody>
-      </p:sp>
-      <p:sp>
-        <p:nvSpPr>
-          <p:cNvPr id="8" name="Shape 5"/>
-          <p:cNvSpPr/>
-          <p:nvPr/>
-        </p:nvSpPr>
-        <p:spPr>
-          <a:xfrm>
-            <a:off x="7680960" y="2971800"/>
-            <a:ext cx="3931920" cy="1600200"/>
-          </a:xfrm>
-          <a:prstGeom prst="roundRect">
-            <a:avLst>
-              <a:gd name="adj" fmla="val 4571"/>
-            </a:avLst>
-          </a:prstGeom>
-          <a:solidFill>
-            <a:srgbClr val="EAF6F0"/>
-          </a:solidFill>
-          <a:ln w="12700">
-            <a:solidFill>
-              <a:srgbClr val="CDE8DC"/>
-            </a:solidFill>
-            <a:prstDash val="solid"/>
-          </a:ln>
-          <a:effectLst>
-            <a:outerShdw sx="100000" sy="100000" kx="0" ky="0" algn="bl" rotWithShape="0" blurRad="101600" dist="508" dir="5400000">
-              <a:srgbClr val="9FB3C4">
-                <a:alpha val="28000"/>
-              </a:srgbClr>
-            </a:outerShdw>
-          </a:effectLst>
-        </p:spPr>
-      </p:sp>
-      <p:sp>
-        <p:nvSpPr>
-          <p:cNvPr id="9" name="Text 6"/>
-          <p:cNvSpPr txBox="1"/>
-          <p:nvPr/>
-        </p:nvSpPr>
-        <p:spPr>
-          <a:xfrm>
-            <a:off x="7863840" y="3090672"/>
-            <a:ext cx="3566160" cy="274320"/>
-          </a:xfrm>
-          <a:prstGeom prst="rect">
-            <a:avLst/>
-          </a:prstGeom>
-          <a:noFill/>
-          <a:ln/>
-        </p:spPr>
-        <p:txBody>
-          <a:bodyPr wrap="square" lIns="0" tIns="0" rIns="0" bIns="0" rtlCol="0" anchor="ctr"/>
-          <a:lstStyle/>
-          <a:p>
-            <a:pPr indent="0" marL="0">
-              <a:buNone/>
-            </a:pPr>
-            <a:r>
-              <a:rPr lang="en-US" sz="1100" b="1" dirty="0">
-                <a:solidFill>
-                  <a:srgbClr val="2E9E6B"/>
-                </a:solidFill>
-                <a:latin typeface="Calibri" pitchFamily="34" charset="0"/>
-                <a:ea typeface="Calibri" pitchFamily="34" charset="-122"/>
-                <a:cs typeface="Calibri" pitchFamily="34" charset="-120"/>
-              </a:rPr>
-              <a:t>À effectifs comparables</a:t>
-            </a:r>
-            <a:endParaRPr lang="en-US" sz="1100" dirty="0"/>
-          </a:p>
-        </p:txBody>
-      </p:sp>
-      <p:sp>
-        <p:nvSpPr>
-          <p:cNvPr id="10" name="Text 7"/>
-          <p:cNvSpPr txBox="1"/>
-          <p:nvPr/>
-        </p:nvSpPr>
-        <p:spPr>
-          <a:xfrm>
-            <a:off x="7863840" y="3401568"/>
-            <a:ext cx="3566160" cy="1051560"/>
-          </a:xfrm>
-          <a:prstGeom prst="rect">
-            <a:avLst/>
-          </a:prstGeom>
-          <a:noFill/>
-          <a:ln/>
-        </p:spPr>
-        <p:txBody>
-          <a:bodyPr wrap="square" lIns="0" tIns="0" rIns="0" bIns="0" rtlCol="0" anchor="t"/>
-          <a:lstStyle/>
-          <a:p>
-            <a:pPr indent="0" marL="0">
+              <a:spcAft>
+                <a:spcPts val="700"/>
+              </a:spcAft>
+              <a:buSzPct val="100000"/>
+              <a:buChar char="•"/>
+            </a:pPr>
+            <a:r>
+              <a:rPr lang="en-US" sz="1200" dirty="0">
+                <a:solidFill>
+                  <a:srgbClr val="12202B"/>
+                </a:solidFill>
+                <a:latin typeface="Calibri" pitchFamily="34" charset="0"/>
+                <a:ea typeface="Calibri" pitchFamily="34" charset="-122"/>
+                <a:cs typeface="Calibri" pitchFamily="34" charset="-120"/>
+              </a:rPr>
+              <a:t>7,3 min seulement à l'arrivée : une partie se rattrape en vol</a:t>
+            </a:r>
+            <a:endParaRPr lang="en-US" sz="1200" dirty="0"/>
+          </a:p>
+          <a:p>
+            <a:pPr marL="342900" indent="-342900">
               <a:lnSpc>
                 <a:spcPts val="1800"/>
               </a:lnSpc>
-              <a:buNone/>
-            </a:pPr>
-            <a:r>
-              <a:rPr lang="en-US" sz="1100" dirty="0">
-                <a:solidFill>
-                  <a:srgbClr val="5A6B7B"/>
-                </a:solidFill>
-                <a:latin typeface="Calibri" pitchFamily="34" charset="0"/>
-                <a:ea typeface="Calibri" pitchFamily="34" charset="-122"/>
-                <a:cs typeface="Calibri" pitchFamily="34" charset="-120"/>
-              </a:rPr>
-              <a:t>Parmi les compagnies dépassant 10 000 vols :</a:t>
-            </a:r>
-            <a:endParaRPr lang="en-US" sz="1250" dirty="0"/>
-          </a:p>
-          <a:p>
-            <a:pPr indent="0" marL="0">
-              <a:lnSpc>
-                <a:spcPts val="1800"/>
-              </a:lnSpc>
-              <a:buNone/>
-            </a:pPr>
-            <a:r>
-              <a:rPr lang="en-US" sz="1250" b="1" dirty="0">
+              <a:spcAft>
+                <a:spcPts val="700"/>
+              </a:spcAft>
+              <a:buSzPct val="100000"/>
+              <a:buChar char="•"/>
+            </a:pPr>
+            <a:r>
+              <a:rPr lang="en-US" sz="1200" dirty="0">
                 <a:solidFill>
                   <a:srgbClr val="12202B"/>
                 </a:solidFill>
@@ -11163,108 +13370,7 @@
                 <a:ea typeface="Calibri" pitchFamily="34" charset="-122"/>
                 <a:cs typeface="Calibri" pitchFamily="34" charset="-120"/>
               </a:rPr>
-              <a:t>DL — Delta   34,4 %</a:t>
-            </a:r>
-            <a:endParaRPr lang="en-US" sz="1250" dirty="0"/>
-          </a:p>
-          <a:p>
-            <a:pPr indent="0" marL="0">
-              <a:lnSpc>
-                <a:spcPts val="1800"/>
-              </a:lnSpc>
-              <a:buNone/>
-            </a:pPr>
-            <a:r>
-              <a:rPr lang="en-US" sz="1250" b="1" dirty="0">
-                <a:solidFill>
-                  <a:srgbClr val="12202B"/>
-                </a:solidFill>
-                <a:latin typeface="Calibri" pitchFamily="34" charset="0"/>
-                <a:ea typeface="Calibri" pitchFamily="34" charset="-122"/>
-                <a:cs typeface="Calibri" pitchFamily="34" charset="-120"/>
-              </a:rPr>
-              <a:t>EV — ExpressJet   51,0 %</a:t>
-            </a:r>
-            <a:endParaRPr lang="en-US" sz="1250" dirty="0"/>
-          </a:p>
-        </p:txBody>
-      </p:sp>
-      <p:sp>
-        <p:nvSpPr>
-          <p:cNvPr id="11" name="Text 8"/>
-          <p:cNvSpPr txBox="1"/>
-          <p:nvPr/>
-        </p:nvSpPr>
-        <p:spPr>
-          <a:xfrm>
-            <a:off x="7680960" y="4736592"/>
-            <a:ext cx="3931920" cy="274320"/>
-          </a:xfrm>
-          <a:prstGeom prst="rect">
-            <a:avLst/>
-          </a:prstGeom>
-          <a:noFill/>
-          <a:ln/>
-        </p:spPr>
-        <p:txBody>
-          <a:bodyPr wrap="square" lIns="0" tIns="0" rIns="0" bIns="0" rtlCol="0" anchor="ctr"/>
-          <a:lstStyle/>
-          <a:p>
-            <a:pPr indent="0" marL="0">
-              <a:buNone/>
-            </a:pPr>
-            <a:r>
-              <a:rPr lang="en-US" sz="1400" b="1" dirty="0">
-                <a:solidFill>
-                  <a:srgbClr val="12202B"/>
-                </a:solidFill>
-                <a:latin typeface="Cambria" pitchFamily="34" charset="0"/>
-                <a:ea typeface="Cambria" pitchFamily="34" charset="-122"/>
-                <a:cs typeface="Cambria" pitchFamily="34" charset="-120"/>
-              </a:rPr>
-              <a:t>Et par aéroport de départ</a:t>
-            </a:r>
-            <a:endParaRPr lang="en-US" sz="1400" dirty="0"/>
-          </a:p>
-        </p:txBody>
-      </p:sp>
-      <p:sp>
-        <p:nvSpPr>
-          <p:cNvPr id="12" name="Text 9"/>
-          <p:cNvSpPr txBox="1"/>
-          <p:nvPr/>
-        </p:nvSpPr>
-        <p:spPr>
-          <a:xfrm>
-            <a:off x="7680960" y="5029200"/>
-            <a:ext cx="3931920" cy="822960"/>
-          </a:xfrm>
-          <a:prstGeom prst="rect">
-            <a:avLst/>
-          </a:prstGeom>
-          <a:noFill/>
-          <a:ln/>
-        </p:spPr>
-        <p:txBody>
-          <a:bodyPr wrap="square" lIns="0" tIns="0" rIns="0" bIns="0" rtlCol="0" anchor="t"/>
-          <a:lstStyle/>
-          <a:p>
-            <a:pPr indent="0" marL="0">
-              <a:lnSpc>
-                <a:spcPts val="1600"/>
-              </a:lnSpc>
-              <a:buNone/>
-            </a:pPr>
-            <a:r>
-              <a:rPr lang="en-US" sz="1200" dirty="0">
-                <a:solidFill>
-                  <a:srgbClr val="5A6B7B"/>
-                </a:solidFill>
-                <a:latin typeface="Calibri" pitchFamily="34" charset="0"/>
-                <a:ea typeface="Calibri" pitchFamily="34" charset="-122"/>
-                <a:cs typeface="Calibri" pitchFamily="34" charset="-120"/>
-              </a:rPr>
-              <a:t>EWR est le plus pénalisé (15,4 min de retard moyen au départ), devant JFK (11,4 min) et LGA (9,9 min).</a:t>
+              <a:t>Record : 1 301 min, un JFK → Honolulu</a:t>
             </a:r>
             <a:endParaRPr lang="en-US" sz="1200" dirty="0"/>
           </a:p>
@@ -11328,7 +13434,7 @@
                 <a:ea typeface="Calibri" pitchFamily="34" charset="-122"/>
                 <a:cs typeface="Calibri" pitchFamily="34" charset="-120"/>
               </a:rPr>
-              <a:t>RÉSULTAT 5 — DISTANCE</a:t>
+              <a:t>RÉSULTAT 4 — COMPAGNIES</a:t>
             </a:r>
             <a:endParaRPr lang="en-US" sz="1200" dirty="0"/>
           </a:p>
@@ -11367,7 +13473,7 @@
                 <a:ea typeface="Cambria" pitchFamily="34" charset="-122"/>
                 <a:cs typeface="Cambria" pitchFamily="34" charset="-120"/>
               </a:rPr>
-              <a:t>Plus c'est loin, moins le retard pèse</a:t>
+              <a:t>De 24 % à 59 % de vols en retard selon la compagnie</a:t>
             </a:r>
             <a:endParaRPr lang="en-US" sz="3200" dirty="0"/>
           </a:p>
@@ -11375,7 +13481,7 @@
       </p:sp>
       <p:pic>
         <p:nvPicPr>
-          <p:cNvPr id="4" name="Image 0" descr="/Users/marcuslinguet/Downloads/trafic-aerien-adp/presentation/figures/04_distance_retard.png">    </p:cNvPr>
+          <p:cNvPr id="4" name="Image 0" descr="/Users/marcuslinguet/Downloads/trafic-aerien-adp/presentation/figures/03_fiabilite_compagnies.png">    </p:cNvPr>
           <p:cNvPicPr>
             <a:picLocks noChangeAspect="1"/>
           </p:cNvPicPr>
@@ -11390,7 +13496,7 @@
         <p:spPr>
           <a:xfrm>
             <a:off x="566928" y="1371600"/>
-            <a:ext cx="7589520" cy="4251960"/>
+            <a:ext cx="6949440" cy="4443984"/>
           </a:xfrm>
           <a:prstGeom prst="rect">
             <a:avLst/>
@@ -11405,20 +13511,20 @@
         </p:nvSpPr>
         <p:spPr>
           <a:xfrm>
-            <a:off x="8366760" y="1417320"/>
-            <a:ext cx="3246120" cy="1234440"/>
+            <a:off x="7680960" y="1417320"/>
+            <a:ext cx="3931920" cy="1417320"/>
           </a:xfrm>
           <a:prstGeom prst="roundRect">
             <a:avLst>
-              <a:gd name="adj" fmla="val 5926"/>
+              <a:gd name="adj" fmla="val 5161"/>
             </a:avLst>
           </a:prstGeom>
           <a:solidFill>
-            <a:srgbClr val="0B3C5D"/>
+            <a:srgbClr val="FBEDE9"/>
           </a:solidFill>
           <a:ln w="12700">
             <a:solidFill>
-              <a:srgbClr val="0B3C5D"/>
+              <a:srgbClr val="F3D3C9"/>
             </a:solidFill>
             <a:prstDash val="solid"/>
           </a:ln>
@@ -11439,34 +13545,34 @@
         </p:nvSpPr>
         <p:spPr>
           <a:xfrm>
-            <a:off x="8513064" y="1527048"/>
-            <a:ext cx="2953512" cy="566928"/>
-          </a:xfrm>
-          <a:prstGeom prst="rect">
-            <a:avLst/>
-          </a:prstGeom>
-          <a:noFill/>
-          <a:ln/>
-        </p:spPr>
-        <p:txBody>
-          <a:bodyPr wrap="square" lIns="0" tIns="0" rIns="0" bIns="0" rtlCol="0" anchor="ctr"/>
-          <a:lstStyle/>
-          <a:p>
-            <a:pPr indent="0" marL="0">
-              <a:buNone/>
-            </a:pPr>
-            <a:r>
-              <a:rPr lang="en-US" sz="2400" b="1" dirty="0">
-                <a:solidFill>
-                  <a:srgbClr val="FFFFFF"/>
-                </a:solidFill>
-                <a:latin typeface="Cambria" pitchFamily="34" charset="0"/>
-                <a:ea typeface="Cambria" pitchFamily="34" charset="-122"/>
-                <a:cs typeface="Cambria" pitchFamily="34" charset="-120"/>
-              </a:rPr>
-              <a:t>r = −0,47</a:t>
-            </a:r>
-            <a:endParaRPr lang="en-US" sz="2400" dirty="0"/>
+            <a:off x="7863840" y="1536192"/>
+            <a:ext cx="3566160" cy="274320"/>
+          </a:xfrm>
+          <a:prstGeom prst="rect">
+            <a:avLst/>
+          </a:prstGeom>
+          <a:noFill/>
+          <a:ln/>
+        </p:spPr>
+        <p:txBody>
+          <a:bodyPr wrap="square" lIns="0" tIns="0" rIns="0" bIns="0" rtlCol="0" anchor="ctr"/>
+          <a:lstStyle/>
+          <a:p>
+            <a:pPr indent="0" marL="0">
+              <a:buNone/>
+            </a:pPr>
+            <a:r>
+              <a:rPr lang="en-US" sz="1100" b="1" dirty="0">
+                <a:solidFill>
+                  <a:srgbClr val="E4572E"/>
+                </a:solidFill>
+                <a:latin typeface="Calibri" pitchFamily="34" charset="0"/>
+                <a:ea typeface="Calibri" pitchFamily="34" charset="-122"/>
+                <a:cs typeface="Calibri" pitchFamily="34" charset="-120"/>
+              </a:rPr>
+              <a:t>Les deux extrêmes</a:t>
+            </a:r>
+            <a:endParaRPr lang="en-US" sz="1100" dirty="0"/>
           </a:p>
         </p:txBody>
       </p:sp>
@@ -11478,8 +13584,8 @@
         </p:nvSpPr>
         <p:spPr>
           <a:xfrm>
-            <a:off x="8513064" y="2093976"/>
-            <a:ext cx="2953512" cy="448056"/>
+            <a:off x="7863840" y="1847088"/>
+            <a:ext cx="3566160" cy="914400"/>
           </a:xfrm>
           <a:prstGeom prst="rect">
             <a:avLst/>
@@ -11492,20 +13598,63 @@
           <a:lstStyle/>
           <a:p>
             <a:pPr indent="0" marL="0">
-              <a:buNone/>
-            </a:pPr>
-            <a:r>
-              <a:rPr lang="en-US" sz="1150" dirty="0">
-                <a:solidFill>
-                  <a:srgbClr val="CFE3F1"/>
-                </a:solidFill>
-                <a:latin typeface="Calibri" pitchFamily="34" charset="0"/>
-                <a:ea typeface="Calibri" pitchFamily="34" charset="-122"/>
-                <a:cs typeface="Calibri" pitchFamily="34" charset="-120"/>
-              </a:rPr>
-              <a:t>corrélation entre distance moyenne et retard moyen à l'arrivée, sur 100 destinations</a:t>
-            </a:r>
-            <a:endParaRPr lang="en-US" sz="1150" dirty="0"/>
+              <a:lnSpc>
+                <a:spcPts val="1800"/>
+              </a:lnSpc>
+              <a:buNone/>
+            </a:pPr>
+            <a:r>
+              <a:rPr lang="en-US" sz="1300" b="1" dirty="0">
+                <a:solidFill>
+                  <a:srgbClr val="12202B"/>
+                </a:solidFill>
+                <a:latin typeface="Calibri" pitchFamily="34" charset="0"/>
+                <a:ea typeface="Calibri" pitchFamily="34" charset="-122"/>
+                <a:cs typeface="Calibri" pitchFamily="34" charset="-120"/>
+              </a:rPr>
+              <a:t>FL — AirTran   59,2 %</a:t>
+            </a:r>
+            <a:endParaRPr lang="en-US" sz="1300" dirty="0"/>
+          </a:p>
+          <a:p>
+            <a:pPr indent="0" marL="0">
+              <a:lnSpc>
+                <a:spcPts val="1800"/>
+              </a:lnSpc>
+              <a:buNone/>
+            </a:pPr>
+            <a:r>
+              <a:rPr lang="en-US" sz="1300" b="1" dirty="0">
+                <a:solidFill>
+                  <a:srgbClr val="12202B"/>
+                </a:solidFill>
+                <a:latin typeface="Calibri" pitchFamily="34" charset="0"/>
+                <a:ea typeface="Calibri" pitchFamily="34" charset="-122"/>
+                <a:cs typeface="Calibri" pitchFamily="34" charset="-120"/>
+              </a:rPr>
+              <a:t>HA — Hawaiian   24,4 %</a:t>
+            </a:r>
+            <a:endParaRPr lang="en-US" sz="1300" dirty="0"/>
+          </a:p>
+          <a:p>
+            <a:pPr indent="0" marL="0">
+              <a:lnSpc>
+                <a:spcPts val="1800"/>
+              </a:lnSpc>
+              <a:buNone/>
+            </a:pPr>
+            <a:r>
+              <a:rPr lang="en-US" sz="1050" dirty="0">
+                <a:solidFill>
+                  <a:srgbClr val="5A6B7B"/>
+                </a:solidFill>
+                <a:latin typeface="Calibri" pitchFamily="34" charset="0"/>
+                <a:ea typeface="Calibri" pitchFamily="34" charset="-122"/>
+                <a:cs typeface="Calibri" pitchFamily="34" charset="-120"/>
+              </a:rPr>
+              <a:t>Soit 34,8 points d'écart — mais sur 2 438 et 258 vols seulement.</a:t>
+            </a:r>
+            <a:endParaRPr lang="en-US" sz="1300" dirty="0"/>
           </a:p>
         </p:txBody>
       </p:sp>
@@ -11517,20 +13666,20 @@
         </p:nvSpPr>
         <p:spPr>
           <a:xfrm>
-            <a:off x="8366760" y="2761488"/>
-            <a:ext cx="3246120" cy="2880360"/>
+            <a:off x="7680960" y="2971800"/>
+            <a:ext cx="3931920" cy="1600200"/>
           </a:xfrm>
           <a:prstGeom prst="roundRect">
             <a:avLst>
-              <a:gd name="adj" fmla="val 2540"/>
+              <a:gd name="adj" fmla="val 4571"/>
             </a:avLst>
           </a:prstGeom>
           <a:solidFill>
-            <a:srgbClr val="E8F1F8"/>
+            <a:srgbClr val="EAF6F0"/>
           </a:solidFill>
           <a:ln w="12700">
             <a:solidFill>
-              <a:srgbClr val="CFE3F1"/>
+              <a:srgbClr val="CDE8DC"/>
             </a:solidFill>
             <a:prstDash val="solid"/>
           </a:ln>
@@ -11551,8 +13700,8 @@
         </p:nvSpPr>
         <p:spPr>
           <a:xfrm>
-            <a:off x="8549640" y="2871216"/>
-            <a:ext cx="2880360" cy="274320"/>
+            <a:off x="7863840" y="3090672"/>
+            <a:ext cx="3566160" cy="274320"/>
           </a:xfrm>
           <a:prstGeom prst="rect">
             <a:avLst/>
@@ -11570,13 +13719,13 @@
             <a:r>
               <a:rPr lang="en-US" sz="1100" b="1" dirty="0">
                 <a:solidFill>
-                  <a:srgbClr val="1D8AC1"/>
-                </a:solidFill>
-                <a:latin typeface="Calibri" pitchFamily="34" charset="0"/>
-                <a:ea typeface="Calibri" pitchFamily="34" charset="-122"/>
-                <a:cs typeface="Calibri" pitchFamily="34" charset="-120"/>
-              </a:rPr>
-              <a:t>Deux extrêmes</a:t>
+                  <a:srgbClr val="2E9E6B"/>
+                </a:solidFill>
+                <a:latin typeface="Calibri" pitchFamily="34" charset="0"/>
+                <a:ea typeface="Calibri" pitchFamily="34" charset="-122"/>
+                <a:cs typeface="Calibri" pitchFamily="34" charset="-120"/>
+              </a:rPr>
+              <a:t>À effectifs comparables</a:t>
             </a:r>
             <a:endParaRPr lang="en-US" sz="1100" dirty="0"/>
           </a:p>
@@ -11590,8 +13739,129 @@
         </p:nvSpPr>
         <p:spPr>
           <a:xfrm>
-            <a:off x="8549640" y="3200400"/>
-            <a:ext cx="2880360" cy="1417320"/>
+            <a:off x="7863840" y="3401568"/>
+            <a:ext cx="3566160" cy="1051560"/>
+          </a:xfrm>
+          <a:prstGeom prst="rect">
+            <a:avLst/>
+          </a:prstGeom>
+          <a:noFill/>
+          <a:ln/>
+        </p:spPr>
+        <p:txBody>
+          <a:bodyPr wrap="square" lIns="0" tIns="0" rIns="0" bIns="0" rtlCol="0" anchor="t"/>
+          <a:lstStyle/>
+          <a:p>
+            <a:pPr indent="0" marL="0">
+              <a:lnSpc>
+                <a:spcPts val="1800"/>
+              </a:lnSpc>
+              <a:buNone/>
+            </a:pPr>
+            <a:r>
+              <a:rPr lang="en-US" sz="1100" dirty="0">
+                <a:solidFill>
+                  <a:srgbClr val="5A6B7B"/>
+                </a:solidFill>
+                <a:latin typeface="Calibri" pitchFamily="34" charset="0"/>
+                <a:ea typeface="Calibri" pitchFamily="34" charset="-122"/>
+                <a:cs typeface="Calibri" pitchFamily="34" charset="-120"/>
+              </a:rPr>
+              <a:t>Parmi les compagnies dépassant 10 000 vols :</a:t>
+            </a:r>
+            <a:endParaRPr lang="en-US" sz="1250" dirty="0"/>
+          </a:p>
+          <a:p>
+            <a:pPr indent="0" marL="0">
+              <a:lnSpc>
+                <a:spcPts val="1800"/>
+              </a:lnSpc>
+              <a:buNone/>
+            </a:pPr>
+            <a:r>
+              <a:rPr lang="en-US" sz="1250" b="1" dirty="0">
+                <a:solidFill>
+                  <a:srgbClr val="12202B"/>
+                </a:solidFill>
+                <a:latin typeface="Calibri" pitchFamily="34" charset="0"/>
+                <a:ea typeface="Calibri" pitchFamily="34" charset="-122"/>
+                <a:cs typeface="Calibri" pitchFamily="34" charset="-120"/>
+              </a:rPr>
+              <a:t>DL — Delta   34,4 %</a:t>
+            </a:r>
+            <a:endParaRPr lang="en-US" sz="1250" dirty="0"/>
+          </a:p>
+          <a:p>
+            <a:pPr indent="0" marL="0">
+              <a:lnSpc>
+                <a:spcPts val="1800"/>
+              </a:lnSpc>
+              <a:buNone/>
+            </a:pPr>
+            <a:r>
+              <a:rPr lang="en-US" sz="1250" b="1" dirty="0">
+                <a:solidFill>
+                  <a:srgbClr val="12202B"/>
+                </a:solidFill>
+                <a:latin typeface="Calibri" pitchFamily="34" charset="0"/>
+                <a:ea typeface="Calibri" pitchFamily="34" charset="-122"/>
+                <a:cs typeface="Calibri" pitchFamily="34" charset="-120"/>
+              </a:rPr>
+              <a:t>EV — ExpressJet   51,0 %</a:t>
+            </a:r>
+            <a:endParaRPr lang="en-US" sz="1250" dirty="0"/>
+          </a:p>
+        </p:txBody>
+      </p:sp>
+      <p:sp>
+        <p:nvSpPr>
+          <p:cNvPr id="11" name="Text 8"/>
+          <p:cNvSpPr txBox="1"/>
+          <p:nvPr/>
+        </p:nvSpPr>
+        <p:spPr>
+          <a:xfrm>
+            <a:off x="7680960" y="4736592"/>
+            <a:ext cx="3931920" cy="274320"/>
+          </a:xfrm>
+          <a:prstGeom prst="rect">
+            <a:avLst/>
+          </a:prstGeom>
+          <a:noFill/>
+          <a:ln/>
+        </p:spPr>
+        <p:txBody>
+          <a:bodyPr wrap="square" lIns="0" tIns="0" rIns="0" bIns="0" rtlCol="0" anchor="ctr"/>
+          <a:lstStyle/>
+          <a:p>
+            <a:pPr indent="0" marL="0">
+              <a:buNone/>
+            </a:pPr>
+            <a:r>
+              <a:rPr lang="en-US" sz="1400" b="1" dirty="0">
+                <a:solidFill>
+                  <a:srgbClr val="12202B"/>
+                </a:solidFill>
+                <a:latin typeface="Cambria" pitchFamily="34" charset="0"/>
+                <a:ea typeface="Cambria" pitchFamily="34" charset="-122"/>
+                <a:cs typeface="Cambria" pitchFamily="34" charset="-120"/>
+              </a:rPr>
+              <a:t>Et par aéroport de départ</a:t>
+            </a:r>
+            <a:endParaRPr lang="en-US" sz="1400" dirty="0"/>
+          </a:p>
+        </p:txBody>
+      </p:sp>
+      <p:sp>
+        <p:nvSpPr>
+          <p:cNvPr id="12" name="Text 9"/>
+          <p:cNvSpPr txBox="1"/>
+          <p:nvPr/>
+        </p:nvSpPr>
+        <p:spPr>
+          <a:xfrm>
+            <a:off x="7680960" y="5029200"/>
+            <a:ext cx="3931920" cy="822960"/>
           </a:xfrm>
           <a:prstGeom prst="rect">
             <a:avLst/>
@@ -11610,109 +13880,7 @@
               <a:buNone/>
             </a:pPr>
             <a:r>
-              <a:rPr lang="en-US" sz="1150" dirty="0">
-                <a:solidFill>
-                  <a:srgbClr val="12202B"/>
-                </a:solidFill>
-                <a:latin typeface="Calibri" pitchFamily="34" charset="0"/>
-                <a:ea typeface="Calibri" pitchFamily="34" charset="-122"/>
-                <a:cs typeface="Calibri" pitchFamily="34" charset="-120"/>
-              </a:rPr>
-              <a:t>PHL, 94 miles → 11,8 min de retard</a:t>
-            </a:r>
-            <a:endParaRPr lang="en-US" sz="1150" dirty="0"/>
-          </a:p>
-          <a:p>
-            <a:pPr indent="0" marL="0">
-              <a:lnSpc>
-                <a:spcPts val="1600"/>
-              </a:lnSpc>
-              <a:buNone/>
-            </a:pPr>
-            <a:r>
-              <a:rPr lang="en-US" sz="1150" dirty="0">
-                <a:solidFill>
-                  <a:srgbClr val="12202B"/>
-                </a:solidFill>
-                <a:latin typeface="Calibri" pitchFamily="34" charset="0"/>
-                <a:ea typeface="Calibri" pitchFamily="34" charset="-122"/>
-                <a:cs typeface="Calibri" pitchFamily="34" charset="-120"/>
-              </a:rPr>
-              <a:t>ALB, 143 miles → 17,5 min</a:t>
-            </a:r>
-            <a:endParaRPr lang="en-US" sz="1150" dirty="0"/>
-          </a:p>
-          <a:p>
-            <a:pPr indent="0" marL="0">
-              <a:lnSpc>
-                <a:spcPts val="1600"/>
-              </a:lnSpc>
-              <a:buNone/>
-            </a:pPr>
-            <a:r>
-              <a:rPr lang="en-US" sz="1150" b="1" dirty="0">
-                <a:solidFill>
-                  <a:srgbClr val="2E9E6B"/>
-                </a:solidFill>
-                <a:latin typeface="Calibri" pitchFamily="34" charset="0"/>
-                <a:ea typeface="Calibri" pitchFamily="34" charset="-122"/>
-                <a:cs typeface="Calibri" pitchFamily="34" charset="-120"/>
-              </a:rPr>
-              <a:t>SFO, 2 578 miles → 0,7 min</a:t>
-            </a:r>
-            <a:endParaRPr lang="en-US" sz="1150" dirty="0"/>
-          </a:p>
-          <a:p>
-            <a:pPr indent="0" marL="0">
-              <a:lnSpc>
-                <a:spcPts val="1600"/>
-              </a:lnSpc>
-              <a:buNone/>
-            </a:pPr>
-            <a:r>
-              <a:rPr lang="en-US" sz="1150" b="1" dirty="0">
-                <a:solidFill>
-                  <a:srgbClr val="2E9E6B"/>
-                </a:solidFill>
-                <a:latin typeface="Calibri" pitchFamily="34" charset="0"/>
-                <a:ea typeface="Calibri" pitchFamily="34" charset="-122"/>
-                <a:cs typeface="Calibri" pitchFamily="34" charset="-120"/>
-              </a:rPr>
-              <a:t>SJC, 2 569 miles → −0,2 min, soit en avance</a:t>
-            </a:r>
-            <a:endParaRPr lang="en-US" sz="1150" dirty="0"/>
-          </a:p>
-        </p:txBody>
-      </p:sp>
-      <p:sp>
-        <p:nvSpPr>
-          <p:cNvPr id="11" name="Text 8"/>
-          <p:cNvSpPr txBox="1"/>
-          <p:nvPr/>
-        </p:nvSpPr>
-        <p:spPr>
-          <a:xfrm>
-            <a:off x="8549640" y="4709160"/>
-            <a:ext cx="2880360" cy="822960"/>
-          </a:xfrm>
-          <a:prstGeom prst="rect">
-            <a:avLst/>
-          </a:prstGeom>
-          <a:noFill/>
-          <a:ln/>
-        </p:spPr>
-        <p:txBody>
-          <a:bodyPr wrap="square" lIns="0" tIns="0" rIns="0" bIns="0" rtlCol="0" anchor="t"/>
-          <a:lstStyle/>
-          <a:p>
-            <a:pPr indent="0" marL="0">
-              <a:lnSpc>
-                <a:spcPts val="1500"/>
-              </a:lnSpc>
-              <a:buNone/>
-            </a:pPr>
-            <a:r>
-              <a:rPr lang="en-US" sz="1100" i="1" dirty="0">
+              <a:rPr lang="en-US" sz="1200" dirty="0">
                 <a:solidFill>
                   <a:srgbClr val="5A6B7B"/>
                 </a:solidFill>
@@ -11720,9 +13888,9 @@
                 <a:ea typeface="Calibri" pitchFamily="34" charset="-122"/>
                 <a:cs typeface="Calibri" pitchFamily="34" charset="-120"/>
               </a:rPr>
-              <a:t>Sur un vol long, la marge inscrite à l'horaire suffit à absorber le retard au départ. Le record de rattrapage observé : 47 min regagnées sur un JFK → IAD de 41 min de vol.</a:t>
-            </a:r>
-            <a:endParaRPr lang="en-US" sz="1100" dirty="0"/>
+              <a:t>EWR est le plus pénalisé (15,4 min de retard moyen au départ), devant JFK (11,4 min) et LGA (9,9 min).</a:t>
+            </a:r>
+            <a:endParaRPr lang="en-US" sz="1200" dirty="0"/>
           </a:p>
         </p:txBody>
       </p:sp>

--- a/presentation/Trafic_Aerien_ADP_presentation.pptx
+++ b/presentation/Trafic_Aerien_ADP_presentation.pptx
@@ -1874,7 +1874,7 @@
           <a:p>
             <a:r>
               <a:rPr lang="en-US" dirty="0"/>
-              <a:t>Deux enseignements. D'abord un rythme hebdomadaire très marqué, typique d'un trafic d'affaires. Ensuite une limite du jeu de données qu'il faut annoncer : il manque presque trois mois. Le dashboard laisse volontairement le trou visible au lieu de relier les points.</a:t>
+              <a:t>Deux enseignements. D'abord un rythme hebdomadaire très marqué, typique d'un trafic d'affaires. Ensuite une limite du jeu de données qu'il faut annoncer : il manque presque trois mois. Le dashboard laisse volontairement le trou visible au lieu de relier les points. Attention si on nous interroge sur le week-end : le chiffre doit être calculé sur le vrai calendrier, voir la slide suivante sur l'année de la base.</a:t>
             </a:r>
             <a:endParaRPr lang="en-US" dirty="0"/>
           </a:p>
@@ -4358,7 +4358,7 @@
               <a:buChar char="•"/>
             </a:pPr>
             <a:r>
-              <a:rPr lang="en-US" sz="1200" dirty="0">
+              <a:rPr lang="en-US" sz="1150" dirty="0">
                 <a:solidFill>
                   <a:srgbClr val="12202B"/>
                 </a:solidFill>
@@ -4366,9 +4366,9 @@
                 <a:ea typeface="Calibri" pitchFamily="34" charset="-122"/>
                 <a:cs typeface="Calibri" pitchFamily="34" charset="-120"/>
               </a:rPr>
-              <a:t>Sans correction, l'effet du samedi est attribué au mardi et le modèle apprend un rythme faux</a:t>
-            </a:r>
-            <a:endParaRPr lang="en-US" sz="1200" dirty="0"/>
+              <a:t>Semaine contre week-end : 25,1 % des vols le week-end sur le vrai calendrier, contre 29,7 % avec la colonne year — pour 28,3 % des jours. La conclusion s'inverse</a:t>
+            </a:r>
+            <a:endParaRPr lang="en-US" sz="1150" dirty="0"/>
           </a:p>
           <a:p>
             <a:pPr marL="342900" indent="-342900">
@@ -4382,7 +4382,7 @@
               <a:buChar char="•"/>
             </a:pPr>
             <a:r>
-              <a:rPr lang="en-US" sz="1200" dirty="0">
+              <a:rPr lang="en-US" sz="1150" dirty="0">
                 <a:solidFill>
                   <a:srgbClr val="12202B"/>
                 </a:solidFill>
@@ -4390,9 +4390,9 @@
                 <a:ea typeface="Calibri" pitchFamily="34" charset="-122"/>
                 <a:cs typeface="Calibri" pitchFamily="34" charset="-120"/>
               </a:rPr>
-              <a:t>L'onglet Prévisions raisonne donc en calendrier 2013 et l'affiche à l'écran</a:t>
-            </a:r>
-            <a:endParaRPr lang="en-US" sz="1200" dirty="0"/>
+              <a:t>L'effet du samedi était attribué au mardi : le modèle apprenait un rythme faux</a:t>
+            </a:r>
+            <a:endParaRPr lang="en-US" sz="1150" dirty="0"/>
           </a:p>
           <a:p>
             <a:pPr marL="342900" indent="-342900">
@@ -4406,7 +4406,7 @@
               <a:buChar char="•"/>
             </a:pPr>
             <a:r>
-              <a:rPr lang="en-US" sz="1200" dirty="0">
+              <a:rPr lang="en-US" sz="1150" dirty="0">
                 <a:solidFill>
                   <a:srgbClr val="12202B"/>
                 </a:solidFill>
@@ -4414,9 +4414,9 @@
                 <a:ea typeface="Calibri" pitchFamily="34" charset="-122"/>
                 <a:cs typeface="Calibri" pitchFamily="34" charset="-120"/>
               </a:rPr>
-              <a:t>Le jeu de référence nycflights13 porte bien sur 2013 : tout concorde</a:t>
-            </a:r>
-            <a:endParaRPr lang="en-US" sz="1200" dirty="0"/>
+              <a:t>Corrigé dans le dashboard ; l'endpoint /traffic/weekday-vs-weekend reste à reprendre côté backend</a:t>
+            </a:r>
+            <a:endParaRPr lang="en-US" sz="1150" dirty="0"/>
           </a:p>
         </p:txBody>
       </p:sp>
@@ -12251,7 +12251,7 @@
                 <a:ea typeface="Cambria" pitchFamily="34" charset="-122"/>
                 <a:cs typeface="Cambria" pitchFamily="34" charset="-120"/>
               </a:rPr>
-              <a:t>Un trafic très régulier, sauf le dimanche</a:t>
+              <a:t>Un trafic très régulier, sauf le samedi</a:t>
             </a:r>
             <a:endParaRPr lang="en-US" sz="3200" dirty="0"/>
           </a:p>
@@ -12348,7 +12348,7 @@
                 <a:ea typeface="Cambria" pitchFamily="34" charset="-122"/>
                 <a:cs typeface="Cambria" pitchFamily="34" charset="-120"/>
               </a:rPr>
-              <a:t>70,3 %</a:t>
+              <a:t>−15 %</a:t>
             </a:r>
             <a:endParaRPr lang="en-US" sz="2600" dirty="0"/>
           </a:p>
@@ -12387,7 +12387,7 @@
                 <a:ea typeface="Calibri" pitchFamily="34" charset="-122"/>
                 <a:cs typeface="Calibri" pitchFamily="34" charset="-120"/>
               </a:rPr>
-              <a:t>des vols ont lieu en semaine, contre 29,7 % le week-end</a:t>
+              <a:t>de trafic le week-end : 814 vols par jour contre 956 en semaine</a:t>
             </a:r>
             <a:endParaRPr lang="en-US" sz="1150" dirty="0"/>
           </a:p>

--- a/presentation/Trafic_Aerien_ADP_presentation.pptx
+++ b/presentation/Trafic_Aerien_ADP_presentation.pptx
@@ -12611,7 +12611,7 @@
                 <a:ea typeface="Calibri" pitchFamily="34" charset="-122"/>
                 <a:cs typeface="Calibri" pitchFamily="34" charset="-120"/>
               </a:rPr>
-              <a:t>vols par jour en moyenne, avec un creux hebdomadaire net le dimanche</a:t>
+              <a:t>vols par jour en moyenne, avec un creux hebdomadaire net le samedi</a:t>
             </a:r>
             <a:endParaRPr lang="en-US" sz="1150" dirty="0"/>
           </a:p>

--- a/presentation/Trafic_Aerien_ADP_presentation.pptx
+++ b/presentation/Trafic_Aerien_ADP_presentation.pptx
@@ -690,7 +690,7 @@
           <a:p>
             <a:r>
               <a:rPr lang="en-US" dirty="0"/>
-              <a:t>C'est ici que je fais la démonstration live. Enchaînement conseillé : l'onglet Vols pour montrer que les filtres, le tri et la pagination sont exécutés par l'API et que le dashboard ne charge qu'une page à la fois, puis la carte, puis les prévisions.</a:t>
+              <a:t>Hedi mène la démonstration live, sur son poste : c'est son API que le dashboard interroge, donc c'est lui qui peut répondre si on demande d'où sort un chiffre. Parcours conseillé, trois minutes : l'onglet Vols pour montrer que les filtres, le tri et la pagination sont exécutés par l'API et que le dashboard ne charge qu'une page à la fois ; la Carte pour l'interactivité ; puis passer la main à Marcus sur l'onglet Prévisions. Les deux captures de cette slide servent de repli : si l'application ne démarre pas, on présente sur les images sans rien changer au discours. À faire tourner une fois avant la soutenance, avec les trois commandes de la dernière slide.</a:t>
             </a:r>
             <a:endParaRPr lang="en-US" dirty="0"/>
           </a:p>
@@ -2910,7 +2910,7 @@
                 <a:ea typeface="Calibri" pitchFamily="34" charset="-122"/>
                 <a:cs typeface="Calibri" pitchFamily="34" charset="-120"/>
               </a:rPr>
-              <a:t>BLOC 3 — REPORTING  ·  MARCUS</a:t>
+              <a:t>BLOC 3 — DÉMONSTRATION  ·  HEDI</a:t>
             </a:r>
             <a:endParaRPr lang="en-US" sz="1200" dirty="0"/>
           </a:p>
@@ -2972,7 +2972,7 @@
         <p:spPr>
           <a:xfrm>
             <a:off x="566928" y="1371600"/>
-            <a:ext cx="4892040" cy="4572000"/>
+            <a:ext cx="3977640" cy="3712464"/>
           </a:xfrm>
           <a:prstGeom prst="rect">
             <a:avLst/>
@@ -2981,14 +2981,155 @@
       </p:pic>
       <p:sp>
         <p:nvSpPr>
-          <p:cNvPr id="5" name="Shape 2"/>
+          <p:cNvPr id="5" name="Text 2"/>
+          <p:cNvSpPr txBox="1"/>
+          <p:nvPr/>
+        </p:nvSpPr>
+        <p:spPr>
+          <a:xfrm>
+            <a:off x="566928" y="5138928"/>
+            <a:ext cx="3977640" cy="256032"/>
+          </a:xfrm>
+          <a:prstGeom prst="rect">
+            <a:avLst/>
+          </a:prstGeom>
+          <a:noFill/>
+          <a:ln/>
+        </p:spPr>
+        <p:txBody>
+          <a:bodyPr wrap="square" lIns="0" tIns="0" rIns="0" bIns="0" rtlCol="0" anchor="ctr"/>
+          <a:lstStyle/>
+          <a:p>
+            <a:pPr algn="ctr" indent="0" marL="0">
+              <a:buNone/>
+            </a:pPr>
+            <a:r>
+              <a:rPr lang="en-US" sz="1000" i="1" dirty="0">
+                <a:solidFill>
+                  <a:srgbClr val="5A6B7B"/>
+                </a:solidFill>
+                <a:latin typeface="Calibri" pitchFamily="34" charset="0"/>
+                <a:ea typeface="Calibri" pitchFamily="34" charset="-122"/>
+                <a:cs typeface="Calibri" pitchFamily="34" charset="-120"/>
+              </a:rPr>
+              <a:t>Vue d'ensemble — les indicateurs de cadrage</a:t>
+            </a:r>
+            <a:endParaRPr lang="en-US" sz="1000" dirty="0"/>
+          </a:p>
+        </p:txBody>
+      </p:sp>
+      <p:pic>
+        <p:nvPicPr>
+          <p:cNvPr id="6" name="Image 1" descr="/Users/marcuslinguet/Downloads/trafic-aerien-adp/presentation/figures/11_dashboard_carte.png">    </p:cNvPr>
+          <p:cNvPicPr>
+            <a:picLocks noChangeAspect="1"/>
+          </p:cNvPicPr>
+          <p:nvPr/>
+        </p:nvPicPr>
+        <p:blipFill>
+          <a:blip r:embed="rId2"/>
+          <a:stretch>
+            <a:fillRect/>
+          </a:stretch>
+        </p:blipFill>
+        <p:spPr>
+          <a:xfrm>
+            <a:off x="4800600" y="1371600"/>
+            <a:ext cx="3977640" cy="3493008"/>
+          </a:xfrm>
+          <a:prstGeom prst="rect">
+            <a:avLst/>
+          </a:prstGeom>
+        </p:spPr>
+      </p:pic>
+      <p:sp>
+        <p:nvSpPr>
+          <p:cNvPr id="7" name="Text 3"/>
+          <p:cNvSpPr txBox="1"/>
+          <p:nvPr/>
+        </p:nvSpPr>
+        <p:spPr>
+          <a:xfrm>
+            <a:off x="4800600" y="4919472"/>
+            <a:ext cx="3977640" cy="256032"/>
+          </a:xfrm>
+          <a:prstGeom prst="rect">
+            <a:avLst/>
+          </a:prstGeom>
+          <a:noFill/>
+          <a:ln/>
+        </p:spPr>
+        <p:txBody>
+          <a:bodyPr wrap="square" lIns="0" tIns="0" rIns="0" bIns="0" rtlCol="0" anchor="ctr"/>
+          <a:lstStyle/>
+          <a:p>
+            <a:pPr algn="ctr" indent="0" marL="0">
+              <a:buNone/>
+            </a:pPr>
+            <a:r>
+              <a:rPr lang="en-US" sz="1000" i="1" dirty="0">
+                <a:solidFill>
+                  <a:srgbClr val="5A6B7B"/>
+                </a:solidFill>
+                <a:latin typeface="Calibri" pitchFamily="34" charset="0"/>
+                <a:ea typeface="Calibri" pitchFamily="34" charset="-122"/>
+                <a:cs typeface="Calibri" pitchFamily="34" charset="-120"/>
+              </a:rPr>
+              <a:t>Carte du réseau — l'épaisseur du trait suit le trafic</a:t>
+            </a:r>
+            <a:endParaRPr lang="en-US" sz="1000" dirty="0"/>
+          </a:p>
+        </p:txBody>
+      </p:sp>
+      <p:sp>
+        <p:nvSpPr>
+          <p:cNvPr id="8" name="Text 4"/>
+          <p:cNvSpPr txBox="1"/>
+          <p:nvPr/>
+        </p:nvSpPr>
+        <p:spPr>
+          <a:xfrm>
+            <a:off x="9144000" y="1371600"/>
+            <a:ext cx="2496312" cy="274320"/>
+          </a:xfrm>
+          <a:prstGeom prst="rect">
+            <a:avLst/>
+          </a:prstGeom>
+          <a:noFill/>
+          <a:ln/>
+        </p:spPr>
+        <p:txBody>
+          <a:bodyPr wrap="square" lIns="0" tIns="0" rIns="0" bIns="0" rtlCol="0" anchor="ctr"/>
+          <a:lstStyle/>
+          <a:p>
+            <a:pPr indent="0" marL="0">
+              <a:buNone/>
+            </a:pPr>
+            <a:r>
+              <a:rPr lang="en-US" sz="1400" b="1" dirty="0">
+                <a:solidFill>
+                  <a:srgbClr val="12202B"/>
+                </a:solidFill>
+                <a:latin typeface="Cambria" pitchFamily="34" charset="0"/>
+                <a:ea typeface="Cambria" pitchFamily="34" charset="-122"/>
+                <a:cs typeface="Cambria" pitchFamily="34" charset="-120"/>
+              </a:rPr>
+              <a:t>Les neuf onglets</a:t>
+            </a:r>
+            <a:endParaRPr lang="en-US" sz="1400" dirty="0"/>
+          </a:p>
+        </p:txBody>
+      </p:sp>
+      <p:sp>
+        <p:nvSpPr>
+          <p:cNvPr id="9" name="Shape 5"/>
           <p:cNvSpPr/>
           <p:nvPr/>
         </p:nvSpPr>
         <p:spPr>
           <a:xfrm>
-            <a:off x="5806440" y="1517904"/>
-            <a:ext cx="274320" cy="274320"/>
+            <a:off x="9144000" y="1755648"/>
+            <a:ext cx="237744" cy="237744"/>
           </a:xfrm>
           <a:prstGeom prst="ellipse">
             <a:avLst/>
@@ -3006,14 +3147,14 @@
       </p:sp>
       <p:sp>
         <p:nvSpPr>
-          <p:cNvPr id="6" name="Text 3"/>
-          <p:cNvSpPr txBox="1"/>
-          <p:nvPr/>
-        </p:nvSpPr>
-        <p:spPr>
-          <a:xfrm>
-            <a:off x="5806440" y="1545336"/>
-            <a:ext cx="274320" cy="237744"/>
+          <p:cNvPr id="10" name="Text 6"/>
+          <p:cNvSpPr txBox="1"/>
+          <p:nvPr/>
+        </p:nvSpPr>
+        <p:spPr>
+          <a:xfrm>
+            <a:off x="9144000" y="1773936"/>
+            <a:ext cx="237744" cy="201168"/>
           </a:xfrm>
           <a:prstGeom prst="rect">
             <a:avLst/>
@@ -3029,7 +3170,7 @@
               <a:buNone/>
             </a:pPr>
             <a:r>
-              <a:rPr lang="en-US" sz="1000" b="1" dirty="0">
+              <a:rPr lang="en-US" sz="900" b="1" dirty="0">
                 <a:solidFill>
                   <a:srgbClr val="FFFFFF"/>
                 </a:solidFill>
@@ -3039,45 +3180,31 @@
               </a:rPr>
               <a:t>1</a:t>
             </a:r>
-            <a:endParaRPr lang="en-US" sz="1000" dirty="0"/>
-          </a:p>
-        </p:txBody>
-      </p:sp>
-      <p:sp>
-        <p:nvSpPr>
-          <p:cNvPr id="7" name="Text 4"/>
-          <p:cNvSpPr txBox="1"/>
-          <p:nvPr/>
-        </p:nvSpPr>
-        <p:spPr>
-          <a:xfrm>
-            <a:off x="6236208" y="1463040"/>
-            <a:ext cx="5394960" cy="384048"/>
-          </a:xfrm>
-          <a:prstGeom prst="rect">
-            <a:avLst/>
-          </a:prstGeom>
-          <a:noFill/>
-          <a:ln/>
-        </p:spPr>
-        <p:txBody>
-          <a:bodyPr wrap="square" lIns="0" tIns="0" rIns="0" bIns="0" rtlCol="0" anchor="ctr"/>
-          <a:lstStyle/>
-          <a:p>
-            <a:pPr indent="0" marL="0">
-              <a:buNone/>
-            </a:pPr>
-            <a:r>
-              <a:rPr lang="en-US" sz="1250" b="1" dirty="0">
-                <a:solidFill>
-                  <a:srgbClr val="12202B"/>
-                </a:solidFill>
-                <a:latin typeface="Calibri" pitchFamily="34" charset="0"/>
-                <a:ea typeface="Calibri" pitchFamily="34" charset="-122"/>
-                <a:cs typeface="Calibri" pitchFamily="34" charset="-120"/>
-              </a:rPr>
-              <a:t>Vue d'ensemble  </a:t>
-            </a:r>
+            <a:endParaRPr lang="en-US" sz="900" dirty="0"/>
+          </a:p>
+        </p:txBody>
+      </p:sp>
+      <p:sp>
+        <p:nvSpPr>
+          <p:cNvPr id="11" name="Text 7"/>
+          <p:cNvSpPr txBox="1"/>
+          <p:nvPr/>
+        </p:nvSpPr>
+        <p:spPr>
+          <a:xfrm>
+            <a:off x="9509760" y="1719072"/>
+            <a:ext cx="2148840" cy="310896"/>
+          </a:xfrm>
+          <a:prstGeom prst="rect">
+            <a:avLst/>
+          </a:prstGeom>
+          <a:noFill/>
+          <a:ln/>
+        </p:spPr>
+        <p:txBody>
+          <a:bodyPr wrap="square" lIns="0" tIns="0" rIns="0" bIns="0" rtlCol="0" anchor="ctr"/>
+          <a:lstStyle/>
+          <a:p>
             <a:pPr indent="0" marL="0">
               <a:buNone/>
             </a:pPr>
@@ -3090,22 +3217,22 @@
                 <a:ea typeface="Calibri" pitchFamily="34" charset="-122"/>
                 <a:cs typeface="Calibri" pitchFamily="34" charset="-120"/>
               </a:rPr>
-              <a:t>volumétrie et cadrage</a:t>
-            </a:r>
-            <a:endParaRPr lang="en-US" sz="1250" dirty="0"/>
-          </a:p>
-        </p:txBody>
-      </p:sp>
-      <p:sp>
-        <p:nvSpPr>
-          <p:cNvPr id="8" name="Shape 5"/>
+              <a:t>Vue d'ensemble</a:t>
+            </a:r>
+            <a:endParaRPr lang="en-US" sz="1100" dirty="0"/>
+          </a:p>
+        </p:txBody>
+      </p:sp>
+      <p:sp>
+        <p:nvSpPr>
+          <p:cNvPr id="12" name="Shape 8"/>
           <p:cNvSpPr/>
           <p:nvPr/>
         </p:nvSpPr>
         <p:spPr>
           <a:xfrm>
-            <a:off x="5806440" y="2029968"/>
-            <a:ext cx="274320" cy="274320"/>
+            <a:off x="9144000" y="2103120"/>
+            <a:ext cx="237744" cy="237744"/>
           </a:xfrm>
           <a:prstGeom prst="ellipse">
             <a:avLst/>
@@ -3123,14 +3250,14 @@
       </p:sp>
       <p:sp>
         <p:nvSpPr>
-          <p:cNvPr id="9" name="Text 6"/>
-          <p:cNvSpPr txBox="1"/>
-          <p:nvPr/>
-        </p:nvSpPr>
-        <p:spPr>
-          <a:xfrm>
-            <a:off x="5806440" y="2057400"/>
-            <a:ext cx="274320" cy="237744"/>
+          <p:cNvPr id="13" name="Text 9"/>
+          <p:cNvSpPr txBox="1"/>
+          <p:nvPr/>
+        </p:nvSpPr>
+        <p:spPr>
+          <a:xfrm>
+            <a:off x="9144000" y="2121408"/>
+            <a:ext cx="237744" cy="201168"/>
           </a:xfrm>
           <a:prstGeom prst="rect">
             <a:avLst/>
@@ -3146,7 +3273,7 @@
               <a:buNone/>
             </a:pPr>
             <a:r>
-              <a:rPr lang="en-US" sz="1000" b="1" dirty="0">
+              <a:rPr lang="en-US" sz="900" b="1" dirty="0">
                 <a:solidFill>
                   <a:srgbClr val="FFFFFF"/>
                 </a:solidFill>
@@ -3156,45 +3283,31 @@
               </a:rPr>
               <a:t>2</a:t>
             </a:r>
-            <a:endParaRPr lang="en-US" sz="1000" dirty="0"/>
-          </a:p>
-        </p:txBody>
-      </p:sp>
-      <p:sp>
-        <p:nvSpPr>
-          <p:cNvPr id="10" name="Text 7"/>
-          <p:cNvSpPr txBox="1"/>
-          <p:nvPr/>
-        </p:nvSpPr>
-        <p:spPr>
-          <a:xfrm>
-            <a:off x="6236208" y="1975104"/>
-            <a:ext cx="5394960" cy="384048"/>
-          </a:xfrm>
-          <a:prstGeom prst="rect">
-            <a:avLst/>
-          </a:prstGeom>
-          <a:noFill/>
-          <a:ln/>
-        </p:spPr>
-        <p:txBody>
-          <a:bodyPr wrap="square" lIns="0" tIns="0" rIns="0" bIns="0" rtlCol="0" anchor="ctr"/>
-          <a:lstStyle/>
-          <a:p>
-            <a:pPr indent="0" marL="0">
-              <a:buNone/>
-            </a:pPr>
-            <a:r>
-              <a:rPr lang="en-US" sz="1250" b="1" dirty="0">
-                <a:solidFill>
-                  <a:srgbClr val="12202B"/>
-                </a:solidFill>
-                <a:latin typeface="Calibri" pitchFamily="34" charset="0"/>
-                <a:ea typeface="Calibri" pitchFamily="34" charset="-122"/>
-                <a:cs typeface="Calibri" pitchFamily="34" charset="-120"/>
-              </a:rPr>
-              <a:t>Trafic  </a:t>
-            </a:r>
+            <a:endParaRPr lang="en-US" sz="900" dirty="0"/>
+          </a:p>
+        </p:txBody>
+      </p:sp>
+      <p:sp>
+        <p:nvSpPr>
+          <p:cNvPr id="14" name="Text 10"/>
+          <p:cNvSpPr txBox="1"/>
+          <p:nvPr/>
+        </p:nvSpPr>
+        <p:spPr>
+          <a:xfrm>
+            <a:off x="9509760" y="2066544"/>
+            <a:ext cx="2148840" cy="310896"/>
+          </a:xfrm>
+          <a:prstGeom prst="rect">
+            <a:avLst/>
+          </a:prstGeom>
+          <a:noFill/>
+          <a:ln/>
+        </p:spPr>
+        <p:txBody>
+          <a:bodyPr wrap="square" lIns="0" tIns="0" rIns="0" bIns="0" rtlCol="0" anchor="ctr"/>
+          <a:lstStyle/>
+          <a:p>
             <a:pPr indent="0" marL="0">
               <a:buNone/>
             </a:pPr>
@@ -3207,22 +3320,22 @@
                 <a:ea typeface="Calibri" pitchFamily="34" charset="-122"/>
                 <a:cs typeface="Calibri" pitchFamily="34" charset="-120"/>
               </a:rPr>
-              <a:t>saisonnalité, croissance, périodes</a:t>
-            </a:r>
-            <a:endParaRPr lang="en-US" sz="1250" dirty="0"/>
-          </a:p>
-        </p:txBody>
-      </p:sp>
-      <p:sp>
-        <p:nvSpPr>
-          <p:cNvPr id="11" name="Shape 8"/>
+              <a:t>Trafic</a:t>
+            </a:r>
+            <a:endParaRPr lang="en-US" sz="1100" dirty="0"/>
+          </a:p>
+        </p:txBody>
+      </p:sp>
+      <p:sp>
+        <p:nvSpPr>
+          <p:cNvPr id="15" name="Shape 11"/>
           <p:cNvSpPr/>
           <p:nvPr/>
         </p:nvSpPr>
         <p:spPr>
           <a:xfrm>
-            <a:off x="5806440" y="2542032"/>
-            <a:ext cx="274320" cy="274320"/>
+            <a:off x="9144000" y="2450592"/>
+            <a:ext cx="237744" cy="237744"/>
           </a:xfrm>
           <a:prstGeom prst="ellipse">
             <a:avLst/>
@@ -3240,14 +3353,14 @@
       </p:sp>
       <p:sp>
         <p:nvSpPr>
-          <p:cNvPr id="12" name="Text 9"/>
-          <p:cNvSpPr txBox="1"/>
-          <p:nvPr/>
-        </p:nvSpPr>
-        <p:spPr>
-          <a:xfrm>
-            <a:off x="5806440" y="2569464"/>
-            <a:ext cx="274320" cy="237744"/>
+          <p:cNvPr id="16" name="Text 12"/>
+          <p:cNvSpPr txBox="1"/>
+          <p:nvPr/>
+        </p:nvSpPr>
+        <p:spPr>
+          <a:xfrm>
+            <a:off x="9144000" y="2468880"/>
+            <a:ext cx="237744" cy="201168"/>
           </a:xfrm>
           <a:prstGeom prst="rect">
             <a:avLst/>
@@ -3263,7 +3376,7 @@
               <a:buNone/>
             </a:pPr>
             <a:r>
-              <a:rPr lang="en-US" sz="1000" b="1" dirty="0">
+              <a:rPr lang="en-US" sz="900" b="1" dirty="0">
                 <a:solidFill>
                   <a:srgbClr val="FFFFFF"/>
                 </a:solidFill>
@@ -3273,45 +3386,31 @@
               </a:rPr>
               <a:t>3</a:t>
             </a:r>
-            <a:endParaRPr lang="en-US" sz="1000" dirty="0"/>
-          </a:p>
-        </p:txBody>
-      </p:sp>
-      <p:sp>
-        <p:nvSpPr>
-          <p:cNvPr id="13" name="Text 10"/>
-          <p:cNvSpPr txBox="1"/>
-          <p:nvPr/>
-        </p:nvSpPr>
-        <p:spPr>
-          <a:xfrm>
-            <a:off x="6236208" y="2487168"/>
-            <a:ext cx="5394960" cy="384048"/>
-          </a:xfrm>
-          <a:prstGeom prst="rect">
-            <a:avLst/>
-          </a:prstGeom>
-          <a:noFill/>
-          <a:ln/>
-        </p:spPr>
-        <p:txBody>
-          <a:bodyPr wrap="square" lIns="0" tIns="0" rIns="0" bIns="0" rtlCol="0" anchor="ctr"/>
-          <a:lstStyle/>
-          <a:p>
-            <a:pPr indent="0" marL="0">
-              <a:buNone/>
-            </a:pPr>
-            <a:r>
-              <a:rPr lang="en-US" sz="1250" b="1" dirty="0">
-                <a:solidFill>
-                  <a:srgbClr val="12202B"/>
-                </a:solidFill>
-                <a:latin typeface="Calibri" pitchFamily="34" charset="0"/>
-                <a:ea typeface="Calibri" pitchFamily="34" charset="-122"/>
-                <a:cs typeface="Calibri" pitchFamily="34" charset="-120"/>
-              </a:rPr>
-              <a:t>Retards  </a:t>
-            </a:r>
+            <a:endParaRPr lang="en-US" sz="900" dirty="0"/>
+          </a:p>
+        </p:txBody>
+      </p:sp>
+      <p:sp>
+        <p:nvSpPr>
+          <p:cNvPr id="17" name="Text 13"/>
+          <p:cNvSpPr txBox="1"/>
+          <p:nvPr/>
+        </p:nvSpPr>
+        <p:spPr>
+          <a:xfrm>
+            <a:off x="9509760" y="2414016"/>
+            <a:ext cx="2148840" cy="310896"/>
+          </a:xfrm>
+          <a:prstGeom prst="rect">
+            <a:avLst/>
+          </a:prstGeom>
+          <a:noFill/>
+          <a:ln/>
+        </p:spPr>
+        <p:txBody>
+          <a:bodyPr wrap="square" lIns="0" tIns="0" rIns="0" bIns="0" rtlCol="0" anchor="ctr"/>
+          <a:lstStyle/>
+          <a:p>
             <a:pPr indent="0" marL="0">
               <a:buNone/>
             </a:pPr>
@@ -3324,22 +3423,22 @@
                 <a:ea typeface="Calibri" pitchFamily="34" charset="-122"/>
                 <a:cs typeface="Calibri" pitchFamily="34" charset="-120"/>
               </a:rPr>
-              <a:t>compagnies, aéroports, vitesse, extrêmes</a:t>
-            </a:r>
-            <a:endParaRPr lang="en-US" sz="1250" dirty="0"/>
-          </a:p>
-        </p:txBody>
-      </p:sp>
-      <p:sp>
-        <p:nvSpPr>
-          <p:cNvPr id="14" name="Shape 11"/>
+              <a:t>Retards</a:t>
+            </a:r>
+            <a:endParaRPr lang="en-US" sz="1100" dirty="0"/>
+          </a:p>
+        </p:txBody>
+      </p:sp>
+      <p:sp>
+        <p:nvSpPr>
+          <p:cNvPr id="18" name="Shape 14"/>
           <p:cNvSpPr/>
           <p:nvPr/>
         </p:nvSpPr>
         <p:spPr>
           <a:xfrm>
-            <a:off x="5806440" y="3054096"/>
-            <a:ext cx="274320" cy="274320"/>
+            <a:off x="9144000" y="2798064"/>
+            <a:ext cx="237744" cy="237744"/>
           </a:xfrm>
           <a:prstGeom prst="ellipse">
             <a:avLst/>
@@ -3357,14 +3456,14 @@
       </p:sp>
       <p:sp>
         <p:nvSpPr>
-          <p:cNvPr id="15" name="Text 12"/>
-          <p:cNvSpPr txBox="1"/>
-          <p:nvPr/>
-        </p:nvSpPr>
-        <p:spPr>
-          <a:xfrm>
-            <a:off x="5806440" y="3081528"/>
-            <a:ext cx="274320" cy="237744"/>
+          <p:cNvPr id="19" name="Text 15"/>
+          <p:cNvSpPr txBox="1"/>
+          <p:nvPr/>
+        </p:nvSpPr>
+        <p:spPr>
+          <a:xfrm>
+            <a:off x="9144000" y="2816352"/>
+            <a:ext cx="237744" cy="201168"/>
           </a:xfrm>
           <a:prstGeom prst="rect">
             <a:avLst/>
@@ -3380,7 +3479,7 @@
               <a:buNone/>
             </a:pPr>
             <a:r>
-              <a:rPr lang="en-US" sz="1000" b="1" dirty="0">
+              <a:rPr lang="en-US" sz="900" b="1" dirty="0">
                 <a:solidFill>
                   <a:srgbClr val="FFFFFF"/>
                 </a:solidFill>
@@ -3390,45 +3489,31 @@
               </a:rPr>
               <a:t>4</a:t>
             </a:r>
-            <a:endParaRPr lang="en-US" sz="1000" dirty="0"/>
-          </a:p>
-        </p:txBody>
-      </p:sp>
-      <p:sp>
-        <p:nvSpPr>
-          <p:cNvPr id="16" name="Text 13"/>
-          <p:cNvSpPr txBox="1"/>
-          <p:nvPr/>
-        </p:nvSpPr>
-        <p:spPr>
-          <a:xfrm>
-            <a:off x="6236208" y="2999232"/>
-            <a:ext cx="5394960" cy="384048"/>
-          </a:xfrm>
-          <a:prstGeom prst="rect">
-            <a:avLst/>
-          </a:prstGeom>
-          <a:noFill/>
-          <a:ln/>
-        </p:spPr>
-        <p:txBody>
-          <a:bodyPr wrap="square" lIns="0" tIns="0" rIns="0" bIns="0" rtlCol="0" anchor="ctr"/>
-          <a:lstStyle/>
-          <a:p>
-            <a:pPr indent="0" marL="0">
-              <a:buNone/>
-            </a:pPr>
-            <a:r>
-              <a:rPr lang="en-US" sz="1250" b="1" dirty="0">
-                <a:solidFill>
-                  <a:srgbClr val="12202B"/>
-                </a:solidFill>
-                <a:latin typeface="Calibri" pitchFamily="34" charset="0"/>
-                <a:ea typeface="Calibri" pitchFamily="34" charset="-122"/>
-                <a:cs typeface="Calibri" pitchFamily="34" charset="-120"/>
-              </a:rPr>
-              <a:t>Annulations  </a:t>
-            </a:r>
+            <a:endParaRPr lang="en-US" sz="900" dirty="0"/>
+          </a:p>
+        </p:txBody>
+      </p:sp>
+      <p:sp>
+        <p:nvSpPr>
+          <p:cNvPr id="20" name="Text 16"/>
+          <p:cNvSpPr txBox="1"/>
+          <p:nvPr/>
+        </p:nvSpPr>
+        <p:spPr>
+          <a:xfrm>
+            <a:off x="9509760" y="2761488"/>
+            <a:ext cx="2148840" cy="310896"/>
+          </a:xfrm>
+          <a:prstGeom prst="rect">
+            <a:avLst/>
+          </a:prstGeom>
+          <a:noFill/>
+          <a:ln/>
+        </p:spPr>
+        <p:txBody>
+          <a:bodyPr wrap="square" lIns="0" tIns="0" rIns="0" bIns="0" rtlCol="0" anchor="ctr"/>
+          <a:lstStyle/>
+          <a:p>
             <a:pPr indent="0" marL="0">
               <a:buNone/>
             </a:pPr>
@@ -3441,22 +3526,22 @@
                 <a:ea typeface="Calibri" pitchFamily="34" charset="-122"/>
                 <a:cs typeface="Calibri" pitchFamily="34" charset="-120"/>
               </a:rPr>
-              <a:t>volumétrie et qualité des données</a:t>
-            </a:r>
-            <a:endParaRPr lang="en-US" sz="1250" dirty="0"/>
-          </a:p>
-        </p:txBody>
-      </p:sp>
-      <p:sp>
-        <p:nvSpPr>
-          <p:cNvPr id="17" name="Shape 14"/>
+              <a:t>Annulations</a:t>
+            </a:r>
+            <a:endParaRPr lang="en-US" sz="1100" dirty="0"/>
+          </a:p>
+        </p:txBody>
+      </p:sp>
+      <p:sp>
+        <p:nvSpPr>
+          <p:cNvPr id="21" name="Shape 17"/>
           <p:cNvSpPr/>
           <p:nvPr/>
         </p:nvSpPr>
         <p:spPr>
           <a:xfrm>
-            <a:off x="5806440" y="3566160"/>
-            <a:ext cx="274320" cy="274320"/>
+            <a:off x="9144000" y="3145536"/>
+            <a:ext cx="237744" cy="237744"/>
           </a:xfrm>
           <a:prstGeom prst="ellipse">
             <a:avLst/>
@@ -3474,14 +3559,14 @@
       </p:sp>
       <p:sp>
         <p:nvSpPr>
-          <p:cNvPr id="18" name="Text 15"/>
-          <p:cNvSpPr txBox="1"/>
-          <p:nvPr/>
-        </p:nvSpPr>
-        <p:spPr>
-          <a:xfrm>
-            <a:off x="5806440" y="3593592"/>
-            <a:ext cx="274320" cy="237744"/>
+          <p:cNvPr id="22" name="Text 18"/>
+          <p:cNvSpPr txBox="1"/>
+          <p:nvPr/>
+        </p:nvSpPr>
+        <p:spPr>
+          <a:xfrm>
+            <a:off x="9144000" y="3163824"/>
+            <a:ext cx="237744" cy="201168"/>
           </a:xfrm>
           <a:prstGeom prst="rect">
             <a:avLst/>
@@ -3497,7 +3582,7 @@
               <a:buNone/>
             </a:pPr>
             <a:r>
-              <a:rPr lang="en-US" sz="1000" b="1" dirty="0">
+              <a:rPr lang="en-US" sz="900" b="1" dirty="0">
                 <a:solidFill>
                   <a:srgbClr val="FFFFFF"/>
                 </a:solidFill>
@@ -3507,45 +3592,31 @@
               </a:rPr>
               <a:t>5</a:t>
             </a:r>
-            <a:endParaRPr lang="en-US" sz="1000" dirty="0"/>
-          </a:p>
-        </p:txBody>
-      </p:sp>
-      <p:sp>
-        <p:nvSpPr>
-          <p:cNvPr id="19" name="Text 16"/>
-          <p:cNvSpPr txBox="1"/>
-          <p:nvPr/>
-        </p:nvSpPr>
-        <p:spPr>
-          <a:xfrm>
-            <a:off x="6236208" y="3511296"/>
-            <a:ext cx="5394960" cy="384048"/>
-          </a:xfrm>
-          <a:prstGeom prst="rect">
-            <a:avLst/>
-          </a:prstGeom>
-          <a:noFill/>
-          <a:ln/>
-        </p:spPr>
-        <p:txBody>
-          <a:bodyPr wrap="square" lIns="0" tIns="0" rIns="0" bIns="0" rtlCol="0" anchor="ctr"/>
-          <a:lstStyle/>
-          <a:p>
-            <a:pPr indent="0" marL="0">
-              <a:buNone/>
-            </a:pPr>
-            <a:r>
-              <a:rPr lang="en-US" sz="1250" b="1" dirty="0">
-                <a:solidFill>
-                  <a:srgbClr val="12202B"/>
-                </a:solidFill>
-                <a:latin typeface="Calibri" pitchFamily="34" charset="0"/>
-                <a:ea typeface="Calibri" pitchFamily="34" charset="-122"/>
-                <a:cs typeface="Calibri" pitchFamily="34" charset="-120"/>
-              </a:rPr>
-              <a:t>Carte  </a:t>
-            </a:r>
+            <a:endParaRPr lang="en-US" sz="900" dirty="0"/>
+          </a:p>
+        </p:txBody>
+      </p:sp>
+      <p:sp>
+        <p:nvSpPr>
+          <p:cNvPr id="23" name="Text 19"/>
+          <p:cNvSpPr txBox="1"/>
+          <p:nvPr/>
+        </p:nvSpPr>
+        <p:spPr>
+          <a:xfrm>
+            <a:off x="9509760" y="3108960"/>
+            <a:ext cx="2148840" cy="310896"/>
+          </a:xfrm>
+          <a:prstGeom prst="rect">
+            <a:avLst/>
+          </a:prstGeom>
+          <a:noFill/>
+          <a:ln/>
+        </p:spPr>
+        <p:txBody>
+          <a:bodyPr wrap="square" lIns="0" tIns="0" rIns="0" bIns="0" rtlCol="0" anchor="ctr"/>
+          <a:lstStyle/>
+          <a:p>
             <a:pPr indent="0" marL="0">
               <a:buNone/>
             </a:pPr>
@@ -3558,22 +3629,22 @@
                 <a:ea typeface="Calibri" pitchFamily="34" charset="-122"/>
                 <a:cs typeface="Calibri" pitchFamily="34" charset="-120"/>
               </a:rPr>
-              <a:t>réseau origine → destination</a:t>
-            </a:r>
-            <a:endParaRPr lang="en-US" sz="1250" dirty="0"/>
-          </a:p>
-        </p:txBody>
-      </p:sp>
-      <p:sp>
-        <p:nvSpPr>
-          <p:cNvPr id="20" name="Shape 17"/>
+              <a:t>Carte</a:t>
+            </a:r>
+            <a:endParaRPr lang="en-US" sz="1100" dirty="0"/>
+          </a:p>
+        </p:txBody>
+      </p:sp>
+      <p:sp>
+        <p:nvSpPr>
+          <p:cNvPr id="24" name="Shape 20"/>
           <p:cNvSpPr/>
           <p:nvPr/>
         </p:nvSpPr>
         <p:spPr>
           <a:xfrm>
-            <a:off x="5806440" y="4078224"/>
-            <a:ext cx="274320" cy="274320"/>
+            <a:off x="9144000" y="3493008"/>
+            <a:ext cx="237744" cy="237744"/>
           </a:xfrm>
           <a:prstGeom prst="ellipse">
             <a:avLst/>
@@ -3591,14 +3662,14 @@
       </p:sp>
       <p:sp>
         <p:nvSpPr>
-          <p:cNvPr id="21" name="Text 18"/>
-          <p:cNvSpPr txBox="1"/>
-          <p:nvPr/>
-        </p:nvSpPr>
-        <p:spPr>
-          <a:xfrm>
-            <a:off x="5806440" y="4105656"/>
-            <a:ext cx="274320" cy="237744"/>
+          <p:cNvPr id="25" name="Text 21"/>
+          <p:cNvSpPr txBox="1"/>
+          <p:nvPr/>
+        </p:nvSpPr>
+        <p:spPr>
+          <a:xfrm>
+            <a:off x="9144000" y="3511296"/>
+            <a:ext cx="237744" cy="201168"/>
           </a:xfrm>
           <a:prstGeom prst="rect">
             <a:avLst/>
@@ -3614,7 +3685,7 @@
               <a:buNone/>
             </a:pPr>
             <a:r>
-              <a:rPr lang="en-US" sz="1000" b="1" dirty="0">
+              <a:rPr lang="en-US" sz="900" b="1" dirty="0">
                 <a:solidFill>
                   <a:srgbClr val="FFFFFF"/>
                 </a:solidFill>
@@ -3624,45 +3695,31 @@
               </a:rPr>
               <a:t>6</a:t>
             </a:r>
-            <a:endParaRPr lang="en-US" sz="1000" dirty="0"/>
-          </a:p>
-        </p:txBody>
-      </p:sp>
-      <p:sp>
-        <p:nvSpPr>
-          <p:cNvPr id="22" name="Text 19"/>
-          <p:cNvSpPr txBox="1"/>
-          <p:nvPr/>
-        </p:nvSpPr>
-        <p:spPr>
-          <a:xfrm>
-            <a:off x="6236208" y="4023360"/>
-            <a:ext cx="5394960" cy="384048"/>
-          </a:xfrm>
-          <a:prstGeom prst="rect">
-            <a:avLst/>
-          </a:prstGeom>
-          <a:noFill/>
-          <a:ln/>
-        </p:spPr>
-        <p:txBody>
-          <a:bodyPr wrap="square" lIns="0" tIns="0" rIns="0" bIns="0" rtlCol="0" anchor="ctr"/>
-          <a:lstStyle/>
-          <a:p>
-            <a:pPr indent="0" marL="0">
-              <a:buNone/>
-            </a:pPr>
-            <a:r>
-              <a:rPr lang="en-US" sz="1250" b="1" dirty="0">
-                <a:solidFill>
-                  <a:srgbClr val="12202B"/>
-                </a:solidFill>
-                <a:latin typeface="Calibri" pitchFamily="34" charset="0"/>
-                <a:ea typeface="Calibri" pitchFamily="34" charset="-122"/>
-                <a:cs typeface="Calibri" pitchFamily="34" charset="-120"/>
-              </a:rPr>
-              <a:t>Météo  </a:t>
-            </a:r>
+            <a:endParaRPr lang="en-US" sz="900" dirty="0"/>
+          </a:p>
+        </p:txBody>
+      </p:sp>
+      <p:sp>
+        <p:nvSpPr>
+          <p:cNvPr id="26" name="Text 22"/>
+          <p:cNvSpPr txBox="1"/>
+          <p:nvPr/>
+        </p:nvSpPr>
+        <p:spPr>
+          <a:xfrm>
+            <a:off x="9509760" y="3456432"/>
+            <a:ext cx="2148840" cy="310896"/>
+          </a:xfrm>
+          <a:prstGeom prst="rect">
+            <a:avLst/>
+          </a:prstGeom>
+          <a:noFill/>
+          <a:ln/>
+        </p:spPr>
+        <p:txBody>
+          <a:bodyPr wrap="square" lIns="0" tIns="0" rIns="0" bIns="0" rtlCol="0" anchor="ctr"/>
+          <a:lstStyle/>
+          <a:p>
             <a:pPr indent="0" marL="0">
               <a:buNone/>
             </a:pPr>
@@ -3675,22 +3732,22 @@
                 <a:ea typeface="Calibri" pitchFamily="34" charset="-122"/>
                 <a:cs typeface="Calibri" pitchFamily="34" charset="-120"/>
               </a:rPr>
-              <a:t>température, vent, précipitations</a:t>
-            </a:r>
-            <a:endParaRPr lang="en-US" sz="1250" dirty="0"/>
-          </a:p>
-        </p:txBody>
-      </p:sp>
-      <p:sp>
-        <p:nvSpPr>
-          <p:cNvPr id="23" name="Shape 20"/>
+              <a:t>Météo</a:t>
+            </a:r>
+            <a:endParaRPr lang="en-US" sz="1100" dirty="0"/>
+          </a:p>
+        </p:txBody>
+      </p:sp>
+      <p:sp>
+        <p:nvSpPr>
+          <p:cNvPr id="27" name="Shape 23"/>
           <p:cNvSpPr/>
           <p:nvPr/>
         </p:nvSpPr>
         <p:spPr>
           <a:xfrm>
-            <a:off x="5806440" y="4590288"/>
-            <a:ext cx="274320" cy="274320"/>
+            <a:off x="9144000" y="3840480"/>
+            <a:ext cx="237744" cy="237744"/>
           </a:xfrm>
           <a:prstGeom prst="ellipse">
             <a:avLst/>
@@ -3708,14 +3765,14 @@
       </p:sp>
       <p:sp>
         <p:nvSpPr>
-          <p:cNvPr id="24" name="Text 21"/>
-          <p:cNvSpPr txBox="1"/>
-          <p:nvPr/>
-        </p:nvSpPr>
-        <p:spPr>
-          <a:xfrm>
-            <a:off x="5806440" y="4617720"/>
-            <a:ext cx="274320" cy="237744"/>
+          <p:cNvPr id="28" name="Text 24"/>
+          <p:cNvSpPr txBox="1"/>
+          <p:nvPr/>
+        </p:nvSpPr>
+        <p:spPr>
+          <a:xfrm>
+            <a:off x="9144000" y="3858768"/>
+            <a:ext cx="237744" cy="201168"/>
           </a:xfrm>
           <a:prstGeom prst="rect">
             <a:avLst/>
@@ -3731,7 +3788,7 @@
               <a:buNone/>
             </a:pPr>
             <a:r>
-              <a:rPr lang="en-US" sz="1000" b="1" dirty="0">
+              <a:rPr lang="en-US" sz="900" b="1" dirty="0">
                 <a:solidFill>
                   <a:srgbClr val="FFFFFF"/>
                 </a:solidFill>
@@ -3741,36 +3798,36 @@
               </a:rPr>
               <a:t>7</a:t>
             </a:r>
-            <a:endParaRPr lang="en-US" sz="1000" dirty="0"/>
-          </a:p>
-        </p:txBody>
-      </p:sp>
-      <p:sp>
-        <p:nvSpPr>
-          <p:cNvPr id="25" name="Text 22"/>
-          <p:cNvSpPr txBox="1"/>
-          <p:nvPr/>
-        </p:nvSpPr>
-        <p:spPr>
-          <a:xfrm>
-            <a:off x="6236208" y="4535424"/>
-            <a:ext cx="5394960" cy="384048"/>
-          </a:xfrm>
-          <a:prstGeom prst="rect">
-            <a:avLst/>
-          </a:prstGeom>
-          <a:noFill/>
-          <a:ln/>
-        </p:spPr>
-        <p:txBody>
-          <a:bodyPr wrap="square" lIns="0" tIns="0" rIns="0" bIns="0" rtlCol="0" anchor="ctr"/>
-          <a:lstStyle/>
-          <a:p>
-            <a:pPr indent="0" marL="0">
-              <a:buNone/>
-            </a:pPr>
-            <a:r>
-              <a:rPr lang="en-US" sz="1250" b="1" dirty="0">
+            <a:endParaRPr lang="en-US" sz="900" dirty="0"/>
+          </a:p>
+        </p:txBody>
+      </p:sp>
+      <p:sp>
+        <p:nvSpPr>
+          <p:cNvPr id="29" name="Text 25"/>
+          <p:cNvSpPr txBox="1"/>
+          <p:nvPr/>
+        </p:nvSpPr>
+        <p:spPr>
+          <a:xfrm>
+            <a:off x="9509760" y="3803904"/>
+            <a:ext cx="2148840" cy="310896"/>
+          </a:xfrm>
+          <a:prstGeom prst="rect">
+            <a:avLst/>
+          </a:prstGeom>
+          <a:noFill/>
+          <a:ln/>
+        </p:spPr>
+        <p:txBody>
+          <a:bodyPr wrap="square" lIns="0" tIns="0" rIns="0" bIns="0" rtlCol="0" anchor="ctr"/>
+          <a:lstStyle/>
+          <a:p>
+            <a:pPr indent="0" marL="0">
+              <a:buNone/>
+            </a:pPr>
+            <a:r>
+              <a:rPr lang="en-US" sz="1100" b="1" dirty="0">
                 <a:solidFill>
                   <a:srgbClr val="12202B"/>
                 </a:solidFill>
@@ -3778,36 +3835,22 @@
                 <a:ea typeface="Calibri" pitchFamily="34" charset="-122"/>
                 <a:cs typeface="Calibri" pitchFamily="34" charset="-120"/>
               </a:rPr>
-              <a:t>Vols  </a:t>
-            </a:r>
-            <a:pPr indent="0" marL="0">
-              <a:buNone/>
-            </a:pPr>
-            <a:r>
-              <a:rPr lang="en-US" sz="1100" dirty="0">
-                <a:solidFill>
-                  <a:srgbClr val="5A6B7B"/>
-                </a:solidFill>
-                <a:latin typeface="Calibri" pitchFamily="34" charset="0"/>
-                <a:ea typeface="Calibri" pitchFamily="34" charset="-122"/>
-                <a:cs typeface="Calibri" pitchFamily="34" charset="-120"/>
-              </a:rPr>
-              <a:t>explorateur filtré, trié, paginé</a:t>
-            </a:r>
-            <a:endParaRPr lang="en-US" sz="1250" dirty="0"/>
-          </a:p>
-        </p:txBody>
-      </p:sp>
-      <p:sp>
-        <p:nvSpPr>
-          <p:cNvPr id="26" name="Shape 23"/>
+              <a:t>Vols</a:t>
+            </a:r>
+            <a:endParaRPr lang="en-US" sz="1100" dirty="0"/>
+          </a:p>
+        </p:txBody>
+      </p:sp>
+      <p:sp>
+        <p:nvSpPr>
+          <p:cNvPr id="30" name="Shape 26"/>
           <p:cNvSpPr/>
           <p:nvPr/>
         </p:nvSpPr>
         <p:spPr>
           <a:xfrm>
-            <a:off x="5806440" y="5102352"/>
-            <a:ext cx="274320" cy="274320"/>
+            <a:off x="9144000" y="4187952"/>
+            <a:ext cx="237744" cy="237744"/>
           </a:xfrm>
           <a:prstGeom prst="ellipse">
             <a:avLst/>
@@ -3825,14 +3868,14 @@
       </p:sp>
       <p:sp>
         <p:nvSpPr>
-          <p:cNvPr id="27" name="Text 24"/>
-          <p:cNvSpPr txBox="1"/>
-          <p:nvPr/>
-        </p:nvSpPr>
-        <p:spPr>
-          <a:xfrm>
-            <a:off x="5806440" y="5129784"/>
-            <a:ext cx="274320" cy="237744"/>
+          <p:cNvPr id="31" name="Text 27"/>
+          <p:cNvSpPr txBox="1"/>
+          <p:nvPr/>
+        </p:nvSpPr>
+        <p:spPr>
+          <a:xfrm>
+            <a:off x="9144000" y="4206240"/>
+            <a:ext cx="237744" cy="201168"/>
           </a:xfrm>
           <a:prstGeom prst="rect">
             <a:avLst/>
@@ -3848,7 +3891,7 @@
               <a:buNone/>
             </a:pPr>
             <a:r>
-              <a:rPr lang="en-US" sz="1000" b="1" dirty="0">
+              <a:rPr lang="en-US" sz="900" b="1" dirty="0">
                 <a:solidFill>
                   <a:srgbClr val="FFFFFF"/>
                 </a:solidFill>
@@ -3858,36 +3901,36 @@
               </a:rPr>
               <a:t>8</a:t>
             </a:r>
-            <a:endParaRPr lang="en-US" sz="1000" dirty="0"/>
-          </a:p>
-        </p:txBody>
-      </p:sp>
-      <p:sp>
-        <p:nvSpPr>
-          <p:cNvPr id="28" name="Text 25"/>
-          <p:cNvSpPr txBox="1"/>
-          <p:nvPr/>
-        </p:nvSpPr>
-        <p:spPr>
-          <a:xfrm>
-            <a:off x="6236208" y="5047488"/>
-            <a:ext cx="5394960" cy="384048"/>
-          </a:xfrm>
-          <a:prstGeom prst="rect">
-            <a:avLst/>
-          </a:prstGeom>
-          <a:noFill/>
-          <a:ln/>
-        </p:spPr>
-        <p:txBody>
-          <a:bodyPr wrap="square" lIns="0" tIns="0" rIns="0" bIns="0" rtlCol="0" anchor="ctr"/>
-          <a:lstStyle/>
-          <a:p>
-            <a:pPr indent="0" marL="0">
-              <a:buNone/>
-            </a:pPr>
-            <a:r>
-              <a:rPr lang="en-US" sz="1250" b="1" dirty="0">
+            <a:endParaRPr lang="en-US" sz="900" dirty="0"/>
+          </a:p>
+        </p:txBody>
+      </p:sp>
+      <p:sp>
+        <p:nvSpPr>
+          <p:cNvPr id="32" name="Text 28"/>
+          <p:cNvSpPr txBox="1"/>
+          <p:nvPr/>
+        </p:nvSpPr>
+        <p:spPr>
+          <a:xfrm>
+            <a:off x="9509760" y="4151376"/>
+            <a:ext cx="2148840" cy="310896"/>
+          </a:xfrm>
+          <a:prstGeom prst="rect">
+            <a:avLst/>
+          </a:prstGeom>
+          <a:noFill/>
+          <a:ln/>
+        </p:spPr>
+        <p:txBody>
+          <a:bodyPr wrap="square" lIns="0" tIns="0" rIns="0" bIns="0" rtlCol="0" anchor="ctr"/>
+          <a:lstStyle/>
+          <a:p>
+            <a:pPr indent="0" marL="0">
+              <a:buNone/>
+            </a:pPr>
+            <a:r>
+              <a:rPr lang="en-US" sz="1100" b="1" dirty="0">
                 <a:solidFill>
                   <a:srgbClr val="12202B"/>
                 </a:solidFill>
@@ -3895,36 +3938,22 @@
                 <a:ea typeface="Calibri" pitchFamily="34" charset="-122"/>
                 <a:cs typeface="Calibri" pitchFamily="34" charset="-120"/>
               </a:rPr>
-              <a:t>Prévisions  </a:t>
-            </a:r>
-            <a:pPr indent="0" marL="0">
-              <a:buNone/>
-            </a:pPr>
-            <a:r>
-              <a:rPr lang="en-US" sz="1100" dirty="0">
-                <a:solidFill>
-                  <a:srgbClr val="5A6B7B"/>
-                </a:solidFill>
-                <a:latin typeface="Calibri" pitchFamily="34" charset="0"/>
-                <a:ea typeface="Calibri" pitchFamily="34" charset="-122"/>
-                <a:cs typeface="Calibri" pitchFamily="34" charset="-120"/>
-              </a:rPr>
-              <a:t>modèle saisonnier et validation</a:t>
-            </a:r>
-            <a:endParaRPr lang="en-US" sz="1250" dirty="0"/>
-          </a:p>
-        </p:txBody>
-      </p:sp>
-      <p:sp>
-        <p:nvSpPr>
-          <p:cNvPr id="29" name="Shape 26"/>
+              <a:t>Prévisions</a:t>
+            </a:r>
+            <a:endParaRPr lang="en-US" sz="1100" dirty="0"/>
+          </a:p>
+        </p:txBody>
+      </p:sp>
+      <p:sp>
+        <p:nvSpPr>
+          <p:cNvPr id="33" name="Shape 29"/>
           <p:cNvSpPr/>
           <p:nvPr/>
         </p:nvSpPr>
         <p:spPr>
           <a:xfrm>
-            <a:off x="5806440" y="5614416"/>
-            <a:ext cx="274320" cy="274320"/>
+            <a:off x="9144000" y="4535424"/>
+            <a:ext cx="237744" cy="237744"/>
           </a:xfrm>
           <a:prstGeom prst="ellipse">
             <a:avLst/>
@@ -3942,14 +3971,14 @@
       </p:sp>
       <p:sp>
         <p:nvSpPr>
-          <p:cNvPr id="30" name="Text 27"/>
-          <p:cNvSpPr txBox="1"/>
-          <p:nvPr/>
-        </p:nvSpPr>
-        <p:spPr>
-          <a:xfrm>
-            <a:off x="5806440" y="5641848"/>
-            <a:ext cx="274320" cy="237744"/>
+          <p:cNvPr id="34" name="Text 30"/>
+          <p:cNvSpPr txBox="1"/>
+          <p:nvPr/>
+        </p:nvSpPr>
+        <p:spPr>
+          <a:xfrm>
+            <a:off x="9144000" y="4553712"/>
+            <a:ext cx="237744" cy="201168"/>
           </a:xfrm>
           <a:prstGeom prst="rect">
             <a:avLst/>
@@ -3965,7 +3994,7 @@
               <a:buNone/>
             </a:pPr>
             <a:r>
-              <a:rPr lang="en-US" sz="1000" b="1" dirty="0">
+              <a:rPr lang="en-US" sz="900" b="1" dirty="0">
                 <a:solidFill>
                   <a:srgbClr val="FFFFFF"/>
                 </a:solidFill>
@@ -3975,45 +4004,31 @@
               </a:rPr>
               <a:t>9</a:t>
             </a:r>
-            <a:endParaRPr lang="en-US" sz="1000" dirty="0"/>
-          </a:p>
-        </p:txBody>
-      </p:sp>
-      <p:sp>
-        <p:nvSpPr>
-          <p:cNvPr id="31" name="Text 28"/>
-          <p:cNvSpPr txBox="1"/>
-          <p:nvPr/>
-        </p:nvSpPr>
-        <p:spPr>
-          <a:xfrm>
-            <a:off x="6236208" y="5559552"/>
-            <a:ext cx="5394960" cy="384048"/>
-          </a:xfrm>
-          <a:prstGeom prst="rect">
-            <a:avLst/>
-          </a:prstGeom>
-          <a:noFill/>
-          <a:ln/>
-        </p:spPr>
-        <p:txBody>
-          <a:bodyPr wrap="square" lIns="0" tIns="0" rIns="0" bIns="0" rtlCol="0" anchor="ctr"/>
-          <a:lstStyle/>
-          <a:p>
-            <a:pPr indent="0" marL="0">
-              <a:buNone/>
-            </a:pPr>
-            <a:r>
-              <a:rPr lang="en-US" sz="1250" b="1" dirty="0">
-                <a:solidFill>
-                  <a:srgbClr val="12202B"/>
-                </a:solidFill>
-                <a:latin typeface="Calibri" pitchFamily="34" charset="0"/>
-                <a:ea typeface="Calibri" pitchFamily="34" charset="-122"/>
-                <a:cs typeface="Calibri" pitchFamily="34" charset="-120"/>
-              </a:rPr>
-              <a:t>Données &amp; méthode  </a:t>
-            </a:r>
+            <a:endParaRPr lang="en-US" sz="900" dirty="0"/>
+          </a:p>
+        </p:txBody>
+      </p:sp>
+      <p:sp>
+        <p:nvSpPr>
+          <p:cNvPr id="35" name="Text 31"/>
+          <p:cNvSpPr txBox="1"/>
+          <p:nvPr/>
+        </p:nvSpPr>
+        <p:spPr>
+          <a:xfrm>
+            <a:off x="9509760" y="4498848"/>
+            <a:ext cx="2148840" cy="310896"/>
+          </a:xfrm>
+          <a:prstGeom prst="rect">
+            <a:avLst/>
+          </a:prstGeom>
+          <a:noFill/>
+          <a:ln/>
+        </p:spPr>
+        <p:txBody>
+          <a:bodyPr wrap="square" lIns="0" tIns="0" rIns="0" bIns="0" rtlCol="0" anchor="ctr"/>
+          <a:lstStyle/>
+          <a:p>
             <a:pPr indent="0" marL="0">
               <a:buNone/>
             </a:pPr>
@@ -4026,26 +4041,26 @@
                 <a:ea typeface="Calibri" pitchFamily="34" charset="-122"/>
                 <a:cs typeface="Calibri" pitchFamily="34" charset="-120"/>
               </a:rPr>
-              <a:t>sources et conventions de lecture</a:t>
-            </a:r>
-            <a:endParaRPr lang="en-US" sz="1250" dirty="0"/>
-          </a:p>
-        </p:txBody>
-      </p:sp>
-      <p:sp>
-        <p:nvSpPr>
-          <p:cNvPr id="32" name="Shape 29"/>
+              <a:t>Données &amp; méthode</a:t>
+            </a:r>
+            <a:endParaRPr lang="en-US" sz="1100" dirty="0"/>
+          </a:p>
+        </p:txBody>
+      </p:sp>
+      <p:sp>
+        <p:nvSpPr>
+          <p:cNvPr id="36" name="Shape 32"/>
           <p:cNvSpPr/>
           <p:nvPr/>
         </p:nvSpPr>
         <p:spPr>
           <a:xfrm>
-            <a:off x="5806440" y="6053328"/>
-            <a:ext cx="5833872" cy="502920"/>
+            <a:off x="9144000" y="4937760"/>
+            <a:ext cx="2496312" cy="1325880"/>
           </a:xfrm>
           <a:prstGeom prst="roundRect">
             <a:avLst>
-              <a:gd name="adj" fmla="val 14545"/>
+              <a:gd name="adj" fmla="val 5517"/>
             </a:avLst>
           </a:prstGeom>
           <a:solidFill>
@@ -4057,18 +4072,64 @@
             </a:solidFill>
             <a:prstDash val="solid"/>
           </a:ln>
-        </p:spPr>
-      </p:sp>
-      <p:sp>
-        <p:nvSpPr>
-          <p:cNvPr id="33" name="Text 30"/>
-          <p:cNvSpPr txBox="1"/>
-          <p:nvPr/>
-        </p:nvSpPr>
-        <p:spPr>
-          <a:xfrm>
-            <a:off x="5989320" y="6126480"/>
-            <a:ext cx="5486400" cy="384048"/>
+          <a:effectLst>
+            <a:outerShdw sx="100000" sy="100000" kx="0" ky="0" algn="bl" rotWithShape="0" blurRad="101600" dist="508" dir="5400000">
+              <a:srgbClr val="9FB3C4">
+                <a:alpha val="28000"/>
+              </a:srgbClr>
+            </a:outerShdw>
+          </a:effectLst>
+        </p:spPr>
+      </p:sp>
+      <p:sp>
+        <p:nvSpPr>
+          <p:cNvPr id="37" name="Text 33"/>
+          <p:cNvSpPr txBox="1"/>
+          <p:nvPr/>
+        </p:nvSpPr>
+        <p:spPr>
+          <a:xfrm>
+            <a:off x="9326880" y="5047488"/>
+            <a:ext cx="2148840" cy="237744"/>
+          </a:xfrm>
+          <a:prstGeom prst="rect">
+            <a:avLst/>
+          </a:prstGeom>
+          <a:noFill/>
+          <a:ln/>
+        </p:spPr>
+        <p:txBody>
+          <a:bodyPr wrap="square" lIns="0" tIns="0" rIns="0" bIns="0" rtlCol="0" anchor="ctr"/>
+          <a:lstStyle/>
+          <a:p>
+            <a:pPr indent="0" marL="0">
+              <a:buNone/>
+            </a:pPr>
+            <a:r>
+              <a:rPr lang="en-US" sz="1050" b="1" dirty="0">
+                <a:solidFill>
+                  <a:srgbClr val="1D8AC1"/>
+                </a:solidFill>
+                <a:latin typeface="Calibri" pitchFamily="34" charset="0"/>
+                <a:ea typeface="Calibri" pitchFamily="34" charset="-122"/>
+                <a:cs typeface="Calibri" pitchFamily="34" charset="-120"/>
+              </a:rPr>
+              <a:t>Ce qui compte</a:t>
+            </a:r>
+            <a:endParaRPr lang="en-US" sz="1050" dirty="0"/>
+          </a:p>
+        </p:txBody>
+      </p:sp>
+      <p:sp>
+        <p:nvSpPr>
+          <p:cNvPr id="38" name="Text 34"/>
+          <p:cNvSpPr txBox="1"/>
+          <p:nvPr/>
+        </p:nvSpPr>
+        <p:spPr>
+          <a:xfrm>
+            <a:off x="9326880" y="5303520"/>
+            <a:ext cx="2148840" cy="868680"/>
           </a:xfrm>
           <a:prstGeom prst="rect">
             <a:avLst/>
@@ -4082,12 +4143,12 @@
           <a:p>
             <a:pPr indent="0" marL="0">
               <a:lnSpc>
-                <a:spcPts val="1300"/>
+                <a:spcPts val="1200"/>
               </a:lnSpc>
               <a:buNone/>
             </a:pPr>
             <a:r>
-              <a:rPr lang="en-US" sz="1050" dirty="0">
+              <a:rPr lang="en-US" sz="900" dirty="0">
                 <a:solidFill>
                   <a:srgbClr val="5A6B7B"/>
                 </a:solidFill>
@@ -4095,9 +4156,9 @@
                 <a:ea typeface="Calibri" pitchFamily="34" charset="-122"/>
                 <a:cs typeface="Calibri" pitchFamily="34" charset="-120"/>
               </a:rPr>
-              <a:t>Aucune connexion à MySQL : tout passe par l'API. Si elle tombe, le badge passe au rouge et chaque graphique affiche l'erreur — la session ne tombe jamais.</a:t>
-            </a:r>
-            <a:endParaRPr lang="en-US" sz="1050" dirty="0"/>
+              <a:t>Aucune connexion à MySQL : tout passe par l'API. Filtres, tri et pagination sont exécutés côté serveur, le dashboard ne charge qu'une page à la fois. Démonstration live sur les onglets Vols et Carte.</a:t>
+            </a:r>
+            <a:endParaRPr lang="en-US" sz="900" dirty="0"/>
           </a:p>
         </p:txBody>
       </p:sp>
